--- a/Гимн_Санкт-Петербурга_презентация.pptx
+++ b/Гимн_Санкт-Петербурга_презентация.pptx
@@ -12,10 +12,9 @@
     <p:sldId id="260" r:id="rId6"/>
     <p:sldId id="261" r:id="rId7"/>
     <p:sldId id="262" r:id="rId8"/>
-    <p:sldId id="263" r:id="rId9"/>
   </p:sldIdLst>
   <p:notesMasterIdLst>
-    <p:notesMasterId r:id="rId10"/>
+    <p:notesMasterId r:id="rId9"/>
   </p:notesMasterIdLst>
   <p:sldSz cx="12192000" cy="6858000"/>
   <p:notesSz cx="6858000" cy="12192000"/>
@@ -597,7 +596,10 @@
           <a:p>
             <a:r>
               <a:rPr lang="en-US" dirty="0"/>
-              <a:t/>
+              <a:t>Здравствуйте! У каждой страны есть гимн — его знают все. А вот то, что свой гимн есть и у города, многие даже не замечают. Хотя мы слышим его гораздо чаще, чем думаем: он звучит на Московском вокзале, когда прибывает поезд, на городских праздниках, на торжественных церемониях и в День города. Мелодия знакомая до мурашек — а если спросить, кто её написал и о чём там поётся, ответят единицы. Наш проект как раз об этом: мы взяли гимн Санкт-Петербурга — «Гимн великому городу» — и разобрались, откуда он взялся, что в нём зашифровано и зачем он вообще нужен современному городу.
+Цель: изучить историю создания, символику и значение гимна Санкт-Петербурга и рассказать о нём так, чтобы после нашего выступления любой одноклассник мог объяснить, что это за музыка и почему она у города именно такая.
+Задачи: узнать, кто написал музыку и слова гимна и при каких обстоятельствах он создавался; разобраться, как гимн стал официальным символом города и что говорит об этом закон; проанализировать музыку и текст: какими средствами композитор передаёт характер Петербурга; сравнить наш гимн с гимном другого региона и найти сходства и различия; провести опрос и выяснить, как к гимну относятся сами петербуржцы; сделать вывод о том, какую роль гимн играет в жизни города сегодня.
+Гипотеза: мы предположили, что гимн Петербурга любят и узнают не за слова, а за музыку — и что большинство горожан не смогут назвать ни автора, ни текст. В конце проверим, так ли это.</a:t>
             </a:r>
             <a:endParaRPr lang="en-US" dirty="0"/>
           </a:p>
@@ -685,10 +687,9 @@
           <a:p>
             <a:r>
               <a:rPr lang="en-US" dirty="0"/>
-              <a:t>Здравствуйте! У каждой страны есть гимн — его знают все. А вот то, что свой гимн есть и у города, многие даже не замечают. Хотя мы слышим его гораздо чаще, чем думаем: он звучит на Московском вокзале, когда прибывает поезд, на городских праздниках, на торжественных церемониях и в День города. Мелодия знакомая до мурашек — а если спросить, кто её написал и о чём там поётся, ответят единицы. Наш проект как раз об этом: мы взяли гимн Санкт-Петербурга — «Гимн великому городу» — и разобрались, откуда он взялся, что в нём зашифровано и зачем он вообще нужен современному городу.
-Цель: изучить историю создания, символику и значение гимна Санкт-Петербурга и рассказать о нём так, чтобы после нашего выступления любой одноклассник мог объяснить, что это за музыка и почему она у города именно такая.
-Задачи: узнать, кто написал музыку и слова гимна и при каких обстоятельствах он создавался; разобраться, как гимн стал официальным символом города и что говорит об этом закон; проанализировать музыку и текст: какими средствами композитор передаёт характер Петербурга; сравнить наш гимн с гимном другого региона и найти сходства и различия; провести опрос и выяснить, как к гимну относятся сами петербуржцы; сделать вывод о том, какую роль гимн играет в жизни города сегодня.
-Гипотеза: мы предположили, что гимн Петербурга любят и узнают не за слова, а за музыку — и что большинство горожан не смогут назвать ни автора, ни текст. В конце проверим, так ли это.</a:t>
+              <a:t>Самое интересное, что гимном эта музыка была задумана не сразу. Её написал композитор Рейнгольд Морицевич Глиэр — в конце 1940-х годов он работал над балетом «Медный всадник» по поэме Пушкина. Балет поставили в Ленинграде, в Кировском театре — сегодня это Мариинский. Финал спектакля Глиэр назвал «Гимн великому городу»: торжественная, широкая мелодия, под которую на сцене как будто вырастает сам Петербург. Важно понимать, когда это было: город только-только пережил блокаду, стоял в руинах и восстанавливался. Музыка о великом городе, который не сломить, звучала тогда совсем не как красивая декорация — она попадала прямо в сердце. Зал принял финал так, что мелодия быстро зажила своей отдельной жизнью: её играли на концертах и по радио, и постепенно она стала музыкальным лицом Ленинграда.
+Официальным символом мелодия Глиэра стала в 1991 году — в том самом, когда городу вернули историческое имя Санкт-Петербург. Но всё это время у гимна была одна странность: музыка есть, а слов нет. Их пытались написать не раз, варианты обсуждали и отклоняли — слишком трудно было подобрать текст, который не испортил бы такую мелодию. Слова появились только в 2003 году, к 300-летию города: их автором стал петербургский поэт Олег Чупров, и текст утвердили городским законом.
+Любопытная деталь: получается, гимн Петербурга — это фрагмент балета. Не специально заказанная «официальная» музыка, а кусок театрального спектакля, который город выбрал себе сам, потому что узнал в нём себя.</a:t>
             </a:r>
             <a:endParaRPr lang="en-US" dirty="0"/>
           </a:p>
@@ -776,9 +777,10 @@
           <a:p>
             <a:r>
               <a:rPr lang="en-US" dirty="0"/>
-              <a:t>Самое интересное, что гимном эта музыка была задумана не сразу. Её написал композитор Рейнгольд Морицевич Глиэр — в конце 1940-х годов он работал над балетом «Медный всадник» по поэме Пушкина. Балет поставили в Ленинграде, в Кировском театре — сегодня это Мариинский. Финал спектакля Глиэр назвал «Гимн великому городу»: торжественная, широкая мелодия, под которую на сцене как будто вырастает сам Петербург. Важно понимать, когда это было: город только-только пережил блокаду, стоял в руинах и восстанавливался. Музыка о великом городе, который не сломить, звучала тогда совсем не как красивая декорация — она попадала прямо в сердце. Зал принял финал так, что мелодия быстро зажила своей отдельной жизнью: её играли на концертах и по радио, и постепенно она стала музыкальным лицом Ленинграда.
-Официальным символом мелодия Глиэра стала в 1991 году — в том самом, когда городу вернули историческое имя Санкт-Петербург. Но всё это время у гимна была одна странность: музыка есть, а слов нет. Их пытались написать не раз, варианты обсуждали и отклоняли — слишком трудно было подобрать текст, который не испортил бы такую мелодию. Слова появились только в 2003 году, к 300-летию города: их автором стал петербургский поэт Олег Чупров, и текст утвердили городским законом.
-Любопытная деталь: получается, гимн Петербурга — это фрагмент балета. Не специально заказанная «официальная» музыка, а кусок театрального спектакля, который город выбрал себе сам, потому что узнал в нём себя.</a:t>
+              <a:t>Теперь самое интересное — почему эта музыка «звучит как Петербург». Гимн начинается не с бодрого марша, а с широкой, тяжёлой и величественной темы. Темп медленный, шаг — как у большой торжественной процессии. Мощно вступают духовые и медь, звучание плотное, «каменное». Это очень точно: Петербург — город строгих линий, гранитных набережных, колонн и дворцов. В нём нет суеты, он размеренный и немного холодный. Мелодия при этом не агрессивная — она торжественная и гордая. А широкие, «разливающиеся» фразы легко услышать как Неву и простор, который открывается с набережной.
+Есть и второй слой, литературный. Музыка родилась в балете о «Медном всаднике», а это главный символ города — памятник Петру I, основателю Петербурга. То есть в гимн изначально вшита тема основания города, его создания из ничего, на болотах, силой воли. Отсюда и ощущение монументальности.
+Текст Олега Чупрова продолжает ту же линию — он начинается со слов о державном граде над Невою. В нём нет ни одного лишнего слова про политику или власть: речь идёт о городе, о реке, о славе, о верности и о людях, которые этот город любят и берегут. Гимн Петербурга получился не про государство, а про сам город.
+Главная мысль: услышав первые такты, человек, ни разу не бывавший здесь, всё равно поймёт — речь о чём-то большом, старинном и величественном.</a:t>
             </a:r>
             <a:endParaRPr lang="en-US" dirty="0"/>
           </a:p>
@@ -866,10 +868,10 @@
           <a:p>
             <a:r>
               <a:rPr lang="en-US" dirty="0"/>
-              <a:t>Теперь самое интересное — почему эта музыка «звучит как Петербург». Гимн начинается не с бодрого марша, а с широкой, тяжёлой и величественной темы. Темп медленный, шаг — как у большой торжественной процессии. Мощно вступают духовые и медь, звучание плотное, «каменное». Это очень точно: Петербург — город строгих линий, гранитных набережных, колонн и дворцов. В нём нет суеты, он размеренный и немного холодный. Мелодия при этом не агрессивная — она торжественная и гордая. А широкие, «разливающиеся» фразы легко услышать как Неву и простор, который открывается с набережной.
-Есть и второй слой, литературный. Музыка родилась в балете о «Медном всаднике», а это главный символ города — памятник Петру I, основателю Петербурга. То есть в гимн изначально вшита тема основания города, его создания из ничего, на болотах, силой воли. Отсюда и ощущение монументальности.
-Текст Олега Чупрова продолжает ту же линию — он начинается со слов о державном граде над Невою. В нём нет ни одного лишнего слова про политику или власть: речь идёт о городе, о реке, о славе, о верности и о людях, которые этот город любят и берегут. Гимн Петербурга получился не про государство, а про сам город.
-Главная мысль: услышав первые такты, человек, ни разу не бывавший здесь, всё равно поймёт — речь о чём-то большом, старинном и величественном.</a:t>
+              <a:t>Теория теорией, но нам было интересно, как к гимну относятся живые люди. Поэтому мы сделали практическую часть из трёх шагов. Первое — слушали: включали гимн знакомым без объявления и просили сказать, узнают ли они мелодию и какие чувства она вызывает. Второе — опрашивали: задавали несколько простых вопросов родным, друзьям и одноклассникам. Третье — сравнивали наш гимн с гимном Москвы.
+Сравнение получилось показательным. Гимн Москвы — «Дорогая моя столица» на музыку Исаака Дунаевского — это песня: у неё есть припев, её легко подхватить и спеть хором. Наш гимн устроен иначе: это оркестровая пьеса, которую сложно петь, зато невозможно ни с чем спутать. Москва в своём гимне поёт о себе как о любимой столице, тепло и по-домашнему. Петербург — молчит и звучит: строго, величественно, на расстоянии.
+Главный вывод опроса такой: мелодию узнают почти все — и почти никто не может назвать автора или процитировать хоть строчку текста. При этом отношение к гимну у людей тёплое: его называют красивым, «мурашечным», связывают с вокзалом, возвращением домой и Днём города. Наша гипотеза подтвердилась: петербуржцы любят свой гимн именно как музыку, а не как текст.
+(Впишите в таблицу реальные ответы своих респондентов перед защитой.)</a:t>
             </a:r>
             <a:endParaRPr lang="en-US" dirty="0"/>
           </a:p>
@@ -957,10 +959,9 @@
           <a:p>
             <a:r>
               <a:rPr lang="en-US" dirty="0"/>
-              <a:t>Теория теорией, но нам было интересно, как к гимну относятся живые люди. Поэтому мы сделали практическую часть из трёх шагов. Первое — слушали: включали гимн знакомым без объявления и просили сказать, узнают ли они мелодию и какие чувства она вызывает. Второе — опрашивали: задавали несколько простых вопросов родным, друзьям и одноклассникам. Третье — сравнивали наш гимн с гимном Москвы.
-Сравнение получилось показательным. Гимн Москвы — «Дорогая моя столица» на музыку Исаака Дунаевского — это песня: у неё есть припев, её легко подхватить и спеть хором. Наш гимн устроен иначе: это оркестровая пьеса, которую сложно петь, зато невозможно ни с чем спутать. Москва в своём гимне поёт о себе как о любимой столице, тепло и по-домашнему. Петербург — молчит и звучит: строго, величественно, на расстоянии.
-Главный вывод опроса такой: мелодию узнают почти все — и почти никто не может назвать автора или процитировать хоть строчку текста. При этом отношение к гимну у людей тёплое: его называют красивым, «мурашечным», связывают с вокзалом, возвращением домой и Днём города. Наша гипотеза подтвердилась: петербуржцы любят свой гимн именно как музыку, а не как текст.
-(Впишите в таблицу реальные ответы своих респондентов перед защитой.)</a:t>
+              <a:t>Мы начинали с простого вопроса — что мы вообще знаем о гимне своего города, кроме того, что он красивый. Оказалось, что за этой мелодией стоит целая история: музыка из балета о «Медном всаднике», написанная Глиэром в годы, когда город поднимался после блокады; полвека жизни без слов; официальный статус в 1991-м и текст Олега Чупрова, появившийся только к 300-летию города.
+Главное, что мы поняли: гимн — это не формальность из списка символов рядом с гербом и флагом. Это способ города рассказать о себе. Герб можно нарисовать, флаг — вывесить, а гимн человек чувствует: он слышит его на вокзале, на празднике, в День Победы — и в этот момент ощущает себя частью города. Именно поэтому мелодия Глиэра пережила и смену эпохи, и смену названия города. Петербург однажды узнал в ней себя — и не отпускает до сих пор.
+Спасибо за внимание!</a:t>
             </a:r>
             <a:endParaRPr lang="en-US" dirty="0"/>
           </a:p>
@@ -1048,9 +1049,7 @@
           <a:p>
             <a:r>
               <a:rPr lang="en-US" dirty="0"/>
-              <a:t>Мы начинали с простого вопроса — что мы вообще знаем о гимне своего города, кроме того, что он красивый. Оказалось, что за этой мелодией стоит целая история: музыка из балета о «Медном всаднике», написанная Глиэром в годы, когда город поднимался после блокады; полвека жизни без слов; официальный статус в 1991-м и текст Олега Чупрова, появившийся только к 300-летию города.
-Главное, что мы поняли: гимн — это не формальность из списка символов рядом с гербом и флагом. Это способ города рассказать о себе. Герб можно нарисовать, флаг — вывесить, а гимн человек чувствует: он слышит его на вокзале, на празднике, в День Победы — и в этот момент ощущает себя частью города. Именно поэтому мелодия Глиэра пережила и смену эпохи, и смену названия города. Петербург однажды узнал в ней себя — и не отпускает до сих пор.
-Спасибо за внимание!</a:t>
+              <a:t>Источники для проверки фактов перед защитой. Спасибо за внимание!</a:t>
             </a:r>
             <a:endParaRPr lang="en-US" dirty="0"/>
           </a:p>
@@ -1074,94 +1073,6 @@
             <a:fld id="{F7021451-1387-4CA6-816F-3879F97B5CBC}" type="slidenum">
               <a:rPr lang="en-US"/>
               <a:t>7</a:t>
-            </a:fld>
-            <a:endParaRPr lang="en-US"/>
-          </a:p>
-        </p:txBody>
-      </p:sp>
-    </p:spTree>
-    <p:extLst>
-      <p:ext uri="{BB962C8B-B14F-4D97-AF65-F5344CB8AC3E}">
-        <p14:creationId xmlns:p14="http://schemas.microsoft.com/office/powerpoint/2010/main" val="1024086991"/>
-      </p:ext>
-    </p:extLst>
-  </p:cSld>
-  <p:clrMapOvr>
-    <a:masterClrMapping/>
-  </p:clrMapOvr>
-</p:notes>
-</file>
-
-<file path=ppt/notesSlides/notesSlide8.xml><?xml version="1.0" encoding="utf-8"?>
-<p:notes xmlns:a="http://schemas.openxmlformats.org/drawingml/2006/main" xmlns:r="http://schemas.openxmlformats.org/officeDocument/2006/relationships" xmlns:p="http://schemas.openxmlformats.org/presentationml/2006/main">
-  <p:cSld>
-    <p:spTree>
-      <p:nvGrpSpPr>
-        <p:cNvPr id="1" name=""/>
-        <p:cNvGrpSpPr/>
-        <p:nvPr/>
-      </p:nvGrpSpPr>
-      <p:grpSpPr>
-        <a:xfrm>
-          <a:off x="0" y="0"/>
-          <a:ext cx="0" cy="0"/>
-          <a:chOff x="0" y="0"/>
-          <a:chExt cx="0" cy="0"/>
-        </a:xfrm>
-      </p:grpSpPr>
-      <p:sp>
-        <p:nvSpPr>
-          <p:cNvPr id="2" name="Slide Image Placeholder 1"/>
-          <p:cNvSpPr>
-            <a:spLocks noGrp="1" noRot="1" noChangeAspect="1"/>
-          </p:cNvSpPr>
-          <p:nvPr>
-            <p:ph type="sldImg"/>
-          </p:nvPr>
-        </p:nvSpPr>
-        <p:spPr/>
-      </p:sp>
-      <p:sp>
-        <p:nvSpPr>
-          <p:cNvPr id="3" name="Notes Placeholder 2"/>
-          <p:cNvSpPr>
-            <a:spLocks noGrp="1"/>
-          </p:cNvSpPr>
-          <p:nvPr>
-            <p:ph type="body" idx="1"/>
-          </p:nvPr>
-        </p:nvSpPr>
-        <p:spPr/>
-        <p:txBody>
-          <a:bodyPr/>
-          <a:lstStyle/>
-          <a:p>
-            <a:r>
-              <a:rPr lang="en-US" dirty="0"/>
-              <a:t>Источники для проверки фактов перед защитой. Спасибо за внимание!</a:t>
-            </a:r>
-            <a:endParaRPr lang="en-US" dirty="0"/>
-          </a:p>
-        </p:txBody>
-      </p:sp>
-      <p:sp>
-        <p:nvSpPr>
-          <p:cNvPr id="4" name="Slide Number Placeholder 3"/>
-          <p:cNvSpPr>
-            <a:spLocks noGrp="1"/>
-          </p:cNvSpPr>
-          <p:nvPr>
-            <p:ph type="sldNum" sz="quarter" idx="10"/>
-          </p:nvPr>
-        </p:nvSpPr>
-        <p:spPr/>
-        <p:txBody>
-          <a:bodyPr/>
-          <a:lstStyle/>
-          <a:p>
-            <a:fld id="{F7021451-1387-4CA6-816F-3879F97B5CBC}" type="slidenum">
-              <a:rPr lang="en-US"/>
-              <a:t>8</a:t>
             </a:fld>
             <a:endParaRPr lang="en-US"/>
           </a:p>
@@ -2156,6 +2067,849 @@
     <p:bg>
       <p:bgPr>
         <a:solidFill>
+          <a:srgbClr val="FFFFFF"/>
+        </a:solidFill>
+      </p:bgPr>
+    </p:bg>
+    <p:spTree>
+      <p:nvGrpSpPr>
+        <p:cNvPr id="1" name=""/>
+        <p:cNvGrpSpPr/>
+        <p:nvPr/>
+      </p:nvGrpSpPr>
+      <p:grpSpPr>
+        <a:xfrm>
+          <a:off x="0" y="0"/>
+          <a:ext cx="0" cy="0"/>
+          <a:chOff x="0" y="0"/>
+          <a:chExt cx="0" cy="0"/>
+        </a:xfrm>
+      </p:grpSpPr>
+      <p:sp>
+        <p:nvSpPr>
+          <p:cNvPr id="2" name="Shape 0"/>
+          <p:cNvSpPr/>
+          <p:nvPr/>
+        </p:nvSpPr>
+        <p:spPr>
+          <a:xfrm>
+            <a:off x="0" y="0"/>
+            <a:ext cx="4206240" cy="6858000"/>
+          </a:xfrm>
+          <a:prstGeom prst="rect">
+            <a:avLst/>
+          </a:prstGeom>
+          <a:solidFill>
+            <a:srgbClr val="10253C"/>
+          </a:solidFill>
+          <a:ln/>
+        </p:spPr>
+      </p:sp>
+      <p:sp>
+        <p:nvSpPr>
+          <p:cNvPr id="3" name="Shape 1"/>
+          <p:cNvSpPr/>
+          <p:nvPr/>
+        </p:nvSpPr>
+        <p:spPr>
+          <a:xfrm>
+            <a:off x="640080" y="548640"/>
+            <a:ext cx="640080" cy="640080"/>
+          </a:xfrm>
+          <a:prstGeom prst="ellipse">
+            <a:avLst/>
+          </a:prstGeom>
+          <a:solidFill>
+            <a:srgbClr val="C99A3E"/>
+          </a:solidFill>
+          <a:ln/>
+        </p:spPr>
+      </p:sp>
+      <p:sp>
+        <p:nvSpPr>
+          <p:cNvPr id="4" name="Text 2"/>
+          <p:cNvSpPr txBox="1"/>
+          <p:nvPr/>
+        </p:nvSpPr>
+        <p:spPr>
+          <a:xfrm>
+            <a:off x="640080" y="548640"/>
+            <a:ext cx="640080" cy="640080"/>
+          </a:xfrm>
+          <a:prstGeom prst="rect">
+            <a:avLst/>
+          </a:prstGeom>
+          <a:noFill/>
+          <a:ln/>
+        </p:spPr>
+        <p:txBody>
+          <a:bodyPr wrap="square" lIns="0" tIns="0" rIns="0" bIns="0" rtlCol="0" anchor="ctr"/>
+          <a:lstStyle/>
+          <a:p>
+            <a:pPr algn="ctr" indent="0" marL="0">
+              <a:buNone/>
+            </a:pPr>
+            <a:r>
+              <a:rPr lang="en-US" sz="2200" b="1" dirty="0">
+                <a:solidFill>
+                  <a:srgbClr val="10253C"/>
+                </a:solidFill>
+                <a:latin typeface="Cambria" pitchFamily="34" charset="0"/>
+                <a:ea typeface="Cambria" pitchFamily="34" charset="-122"/>
+                <a:cs typeface="Cambria" pitchFamily="34" charset="-120"/>
+              </a:rPr>
+              <a:t>1</a:t>
+            </a:r>
+            <a:endParaRPr lang="en-US" sz="2200" dirty="0"/>
+          </a:p>
+        </p:txBody>
+      </p:sp>
+      <p:sp>
+        <p:nvSpPr>
+          <p:cNvPr id="5" name="Text 3"/>
+          <p:cNvSpPr txBox="1"/>
+          <p:nvPr/>
+        </p:nvSpPr>
+        <p:spPr>
+          <a:xfrm>
+            <a:off x="1463040" y="566928"/>
+            <a:ext cx="2377440" cy="457200"/>
+          </a:xfrm>
+          <a:prstGeom prst="rect">
+            <a:avLst/>
+          </a:prstGeom>
+          <a:noFill/>
+          <a:ln/>
+        </p:spPr>
+        <p:txBody>
+          <a:bodyPr wrap="square" lIns="0" tIns="0" rIns="0" bIns="0" rtlCol="0" anchor="ctr"/>
+          <a:lstStyle/>
+          <a:p>
+            <a:pPr indent="0" marL="0">
+              <a:buNone/>
+            </a:pPr>
+            <a:r>
+              <a:rPr lang="en-US" sz="2000" b="1" dirty="0">
+                <a:solidFill>
+                  <a:srgbClr val="FFFFFF"/>
+                </a:solidFill>
+                <a:latin typeface="Cambria" pitchFamily="34" charset="0"/>
+                <a:ea typeface="Cambria" pitchFamily="34" charset="-122"/>
+                <a:cs typeface="Cambria" pitchFamily="34" charset="-120"/>
+              </a:rPr>
+              <a:t>Никита</a:t>
+            </a:r>
+            <a:endParaRPr lang="en-US" sz="2000" dirty="0"/>
+          </a:p>
+        </p:txBody>
+      </p:sp>
+      <p:sp>
+        <p:nvSpPr>
+          <p:cNvPr id="6" name="Text 4"/>
+          <p:cNvSpPr txBox="1"/>
+          <p:nvPr/>
+        </p:nvSpPr>
+        <p:spPr>
+          <a:xfrm>
+            <a:off x="1463040" y="987552"/>
+            <a:ext cx="2560320" cy="320040"/>
+          </a:xfrm>
+          <a:prstGeom prst="rect">
+            <a:avLst/>
+          </a:prstGeom>
+          <a:noFill/>
+          <a:ln/>
+        </p:spPr>
+        <p:txBody>
+          <a:bodyPr wrap="square" lIns="0" tIns="0" rIns="0" bIns="0" rtlCol="0" anchor="ctr"/>
+          <a:lstStyle/>
+          <a:p>
+            <a:pPr indent="0" marL="0">
+              <a:buNone/>
+            </a:pPr>
+            <a:r>
+              <a:rPr lang="en-US" sz="1100" i="1" dirty="0">
+                <a:solidFill>
+                  <a:srgbClr val="9FB3CC"/>
+                </a:solidFill>
+                <a:latin typeface="Calibri" pitchFamily="34" charset="0"/>
+                <a:ea typeface="Calibri" pitchFamily="34" charset="-122"/>
+                <a:cs typeface="Calibri" pitchFamily="34" charset="-120"/>
+              </a:rPr>
+              <a:t>вступление · цель · задачи</a:t>
+            </a:r>
+            <a:endParaRPr lang="en-US" sz="1100" dirty="0"/>
+          </a:p>
+        </p:txBody>
+      </p:sp>
+      <p:sp>
+        <p:nvSpPr>
+          <p:cNvPr id="7" name="Text 5"/>
+          <p:cNvSpPr txBox="1"/>
+          <p:nvPr/>
+        </p:nvSpPr>
+        <p:spPr>
+          <a:xfrm>
+            <a:off x="640080" y="1828800"/>
+            <a:ext cx="3200400" cy="2926080"/>
+          </a:xfrm>
+          <a:prstGeom prst="rect">
+            <a:avLst/>
+          </a:prstGeom>
+          <a:noFill/>
+          <a:ln/>
+        </p:spPr>
+        <p:txBody>
+          <a:bodyPr wrap="square" lIns="0" tIns="0" rIns="0" bIns="0" rtlCol="0" anchor="ctr"/>
+          <a:lstStyle/>
+          <a:p>
+            <a:pPr indent="0" marL="0">
+              <a:lnSpc>
+                <a:spcPct val="125000"/>
+              </a:lnSpc>
+              <a:buNone/>
+            </a:pPr>
+            <a:r>
+              <a:rPr lang="en-US" sz="1450" i="1" dirty="0">
+                <a:solidFill>
+                  <a:srgbClr val="EAF0F7"/>
+                </a:solidFill>
+                <a:latin typeface="Calibri" pitchFamily="34" charset="0"/>
+                <a:ea typeface="Calibri" pitchFamily="34" charset="-122"/>
+                <a:cs typeface="Calibri" pitchFamily="34" charset="-120"/>
+              </a:rPr>
+              <a:t>Мы слышим гимн города чаще, чем замечаем: на вокзале, на празднике, в День города.</a:t>
+            </a:r>
+            <a:endParaRPr lang="en-US" sz="1450" dirty="0"/>
+          </a:p>
+          <a:p>
+            <a:pPr indent="0" marL="0">
+              <a:lnSpc>
+                <a:spcPct val="125000"/>
+              </a:lnSpc>
+              <a:buNone/>
+            </a:pPr>
+            <a:endParaRPr lang="en-US" sz="1450" dirty="0"/>
+          </a:p>
+          <a:p>
+            <a:pPr indent="0" marL="0">
+              <a:lnSpc>
+                <a:spcPct val="125000"/>
+              </a:lnSpc>
+              <a:buNone/>
+            </a:pPr>
+            <a:r>
+              <a:rPr lang="en-US" sz="1450" i="1" dirty="0">
+                <a:solidFill>
+                  <a:srgbClr val="EAF0F7"/>
+                </a:solidFill>
+                <a:latin typeface="Calibri" pitchFamily="34" charset="0"/>
+                <a:ea typeface="Calibri" pitchFamily="34" charset="-122"/>
+                <a:cs typeface="Calibri" pitchFamily="34" charset="-120"/>
+              </a:rPr>
+              <a:t>Но кто его написал и о чём он — знают единицы.</a:t>
+            </a:r>
+            <a:endParaRPr lang="en-US" sz="1450" dirty="0"/>
+          </a:p>
+        </p:txBody>
+      </p:sp>
+      <p:sp>
+        <p:nvSpPr>
+          <p:cNvPr id="8" name="Text 6"/>
+          <p:cNvSpPr txBox="1"/>
+          <p:nvPr/>
+        </p:nvSpPr>
+        <p:spPr>
+          <a:xfrm>
+            <a:off x="640080" y="5806440"/>
+            <a:ext cx="3200400" cy="548640"/>
+          </a:xfrm>
+          <a:prstGeom prst="rect">
+            <a:avLst/>
+          </a:prstGeom>
+          <a:noFill/>
+          <a:ln/>
+        </p:spPr>
+        <p:txBody>
+          <a:bodyPr wrap="square" lIns="0" tIns="0" rIns="0" bIns="0" rtlCol="0" anchor="ctr"/>
+          <a:lstStyle/>
+          <a:p>
+            <a:pPr indent="0" marL="0">
+              <a:buNone/>
+            </a:pPr>
+            <a:r>
+              <a:rPr lang="en-US" sz="1300" b="1" dirty="0">
+                <a:solidFill>
+                  <a:srgbClr val="C99A3E"/>
+                </a:solidFill>
+                <a:latin typeface="Cambria" pitchFamily="34" charset="0"/>
+                <a:ea typeface="Cambria" pitchFamily="34" charset="-122"/>
+                <a:cs typeface="Cambria" pitchFamily="34" charset="-120"/>
+              </a:rPr>
+              <a:t>«Гимн великому городу»</a:t>
+            </a:r>
+            <a:endParaRPr lang="en-US" sz="1300" dirty="0"/>
+          </a:p>
+        </p:txBody>
+      </p:sp>
+      <p:sp>
+        <p:nvSpPr>
+          <p:cNvPr id="9" name="Text 7"/>
+          <p:cNvSpPr txBox="1"/>
+          <p:nvPr/>
+        </p:nvSpPr>
+        <p:spPr>
+          <a:xfrm>
+            <a:off x="4663440" y="594360"/>
+            <a:ext cx="6675120" cy="365760"/>
+          </a:xfrm>
+          <a:prstGeom prst="rect">
+            <a:avLst/>
+          </a:prstGeom>
+          <a:noFill/>
+          <a:ln/>
+        </p:spPr>
+        <p:txBody>
+          <a:bodyPr wrap="square" lIns="0" tIns="0" rIns="0" bIns="0" rtlCol="0" anchor="ctr"/>
+          <a:lstStyle/>
+          <a:p>
+            <a:pPr indent="0" marL="0">
+              <a:buNone/>
+            </a:pPr>
+            <a:r>
+              <a:rPr lang="en-US" sz="1300" b="1" spc="200" kern="0" dirty="0">
+                <a:solidFill>
+                  <a:srgbClr val="C99A3E"/>
+                </a:solidFill>
+                <a:latin typeface="Calibri" pitchFamily="34" charset="0"/>
+                <a:ea typeface="Calibri" pitchFamily="34" charset="-122"/>
+                <a:cs typeface="Calibri" pitchFamily="34" charset="-120"/>
+              </a:rPr>
+              <a:t>ЦЕЛЬ</a:t>
+            </a:r>
+            <a:endParaRPr lang="en-US" sz="1300" dirty="0"/>
+          </a:p>
+        </p:txBody>
+      </p:sp>
+      <p:sp>
+        <p:nvSpPr>
+          <p:cNvPr id="10" name="Text 8"/>
+          <p:cNvSpPr txBox="1"/>
+          <p:nvPr/>
+        </p:nvSpPr>
+        <p:spPr>
+          <a:xfrm>
+            <a:off x="4663440" y="960120"/>
+            <a:ext cx="6675120" cy="914400"/>
+          </a:xfrm>
+          <a:prstGeom prst="rect">
+            <a:avLst/>
+          </a:prstGeom>
+          <a:noFill/>
+          <a:ln/>
+        </p:spPr>
+        <p:txBody>
+          <a:bodyPr wrap="square" lIns="0" tIns="0" rIns="0" bIns="0" rtlCol="0" anchor="ctr"/>
+          <a:lstStyle/>
+          <a:p>
+            <a:pPr indent="0" marL="0">
+              <a:lnSpc>
+                <a:spcPct val="120000"/>
+              </a:lnSpc>
+              <a:buNone/>
+            </a:pPr>
+            <a:r>
+              <a:rPr lang="en-US" sz="1400" dirty="0">
+                <a:solidFill>
+                  <a:srgbClr val="1A2733"/>
+                </a:solidFill>
+                <a:latin typeface="Calibri" pitchFamily="34" charset="0"/>
+                <a:ea typeface="Calibri" pitchFamily="34" charset="-122"/>
+                <a:cs typeface="Calibri" pitchFamily="34" charset="-120"/>
+              </a:rPr>
+              <a:t>Изучить историю создания, символику и значение гимна Санкт-Петербурга — и рассказать о нём так, чтобы каждый мог объяснить, что это за музыка и почему она именно такая.</a:t>
+            </a:r>
+            <a:endParaRPr lang="en-US" sz="1400" dirty="0"/>
+          </a:p>
+        </p:txBody>
+      </p:sp>
+      <p:sp>
+        <p:nvSpPr>
+          <p:cNvPr id="11" name="Text 9"/>
+          <p:cNvSpPr txBox="1"/>
+          <p:nvPr/>
+        </p:nvSpPr>
+        <p:spPr>
+          <a:xfrm>
+            <a:off x="4663440" y="1965960"/>
+            <a:ext cx="6675120" cy="365760"/>
+          </a:xfrm>
+          <a:prstGeom prst="rect">
+            <a:avLst/>
+          </a:prstGeom>
+          <a:noFill/>
+          <a:ln/>
+        </p:spPr>
+        <p:txBody>
+          <a:bodyPr wrap="square" lIns="0" tIns="0" rIns="0" bIns="0" rtlCol="0" anchor="ctr"/>
+          <a:lstStyle/>
+          <a:p>
+            <a:pPr indent="0" marL="0">
+              <a:buNone/>
+            </a:pPr>
+            <a:r>
+              <a:rPr lang="en-US" sz="1300" b="1" spc="200" kern="0" dirty="0">
+                <a:solidFill>
+                  <a:srgbClr val="C99A3E"/>
+                </a:solidFill>
+                <a:latin typeface="Calibri" pitchFamily="34" charset="0"/>
+                <a:ea typeface="Calibri" pitchFamily="34" charset="-122"/>
+                <a:cs typeface="Calibri" pitchFamily="34" charset="-120"/>
+              </a:rPr>
+              <a:t>ЗАДАЧИ</a:t>
+            </a:r>
+            <a:endParaRPr lang="en-US" sz="1300" dirty="0"/>
+          </a:p>
+        </p:txBody>
+      </p:sp>
+      <p:sp>
+        <p:nvSpPr>
+          <p:cNvPr id="12" name="Shape 10"/>
+          <p:cNvSpPr/>
+          <p:nvPr/>
+        </p:nvSpPr>
+        <p:spPr>
+          <a:xfrm>
+            <a:off x="4663440" y="2423160"/>
+            <a:ext cx="201168" cy="201168"/>
+          </a:xfrm>
+          <a:prstGeom prst="ellipse">
+            <a:avLst/>
+          </a:prstGeom>
+          <a:solidFill>
+            <a:srgbClr val="C99A3E"/>
+          </a:solidFill>
+          <a:ln/>
+        </p:spPr>
+      </p:sp>
+      <p:sp>
+        <p:nvSpPr>
+          <p:cNvPr id="13" name="Text 11"/>
+          <p:cNvSpPr txBox="1"/>
+          <p:nvPr/>
+        </p:nvSpPr>
+        <p:spPr>
+          <a:xfrm>
+            <a:off x="5074920" y="2322576"/>
+            <a:ext cx="6263640" cy="502920"/>
+          </a:xfrm>
+          <a:prstGeom prst="rect">
+            <a:avLst/>
+          </a:prstGeom>
+          <a:noFill/>
+          <a:ln/>
+        </p:spPr>
+        <p:txBody>
+          <a:bodyPr wrap="square" lIns="0" tIns="0" rIns="0" bIns="0" rtlCol="0" anchor="ctr"/>
+          <a:lstStyle/>
+          <a:p>
+            <a:pPr indent="0" marL="0">
+              <a:lnSpc>
+                <a:spcPct val="110000"/>
+              </a:lnSpc>
+              <a:buNone/>
+            </a:pPr>
+            <a:r>
+              <a:rPr lang="en-US" sz="1250" dirty="0">
+                <a:solidFill>
+                  <a:srgbClr val="1A2733"/>
+                </a:solidFill>
+                <a:latin typeface="Calibri" pitchFamily="34" charset="0"/>
+                <a:ea typeface="Calibri" pitchFamily="34" charset="-122"/>
+                <a:cs typeface="Calibri" pitchFamily="34" charset="-120"/>
+              </a:rPr>
+              <a:t>Узнать, кто написал музыку и слова и при каких обстоятельствах создавался гимн</a:t>
+            </a:r>
+            <a:endParaRPr lang="en-US" sz="1250" dirty="0"/>
+          </a:p>
+        </p:txBody>
+      </p:sp>
+      <p:sp>
+        <p:nvSpPr>
+          <p:cNvPr id="14" name="Shape 12"/>
+          <p:cNvSpPr/>
+          <p:nvPr/>
+        </p:nvSpPr>
+        <p:spPr>
+          <a:xfrm>
+            <a:off x="4663440" y="3081528"/>
+            <a:ext cx="201168" cy="201168"/>
+          </a:xfrm>
+          <a:prstGeom prst="ellipse">
+            <a:avLst/>
+          </a:prstGeom>
+          <a:solidFill>
+            <a:srgbClr val="C99A3E"/>
+          </a:solidFill>
+          <a:ln/>
+        </p:spPr>
+      </p:sp>
+      <p:sp>
+        <p:nvSpPr>
+          <p:cNvPr id="15" name="Text 13"/>
+          <p:cNvSpPr txBox="1"/>
+          <p:nvPr/>
+        </p:nvSpPr>
+        <p:spPr>
+          <a:xfrm>
+            <a:off x="5074920" y="2980944"/>
+            <a:ext cx="6263640" cy="502920"/>
+          </a:xfrm>
+          <a:prstGeom prst="rect">
+            <a:avLst/>
+          </a:prstGeom>
+          <a:noFill/>
+          <a:ln/>
+        </p:spPr>
+        <p:txBody>
+          <a:bodyPr wrap="square" lIns="0" tIns="0" rIns="0" bIns="0" rtlCol="0" anchor="ctr"/>
+          <a:lstStyle/>
+          <a:p>
+            <a:pPr indent="0" marL="0">
+              <a:lnSpc>
+                <a:spcPct val="110000"/>
+              </a:lnSpc>
+              <a:buNone/>
+            </a:pPr>
+            <a:r>
+              <a:rPr lang="en-US" sz="1250" dirty="0">
+                <a:solidFill>
+                  <a:srgbClr val="1A2733"/>
+                </a:solidFill>
+                <a:latin typeface="Calibri" pitchFamily="34" charset="0"/>
+                <a:ea typeface="Calibri" pitchFamily="34" charset="-122"/>
+                <a:cs typeface="Calibri" pitchFamily="34" charset="-120"/>
+              </a:rPr>
+              <a:t>Разобраться, как гимн стал официальным символом города</a:t>
+            </a:r>
+            <a:endParaRPr lang="en-US" sz="1250" dirty="0"/>
+          </a:p>
+        </p:txBody>
+      </p:sp>
+      <p:sp>
+        <p:nvSpPr>
+          <p:cNvPr id="16" name="Shape 14"/>
+          <p:cNvSpPr/>
+          <p:nvPr/>
+        </p:nvSpPr>
+        <p:spPr>
+          <a:xfrm>
+            <a:off x="4663440" y="3739896"/>
+            <a:ext cx="201168" cy="201168"/>
+          </a:xfrm>
+          <a:prstGeom prst="ellipse">
+            <a:avLst/>
+          </a:prstGeom>
+          <a:solidFill>
+            <a:srgbClr val="C99A3E"/>
+          </a:solidFill>
+          <a:ln/>
+        </p:spPr>
+      </p:sp>
+      <p:sp>
+        <p:nvSpPr>
+          <p:cNvPr id="17" name="Text 15"/>
+          <p:cNvSpPr txBox="1"/>
+          <p:nvPr/>
+        </p:nvSpPr>
+        <p:spPr>
+          <a:xfrm>
+            <a:off x="5074920" y="3639312"/>
+            <a:ext cx="6263640" cy="502920"/>
+          </a:xfrm>
+          <a:prstGeom prst="rect">
+            <a:avLst/>
+          </a:prstGeom>
+          <a:noFill/>
+          <a:ln/>
+        </p:spPr>
+        <p:txBody>
+          <a:bodyPr wrap="square" lIns="0" tIns="0" rIns="0" bIns="0" rtlCol="0" anchor="ctr"/>
+          <a:lstStyle/>
+          <a:p>
+            <a:pPr indent="0" marL="0">
+              <a:lnSpc>
+                <a:spcPct val="110000"/>
+              </a:lnSpc>
+              <a:buNone/>
+            </a:pPr>
+            <a:r>
+              <a:rPr lang="en-US" sz="1250" dirty="0">
+                <a:solidFill>
+                  <a:srgbClr val="1A2733"/>
+                </a:solidFill>
+                <a:latin typeface="Calibri" pitchFamily="34" charset="0"/>
+                <a:ea typeface="Calibri" pitchFamily="34" charset="-122"/>
+                <a:cs typeface="Calibri" pitchFamily="34" charset="-120"/>
+              </a:rPr>
+              <a:t>Проанализировать музыку и текст: какими средствами передан характер Петербурга</a:t>
+            </a:r>
+            <a:endParaRPr lang="en-US" sz="1250" dirty="0"/>
+          </a:p>
+        </p:txBody>
+      </p:sp>
+      <p:sp>
+        <p:nvSpPr>
+          <p:cNvPr id="18" name="Shape 16"/>
+          <p:cNvSpPr/>
+          <p:nvPr/>
+        </p:nvSpPr>
+        <p:spPr>
+          <a:xfrm>
+            <a:off x="4663440" y="4398264"/>
+            <a:ext cx="201168" cy="201168"/>
+          </a:xfrm>
+          <a:prstGeom prst="ellipse">
+            <a:avLst/>
+          </a:prstGeom>
+          <a:solidFill>
+            <a:srgbClr val="C99A3E"/>
+          </a:solidFill>
+          <a:ln/>
+        </p:spPr>
+      </p:sp>
+      <p:sp>
+        <p:nvSpPr>
+          <p:cNvPr id="19" name="Text 17"/>
+          <p:cNvSpPr txBox="1"/>
+          <p:nvPr/>
+        </p:nvSpPr>
+        <p:spPr>
+          <a:xfrm>
+            <a:off x="5074920" y="4297680"/>
+            <a:ext cx="6263640" cy="502920"/>
+          </a:xfrm>
+          <a:prstGeom prst="rect">
+            <a:avLst/>
+          </a:prstGeom>
+          <a:noFill/>
+          <a:ln/>
+        </p:spPr>
+        <p:txBody>
+          <a:bodyPr wrap="square" lIns="0" tIns="0" rIns="0" bIns="0" rtlCol="0" anchor="ctr"/>
+          <a:lstStyle/>
+          <a:p>
+            <a:pPr indent="0" marL="0">
+              <a:lnSpc>
+                <a:spcPct val="110000"/>
+              </a:lnSpc>
+              <a:buNone/>
+            </a:pPr>
+            <a:r>
+              <a:rPr lang="en-US" sz="1250" dirty="0">
+                <a:solidFill>
+                  <a:srgbClr val="1A2733"/>
+                </a:solidFill>
+                <a:latin typeface="Calibri" pitchFamily="34" charset="0"/>
+                <a:ea typeface="Calibri" pitchFamily="34" charset="-122"/>
+                <a:cs typeface="Calibri" pitchFamily="34" charset="-120"/>
+              </a:rPr>
+              <a:t>Сравнить наш гимн с гимном другого региона</a:t>
+            </a:r>
+            <a:endParaRPr lang="en-US" sz="1250" dirty="0"/>
+          </a:p>
+        </p:txBody>
+      </p:sp>
+      <p:sp>
+        <p:nvSpPr>
+          <p:cNvPr id="20" name="Shape 18"/>
+          <p:cNvSpPr/>
+          <p:nvPr/>
+        </p:nvSpPr>
+        <p:spPr>
+          <a:xfrm>
+            <a:off x="4663440" y="5056632"/>
+            <a:ext cx="201168" cy="201168"/>
+          </a:xfrm>
+          <a:prstGeom prst="ellipse">
+            <a:avLst/>
+          </a:prstGeom>
+          <a:solidFill>
+            <a:srgbClr val="C99A3E"/>
+          </a:solidFill>
+          <a:ln/>
+        </p:spPr>
+      </p:sp>
+      <p:sp>
+        <p:nvSpPr>
+          <p:cNvPr id="21" name="Text 19"/>
+          <p:cNvSpPr txBox="1"/>
+          <p:nvPr/>
+        </p:nvSpPr>
+        <p:spPr>
+          <a:xfrm>
+            <a:off x="5074920" y="4956048"/>
+            <a:ext cx="6263640" cy="502920"/>
+          </a:xfrm>
+          <a:prstGeom prst="rect">
+            <a:avLst/>
+          </a:prstGeom>
+          <a:noFill/>
+          <a:ln/>
+        </p:spPr>
+        <p:txBody>
+          <a:bodyPr wrap="square" lIns="0" tIns="0" rIns="0" bIns="0" rtlCol="0" anchor="ctr"/>
+          <a:lstStyle/>
+          <a:p>
+            <a:pPr indent="0" marL="0">
+              <a:lnSpc>
+                <a:spcPct val="110000"/>
+              </a:lnSpc>
+              <a:buNone/>
+            </a:pPr>
+            <a:r>
+              <a:rPr lang="en-US" sz="1250" dirty="0">
+                <a:solidFill>
+                  <a:srgbClr val="1A2733"/>
+                </a:solidFill>
+                <a:latin typeface="Calibri" pitchFamily="34" charset="0"/>
+                <a:ea typeface="Calibri" pitchFamily="34" charset="-122"/>
+                <a:cs typeface="Calibri" pitchFamily="34" charset="-120"/>
+              </a:rPr>
+              <a:t>Провести опрос: как к гимну относятся сами петербуржцы</a:t>
+            </a:r>
+            <a:endParaRPr lang="en-US" sz="1250" dirty="0"/>
+          </a:p>
+        </p:txBody>
+      </p:sp>
+      <p:sp>
+        <p:nvSpPr>
+          <p:cNvPr id="22" name="Shape 20"/>
+          <p:cNvSpPr/>
+          <p:nvPr/>
+        </p:nvSpPr>
+        <p:spPr>
+          <a:xfrm>
+            <a:off x="4663440" y="5715000"/>
+            <a:ext cx="6675120" cy="685800"/>
+          </a:xfrm>
+          <a:prstGeom prst="roundRect">
+            <a:avLst>
+              <a:gd name="adj" fmla="val 8000"/>
+            </a:avLst>
+          </a:prstGeom>
+          <a:solidFill>
+            <a:srgbClr val="EAF0F7"/>
+          </a:solidFill>
+          <a:ln/>
+        </p:spPr>
+      </p:sp>
+      <p:sp>
+        <p:nvSpPr>
+          <p:cNvPr id="23" name="Text 21"/>
+          <p:cNvSpPr txBox="1"/>
+          <p:nvPr/>
+        </p:nvSpPr>
+        <p:spPr>
+          <a:xfrm>
+            <a:off x="4892040" y="5788152"/>
+            <a:ext cx="6217920" cy="548640"/>
+          </a:xfrm>
+          <a:prstGeom prst="rect">
+            <a:avLst/>
+          </a:prstGeom>
+          <a:noFill/>
+          <a:ln/>
+        </p:spPr>
+        <p:txBody>
+          <a:bodyPr wrap="square" lIns="0" tIns="0" rIns="0" bIns="0" rtlCol="0" anchor="ctr"/>
+          <a:lstStyle/>
+          <a:p>
+            <a:pPr indent="0" marL="0">
+              <a:buNone/>
+            </a:pPr>
+            <a:r>
+              <a:rPr lang="en-US" sz="1150" b="1" dirty="0">
+                <a:solidFill>
+                  <a:srgbClr val="10253C"/>
+                </a:solidFill>
+                <a:latin typeface="Calibri" pitchFamily="34" charset="0"/>
+                <a:ea typeface="Calibri" pitchFamily="34" charset="-122"/>
+                <a:cs typeface="Calibri" pitchFamily="34" charset="-120"/>
+              </a:rPr>
+              <a:t>Гипотеза:  </a:t>
+            </a:r>
+            <a:pPr indent="0" marL="0">
+              <a:buNone/>
+            </a:pPr>
+            <a:r>
+              <a:rPr lang="en-US" sz="1150" dirty="0">
+                <a:solidFill>
+                  <a:srgbClr val="1A2733"/>
+                </a:solidFill>
+                <a:latin typeface="Calibri" pitchFamily="34" charset="0"/>
+                <a:ea typeface="Calibri" pitchFamily="34" charset="-122"/>
+                <a:cs typeface="Calibri" pitchFamily="34" charset="-120"/>
+              </a:rPr>
+              <a:t>петербуржцы любят гимн за музыку, а не за текст — большинство не назовёт автора и не вспомнит строчки.</a:t>
+            </a:r>
+            <a:endParaRPr lang="en-US" sz="1150" dirty="0"/>
+          </a:p>
+        </p:txBody>
+      </p:sp>
+      <p:sp>
+        <p:nvSpPr>
+          <p:cNvPr id="25" name="Text 22"/>
+          <p:cNvSpPr txBox="1"/>
+          <p:nvPr/>
+        </p:nvSpPr>
+        <p:spPr>
+          <a:xfrm>
+            <a:off x="11365992" y="6355080"/>
+            <a:ext cx="548640" cy="320040"/>
+          </a:xfrm>
+          <a:prstGeom prst="rect">
+            <a:avLst/>
+          </a:prstGeom>
+          <a:noFill/>
+          <a:ln/>
+        </p:spPr>
+        <p:txBody>
+          <a:bodyPr wrap="square" lIns="0" tIns="0" rIns="0" bIns="0" rtlCol="0" anchor="ctr"/>
+          <a:lstStyle/>
+          <a:p>
+            <a:pPr algn="r" indent="0" marL="0">
+              <a:buNone/>
+            </a:pPr>
+            <a:r>
+              <a:rPr lang="en-US" sz="1000" dirty="0">
+                <a:solidFill>
+                  <a:srgbClr val="5B6B7A"/>
+                </a:solidFill>
+                <a:latin typeface="Calibri" pitchFamily="34" charset="0"/>
+                <a:ea typeface="Calibri" pitchFamily="34" charset="-122"/>
+                <a:cs typeface="Calibri" pitchFamily="34" charset="-120"/>
+              </a:rPr>
+              <a:t>02</a:t>
+            </a:r>
+            <a:endParaRPr lang="en-US" sz="1000" dirty="0"/>
+          </a:p>
+        </p:txBody>
+      </p:sp>
+    </p:spTree>
+  </p:cSld>
+  <p:clrMapOvr>
+    <a:masterClrMapping/>
+  </p:clrMapOvr>
+</p:sld>
+</file>
+
+<file path=ppt/slides/slide3.xml><?xml version="1.0" encoding="utf-8"?>
+<p:sld xmlns:a="http://schemas.openxmlformats.org/drawingml/2006/main" xmlns:r="http://schemas.openxmlformats.org/officeDocument/2006/relationships" xmlns:p="http://schemas.openxmlformats.org/presentationml/2006/main">
+  <p:cSld name="Slide 3">
+    <p:bg>
+      <p:bgPr>
+        <a:solidFill>
           <a:srgbClr val="EAF0F7"/>
         </a:solidFill>
       </p:bgPr>
@@ -2207,7 +2961,7 @@
                 <a:ea typeface="Calibri" pitchFamily="34" charset="-122"/>
                 <a:cs typeface="Calibri" pitchFamily="34" charset="-120"/>
               </a:rPr>
-              <a:t>ПЛАН ВЫСТУПЛЕНИЯ</a:t>
+              <a:t>ТЕОРИЯ · ЧАСТЬ 1</a:t>
             </a:r>
             <a:endParaRPr lang="en-US" sz="1200" dirty="0"/>
           </a:p>
@@ -2215,30 +2969,50 @@
       </p:sp>
       <p:sp>
         <p:nvSpPr>
-          <p:cNvPr id="3" name="Text 1"/>
-          <p:cNvSpPr txBox="1"/>
-          <p:nvPr/>
-        </p:nvSpPr>
-        <p:spPr>
-          <a:xfrm>
-            <a:off x="640080" y="777240"/>
-            <a:ext cx="9144000" cy="640080"/>
-          </a:xfrm>
-          <a:prstGeom prst="rect">
-            <a:avLst/>
-          </a:prstGeom>
-          <a:noFill/>
-          <a:ln/>
-        </p:spPr>
-        <p:txBody>
-          <a:bodyPr wrap="square" lIns="0" tIns="0" rIns="0" bIns="0" rtlCol="0" anchor="ctr"/>
-          <a:lstStyle/>
-          <a:p>
-            <a:pPr indent="0" marL="0">
-              <a:buNone/>
-            </a:pPr>
-            <a:r>
-              <a:rPr lang="en-US" sz="3000" b="1" dirty="0">
+          <p:cNvPr id="3" name="Shape 1"/>
+          <p:cNvSpPr/>
+          <p:nvPr/>
+        </p:nvSpPr>
+        <p:spPr>
+          <a:xfrm>
+            <a:off x="10881360" y="457200"/>
+            <a:ext cx="502920" cy="502920"/>
+          </a:xfrm>
+          <a:prstGeom prst="ellipse">
+            <a:avLst/>
+          </a:prstGeom>
+          <a:solidFill>
+            <a:srgbClr val="C99A3E"/>
+          </a:solidFill>
+          <a:ln/>
+        </p:spPr>
+      </p:sp>
+      <p:sp>
+        <p:nvSpPr>
+          <p:cNvPr id="4" name="Text 2"/>
+          <p:cNvSpPr txBox="1"/>
+          <p:nvPr/>
+        </p:nvSpPr>
+        <p:spPr>
+          <a:xfrm>
+            <a:off x="10881360" y="457200"/>
+            <a:ext cx="502920" cy="502920"/>
+          </a:xfrm>
+          <a:prstGeom prst="rect">
+            <a:avLst/>
+          </a:prstGeom>
+          <a:noFill/>
+          <a:ln/>
+        </p:spPr>
+        <p:txBody>
+          <a:bodyPr wrap="square" lIns="0" tIns="0" rIns="0" bIns="0" rtlCol="0" anchor="ctr"/>
+          <a:lstStyle/>
+          <a:p>
+            <a:pPr algn="ctr" indent="0" marL="0">
+              <a:buNone/>
+            </a:pPr>
+            <a:r>
+              <a:rPr lang="en-US" sz="1600" b="1" dirty="0">
                 <a:solidFill>
                   <a:srgbClr val="10253C"/>
                 </a:solidFill>
@@ -2246,46 +3020,46 @@
                 <a:ea typeface="Cambria" pitchFamily="34" charset="-122"/>
                 <a:cs typeface="Cambria" pitchFamily="34" charset="-120"/>
               </a:rPr>
-              <a:t>Кто о чём расскажет</a:t>
-            </a:r>
-            <a:endParaRPr lang="en-US" sz="3000" dirty="0"/>
-          </a:p>
-        </p:txBody>
-      </p:sp>
-      <p:sp>
-        <p:nvSpPr>
-          <p:cNvPr id="4" name="Text 2"/>
-          <p:cNvSpPr txBox="1"/>
-          <p:nvPr/>
-        </p:nvSpPr>
-        <p:spPr>
-          <a:xfrm>
-            <a:off x="640080" y="1371600"/>
-            <a:ext cx="10515600" cy="457200"/>
-          </a:xfrm>
-          <a:prstGeom prst="rect">
-            <a:avLst/>
-          </a:prstGeom>
-          <a:noFill/>
-          <a:ln/>
-        </p:spPr>
-        <p:txBody>
-          <a:bodyPr wrap="square" lIns="0" tIns="0" rIns="0" bIns="0" rtlCol="0" anchor="ctr"/>
-          <a:lstStyle/>
-          <a:p>
-            <a:pPr indent="0" marL="0">
-              <a:buNone/>
-            </a:pPr>
-            <a:r>
-              <a:rPr lang="en-US" sz="1300" dirty="0">
-                <a:solidFill>
-                  <a:srgbClr val="5B6B7A"/>
+              <a:t>2</a:t>
+            </a:r>
+            <a:endParaRPr lang="en-US" sz="1600" dirty="0"/>
+          </a:p>
+        </p:txBody>
+      </p:sp>
+      <p:sp>
+        <p:nvSpPr>
+          <p:cNvPr id="5" name="Text 3"/>
+          <p:cNvSpPr txBox="1"/>
+          <p:nvPr/>
+        </p:nvSpPr>
+        <p:spPr>
+          <a:xfrm>
+            <a:off x="9052560" y="502920"/>
+            <a:ext cx="1737360" cy="411480"/>
+          </a:xfrm>
+          <a:prstGeom prst="rect">
+            <a:avLst/>
+          </a:prstGeom>
+          <a:noFill/>
+          <a:ln/>
+        </p:spPr>
+        <p:txBody>
+          <a:bodyPr wrap="square" lIns="0" tIns="0" rIns="0" bIns="0" rtlCol="0" anchor="ctr"/>
+          <a:lstStyle/>
+          <a:p>
+            <a:pPr algn="r" indent="0" marL="0">
+              <a:buNone/>
+            </a:pPr>
+            <a:r>
+              <a:rPr lang="en-US" sz="1300" b="1" dirty="0">
+                <a:solidFill>
+                  <a:srgbClr val="10253C"/>
                 </a:solidFill>
                 <a:latin typeface="Calibri" pitchFamily="34" charset="0"/>
                 <a:ea typeface="Calibri" pitchFamily="34" charset="-122"/>
                 <a:cs typeface="Calibri" pitchFamily="34" charset="-120"/>
               </a:rPr>
-              <a:t>Четыре части одного рассказа: от задачи — к истории, символике и живому отношению петербуржцев к своему гимну.</a:t>
+              <a:t>Тимур</a:t>
             </a:r>
             <a:endParaRPr lang="en-US" sz="1300" dirty="0"/>
           </a:p>
@@ -2293,43 +3067,152 @@
       </p:sp>
       <p:sp>
         <p:nvSpPr>
-          <p:cNvPr id="5" name="Shape 3"/>
+          <p:cNvPr id="6" name="Text 4"/>
+          <p:cNvSpPr txBox="1"/>
+          <p:nvPr/>
+        </p:nvSpPr>
+        <p:spPr>
+          <a:xfrm>
+            <a:off x="640080" y="777240"/>
+            <a:ext cx="8229600" cy="640080"/>
+          </a:xfrm>
+          <a:prstGeom prst="rect">
+            <a:avLst/>
+          </a:prstGeom>
+          <a:noFill/>
+          <a:ln/>
+        </p:spPr>
+        <p:txBody>
+          <a:bodyPr wrap="square" lIns="0" tIns="0" rIns="0" bIns="0" rtlCol="0" anchor="ctr"/>
+          <a:lstStyle/>
+          <a:p>
+            <a:pPr indent="0" marL="0">
+              <a:buNone/>
+            </a:pPr>
+            <a:r>
+              <a:rPr lang="en-US" sz="2800" b="1" dirty="0">
+                <a:solidFill>
+                  <a:srgbClr val="10253C"/>
+                </a:solidFill>
+                <a:latin typeface="Cambria" pitchFamily="34" charset="0"/>
+                <a:ea typeface="Cambria" pitchFamily="34" charset="-122"/>
+                <a:cs typeface="Cambria" pitchFamily="34" charset="-120"/>
+              </a:rPr>
+              <a:t>Как рождался гимн</a:t>
+            </a:r>
+            <a:endParaRPr lang="en-US" sz="2800" dirty="0"/>
+          </a:p>
+        </p:txBody>
+      </p:sp>
+      <p:sp>
+        <p:nvSpPr>
+          <p:cNvPr id="7" name="Text 5"/>
+          <p:cNvSpPr txBox="1"/>
+          <p:nvPr/>
+        </p:nvSpPr>
+        <p:spPr>
+          <a:xfrm>
+            <a:off x="640080" y="1417320"/>
+            <a:ext cx="10881360" cy="548640"/>
+          </a:xfrm>
+          <a:prstGeom prst="rect">
+            <a:avLst/>
+          </a:prstGeom>
+          <a:noFill/>
+          <a:ln/>
+        </p:spPr>
+        <p:txBody>
+          <a:bodyPr wrap="square" lIns="0" tIns="0" rIns="0" bIns="0" rtlCol="0" anchor="ctr"/>
+          <a:lstStyle/>
+          <a:p>
+            <a:pPr indent="0" marL="0">
+              <a:lnSpc>
+                <a:spcPct val="120000"/>
+              </a:lnSpc>
+              <a:buNone/>
+            </a:pPr>
+            <a:r>
+              <a:rPr lang="en-US" sz="1400" dirty="0">
+                <a:solidFill>
+                  <a:srgbClr val="1A2733"/>
+                </a:solidFill>
+                <a:latin typeface="Calibri" pitchFamily="34" charset="0"/>
+                <a:ea typeface="Calibri" pitchFamily="34" charset="-122"/>
+                <a:cs typeface="Calibri" pitchFamily="34" charset="-120"/>
+              </a:rPr>
+              <a:t>Мелодию написал </a:t>
+            </a:r>
+            <a:pPr indent="0" marL="0">
+              <a:lnSpc>
+                <a:spcPct val="120000"/>
+              </a:lnSpc>
+              <a:buNone/>
+            </a:pPr>
+            <a:r>
+              <a:rPr lang="en-US" sz="1400" b="1" dirty="0">
+                <a:solidFill>
+                  <a:srgbClr val="10253C"/>
+                </a:solidFill>
+                <a:latin typeface="Calibri" pitchFamily="34" charset="0"/>
+                <a:ea typeface="Calibri" pitchFamily="34" charset="-122"/>
+                <a:cs typeface="Calibri" pitchFamily="34" charset="-120"/>
+              </a:rPr>
+              <a:t>Рейнгольд Глиэр</a:t>
+            </a:r>
+            <a:pPr indent="0" marL="0">
+              <a:lnSpc>
+                <a:spcPct val="120000"/>
+              </a:lnSpc>
+              <a:buNone/>
+            </a:pPr>
+            <a:r>
+              <a:rPr lang="en-US" sz="1400" dirty="0">
+                <a:solidFill>
+                  <a:srgbClr val="1A2733"/>
+                </a:solidFill>
+                <a:latin typeface="Calibri" pitchFamily="34" charset="0"/>
+                <a:ea typeface="Calibri" pitchFamily="34" charset="-122"/>
+                <a:cs typeface="Calibri" pitchFamily="34" charset="-120"/>
+              </a:rPr>
+              <a:t> как финал балета «Медный всадник» по поэме Пушкина — премьера прошла в Ленинграде, только пережившем блокаду. Слова появились лишь через полвека.</a:t>
+            </a:r>
+            <a:endParaRPr lang="en-US" sz="1400" dirty="0"/>
+          </a:p>
+        </p:txBody>
+      </p:sp>
+      <p:sp>
+        <p:nvSpPr>
+          <p:cNvPr id="8" name="Shape 6"/>
           <p:cNvSpPr/>
           <p:nvPr/>
         </p:nvSpPr>
         <p:spPr>
           <a:xfrm>
-            <a:off x="640080" y="2148840"/>
-            <a:ext cx="10908792" cy="822960"/>
-          </a:xfrm>
-          <a:prstGeom prst="roundRect">
-            <a:avLst>
-              <a:gd name="adj" fmla="val 8889"/>
-            </a:avLst>
-          </a:prstGeom>
-          <a:solidFill>
-            <a:srgbClr val="FFFFFF"/>
-          </a:solidFill>
-          <a:ln/>
-          <a:effectLst>
-            <a:outerShdw sx="100000" sy="100000" kx="0" ky="0" algn="bl" rotWithShape="0" blurRad="76200" dist="25400" dir="5400000">
-              <a:srgbClr val="1B3A5C">
-                <a:alpha val="12000"/>
-              </a:srgbClr>
-            </a:outerShdw>
-          </a:effectLst>
-        </p:spPr>
-      </p:sp>
-      <p:sp>
-        <p:nvSpPr>
-          <p:cNvPr id="6" name="Shape 4"/>
+            <a:off x="914400" y="4160520"/>
+            <a:ext cx="10332720" cy="0"/>
+          </a:xfrm>
+          <a:prstGeom prst="line">
+            <a:avLst/>
+          </a:prstGeom>
+          <a:noFill/>
+          <a:ln w="31750">
+            <a:solidFill>
+              <a:srgbClr val="C99A3E"/>
+            </a:solidFill>
+            <a:prstDash val="solid"/>
+          </a:ln>
+        </p:spPr>
+      </p:sp>
+      <p:sp>
+        <p:nvSpPr>
+          <p:cNvPr id="9" name="Shape 7"/>
           <p:cNvSpPr/>
           <p:nvPr/>
         </p:nvSpPr>
         <p:spPr>
           <a:xfrm>
-            <a:off x="960120" y="2286000"/>
-            <a:ext cx="548640" cy="548640"/>
+            <a:off x="2105406" y="4059936"/>
+            <a:ext cx="201168" cy="201168"/>
           </a:xfrm>
           <a:prstGeom prst="ellipse">
             <a:avLst/>
@@ -2337,19 +3220,24 @@
           <a:solidFill>
             <a:srgbClr val="1B3A5C"/>
           </a:solidFill>
-          <a:ln/>
-        </p:spPr>
-      </p:sp>
-      <p:sp>
-        <p:nvSpPr>
-          <p:cNvPr id="7" name="Text 5"/>
-          <p:cNvSpPr txBox="1"/>
-          <p:nvPr/>
-        </p:nvSpPr>
-        <p:spPr>
-          <a:xfrm>
-            <a:off x="960120" y="2286000"/>
-            <a:ext cx="548640" cy="548640"/>
+          <a:ln w="25400">
+            <a:solidFill>
+              <a:srgbClr val="C99A3E"/>
+            </a:solidFill>
+            <a:prstDash val="solid"/>
+          </a:ln>
+        </p:spPr>
+      </p:sp>
+      <p:sp>
+        <p:nvSpPr>
+          <p:cNvPr id="10" name="Text 8"/>
+          <p:cNvSpPr txBox="1"/>
+          <p:nvPr/>
+        </p:nvSpPr>
+        <p:spPr>
+          <a:xfrm>
+            <a:off x="1005840" y="3474720"/>
+            <a:ext cx="2400300" cy="457200"/>
           </a:xfrm>
           <a:prstGeom prst="rect">
             <a:avLst/>
@@ -2367,13 +3255,13 @@
             <a:r>
               <a:rPr lang="en-US" sz="1800" b="1" dirty="0">
                 <a:solidFill>
-                  <a:srgbClr val="FFFFFF"/>
+                  <a:srgbClr val="10253C"/>
                 </a:solidFill>
                 <a:latin typeface="Cambria" pitchFamily="34" charset="0"/>
                 <a:ea typeface="Cambria" pitchFamily="34" charset="-122"/>
                 <a:cs typeface="Cambria" pitchFamily="34" charset="-120"/>
               </a:rPr>
-              <a:t>1</a:t>
+              <a:t>1949</a:t>
             </a:r>
             <a:endParaRPr lang="en-US" sz="1800" dirty="0"/>
           </a:p>
@@ -2381,30 +3269,97 @@
       </p:sp>
       <p:sp>
         <p:nvSpPr>
-          <p:cNvPr id="8" name="Text 6"/>
-          <p:cNvSpPr txBox="1"/>
-          <p:nvPr/>
-        </p:nvSpPr>
-        <p:spPr>
-          <a:xfrm>
-            <a:off x="1783080" y="2221992"/>
-            <a:ext cx="2377440" cy="457200"/>
-          </a:xfrm>
-          <a:prstGeom prst="rect">
-            <a:avLst/>
-          </a:prstGeom>
-          <a:noFill/>
-          <a:ln/>
-        </p:spPr>
-        <p:txBody>
-          <a:bodyPr wrap="square" lIns="0" tIns="0" rIns="0" bIns="0" rtlCol="0" anchor="ctr"/>
-          <a:lstStyle/>
-          <a:p>
-            <a:pPr indent="0" marL="0">
-              <a:buNone/>
-            </a:pPr>
-            <a:r>
-              <a:rPr lang="en-US" sz="1600" b="1" dirty="0">
+          <p:cNvPr id="11" name="Text 9"/>
+          <p:cNvSpPr txBox="1"/>
+          <p:nvPr/>
+        </p:nvSpPr>
+        <p:spPr>
+          <a:xfrm>
+            <a:off x="960120" y="4389120"/>
+            <a:ext cx="2491740" cy="1737360"/>
+          </a:xfrm>
+          <a:prstGeom prst="rect">
+            <a:avLst/>
+          </a:prstGeom>
+          <a:noFill/>
+          <a:ln/>
+        </p:spPr>
+        <p:txBody>
+          <a:bodyPr wrap="square" lIns="0" tIns="0" rIns="0" bIns="0" rtlCol="0" anchor="ctr"/>
+          <a:lstStyle/>
+          <a:p>
+            <a:pPr algn="ctr" indent="0" marL="0">
+              <a:lnSpc>
+                <a:spcPct val="115000"/>
+              </a:lnSpc>
+              <a:buNone/>
+            </a:pPr>
+            <a:r>
+              <a:rPr lang="en-US" sz="1050" dirty="0">
+                <a:solidFill>
+                  <a:srgbClr val="1A2733"/>
+                </a:solidFill>
+                <a:latin typeface="Calibri" pitchFamily="34" charset="0"/>
+                <a:ea typeface="Calibri" pitchFamily="34" charset="-122"/>
+                <a:cs typeface="Calibri" pitchFamily="34" charset="-120"/>
+              </a:rPr>
+              <a:t>Премьера балета «Медный всадник» в Ленинграде. Финал — «Гимн великому городу»</a:t>
+            </a:r>
+            <a:endParaRPr lang="en-US" sz="1050" dirty="0"/>
+          </a:p>
+        </p:txBody>
+      </p:sp>
+      <p:sp>
+        <p:nvSpPr>
+          <p:cNvPr id="12" name="Shape 10"/>
+          <p:cNvSpPr/>
+          <p:nvPr/>
+        </p:nvSpPr>
+        <p:spPr>
+          <a:xfrm>
+            <a:off x="4688586" y="4059936"/>
+            <a:ext cx="201168" cy="201168"/>
+          </a:xfrm>
+          <a:prstGeom prst="ellipse">
+            <a:avLst/>
+          </a:prstGeom>
+          <a:solidFill>
+            <a:srgbClr val="1B3A5C"/>
+          </a:solidFill>
+          <a:ln w="25400">
+            <a:solidFill>
+              <a:srgbClr val="C99A3E"/>
+            </a:solidFill>
+            <a:prstDash val="solid"/>
+          </a:ln>
+        </p:spPr>
+      </p:sp>
+      <p:sp>
+        <p:nvSpPr>
+          <p:cNvPr id="13" name="Text 11"/>
+          <p:cNvSpPr txBox="1"/>
+          <p:nvPr/>
+        </p:nvSpPr>
+        <p:spPr>
+          <a:xfrm>
+            <a:off x="3589020" y="3474720"/>
+            <a:ext cx="2400300" cy="457200"/>
+          </a:xfrm>
+          <a:prstGeom prst="rect">
+            <a:avLst/>
+          </a:prstGeom>
+          <a:noFill/>
+          <a:ln/>
+        </p:spPr>
+        <p:txBody>
+          <a:bodyPr wrap="square" lIns="0" tIns="0" rIns="0" bIns="0" rtlCol="0" anchor="ctr"/>
+          <a:lstStyle/>
+          <a:p>
+            <a:pPr algn="ctr" indent="0" marL="0">
+              <a:buNone/>
+            </a:pPr>
+            <a:r>
+              <a:rPr lang="en-US" sz="1800" b="1" dirty="0">
                 <a:solidFill>
                   <a:srgbClr val="10253C"/>
                 </a:solidFill>
@@ -2412,38 +3367,41 @@
                 <a:ea typeface="Cambria" pitchFamily="34" charset="-122"/>
                 <a:cs typeface="Cambria" pitchFamily="34" charset="-120"/>
               </a:rPr>
-              <a:t>Никита</a:t>
-            </a:r>
-            <a:endParaRPr lang="en-US" sz="1600" dirty="0"/>
-          </a:p>
-        </p:txBody>
-      </p:sp>
-      <p:sp>
-        <p:nvSpPr>
-          <p:cNvPr id="9" name="Text 7"/>
-          <p:cNvSpPr txBox="1"/>
-          <p:nvPr/>
-        </p:nvSpPr>
-        <p:spPr>
-          <a:xfrm>
-            <a:off x="4206240" y="2221992"/>
-            <a:ext cx="5577840" cy="548640"/>
-          </a:xfrm>
-          <a:prstGeom prst="rect">
-            <a:avLst/>
-          </a:prstGeom>
-          <a:noFill/>
-          <a:ln/>
-        </p:spPr>
-        <p:txBody>
-          <a:bodyPr wrap="square" lIns="0" tIns="0" rIns="0" bIns="0" rtlCol="0" anchor="ctr"/>
-          <a:lstStyle/>
-          <a:p>
-            <a:pPr indent="0" marL="0">
-              <a:buNone/>
-            </a:pPr>
-            <a:r>
-              <a:rPr lang="en-US" sz="1300" dirty="0">
+              <a:t>1950-е–80-е</a:t>
+            </a:r>
+            <a:endParaRPr lang="en-US" sz="1800" dirty="0"/>
+          </a:p>
+        </p:txBody>
+      </p:sp>
+      <p:sp>
+        <p:nvSpPr>
+          <p:cNvPr id="14" name="Text 12"/>
+          <p:cNvSpPr txBox="1"/>
+          <p:nvPr/>
+        </p:nvSpPr>
+        <p:spPr>
+          <a:xfrm>
+            <a:off x="3543300" y="4389120"/>
+            <a:ext cx="2491740" cy="1737360"/>
+          </a:xfrm>
+          <a:prstGeom prst="rect">
+            <a:avLst/>
+          </a:prstGeom>
+          <a:noFill/>
+          <a:ln/>
+        </p:spPr>
+        <p:txBody>
+          <a:bodyPr wrap="square" lIns="0" tIns="0" rIns="0" bIns="0" rtlCol="0" anchor="ctr"/>
+          <a:lstStyle/>
+          <a:p>
+            <a:pPr algn="ctr" indent="0" marL="0">
+              <a:lnSpc>
+                <a:spcPct val="115000"/>
+              </a:lnSpc>
+              <a:buNone/>
+            </a:pPr>
+            <a:r>
+              <a:rPr lang="en-US" sz="1050" dirty="0">
                 <a:solidFill>
                   <a:srgbClr val="1A2733"/>
                 </a:solidFill>
@@ -2451,90 +3409,128 @@
                 <a:ea typeface="Calibri" pitchFamily="34" charset="-122"/>
                 <a:cs typeface="Calibri" pitchFamily="34" charset="-120"/>
               </a:rPr>
-              <a:t>Вступление, цель и задачи проекта</a:t>
-            </a:r>
-            <a:endParaRPr lang="en-US" sz="1300" dirty="0"/>
-          </a:p>
-        </p:txBody>
-      </p:sp>
-      <p:sp>
-        <p:nvSpPr>
-          <p:cNvPr id="10" name="Text 8"/>
-          <p:cNvSpPr txBox="1"/>
-          <p:nvPr/>
-        </p:nvSpPr>
-        <p:spPr>
-          <a:xfrm>
-            <a:off x="9692640" y="2148840"/>
-            <a:ext cx="1691640" cy="822960"/>
-          </a:xfrm>
-          <a:prstGeom prst="rect">
-            <a:avLst/>
-          </a:prstGeom>
-          <a:noFill/>
-          <a:ln/>
-        </p:spPr>
-        <p:txBody>
-          <a:bodyPr wrap="square" lIns="0" tIns="0" rIns="0" bIns="0" rtlCol="0" anchor="ctr"/>
-          <a:lstStyle/>
-          <a:p>
-            <a:pPr algn="r" indent="0" marL="0">
-              <a:buNone/>
-            </a:pPr>
-            <a:r>
-              <a:rPr lang="en-US" sz="1200" i="1" dirty="0">
-                <a:solidFill>
-                  <a:srgbClr val="C99A3E"/>
+              <a:t>Мелодия звучит отдельно от балета и становится музыкальным символом Ленинграда</a:t>
+            </a:r>
+            <a:endParaRPr lang="en-US" sz="1050" dirty="0"/>
+          </a:p>
+        </p:txBody>
+      </p:sp>
+      <p:sp>
+        <p:nvSpPr>
+          <p:cNvPr id="15" name="Shape 13"/>
+          <p:cNvSpPr/>
+          <p:nvPr/>
+        </p:nvSpPr>
+        <p:spPr>
+          <a:xfrm>
+            <a:off x="7271766" y="4059936"/>
+            <a:ext cx="201168" cy="201168"/>
+          </a:xfrm>
+          <a:prstGeom prst="ellipse">
+            <a:avLst/>
+          </a:prstGeom>
+          <a:solidFill>
+            <a:srgbClr val="1B3A5C"/>
+          </a:solidFill>
+          <a:ln w="25400">
+            <a:solidFill>
+              <a:srgbClr val="C99A3E"/>
+            </a:solidFill>
+            <a:prstDash val="solid"/>
+          </a:ln>
+        </p:spPr>
+      </p:sp>
+      <p:sp>
+        <p:nvSpPr>
+          <p:cNvPr id="16" name="Text 14"/>
+          <p:cNvSpPr txBox="1"/>
+          <p:nvPr/>
+        </p:nvSpPr>
+        <p:spPr>
+          <a:xfrm>
+            <a:off x="6172200" y="3474720"/>
+            <a:ext cx="2400300" cy="457200"/>
+          </a:xfrm>
+          <a:prstGeom prst="rect">
+            <a:avLst/>
+          </a:prstGeom>
+          <a:noFill/>
+          <a:ln/>
+        </p:spPr>
+        <p:txBody>
+          <a:bodyPr wrap="square" lIns="0" tIns="0" rIns="0" bIns="0" rtlCol="0" anchor="ctr"/>
+          <a:lstStyle/>
+          <a:p>
+            <a:pPr algn="ctr" indent="0" marL="0">
+              <a:buNone/>
+            </a:pPr>
+            <a:r>
+              <a:rPr lang="en-US" sz="1800" b="1" dirty="0">
+                <a:solidFill>
+                  <a:srgbClr val="10253C"/>
+                </a:solidFill>
+                <a:latin typeface="Cambria" pitchFamily="34" charset="0"/>
+                <a:ea typeface="Cambria" pitchFamily="34" charset="-122"/>
+                <a:cs typeface="Cambria" pitchFamily="34" charset="-120"/>
+              </a:rPr>
+              <a:t>1991</a:t>
+            </a:r>
+            <a:endParaRPr lang="en-US" sz="1800" dirty="0"/>
+          </a:p>
+        </p:txBody>
+      </p:sp>
+      <p:sp>
+        <p:nvSpPr>
+          <p:cNvPr id="17" name="Text 15"/>
+          <p:cNvSpPr txBox="1"/>
+          <p:nvPr/>
+        </p:nvSpPr>
+        <p:spPr>
+          <a:xfrm>
+            <a:off x="6126480" y="4389120"/>
+            <a:ext cx="2491740" cy="1737360"/>
+          </a:xfrm>
+          <a:prstGeom prst="rect">
+            <a:avLst/>
+          </a:prstGeom>
+          <a:noFill/>
+          <a:ln/>
+        </p:spPr>
+        <p:txBody>
+          <a:bodyPr wrap="square" lIns="0" tIns="0" rIns="0" bIns="0" rtlCol="0" anchor="ctr"/>
+          <a:lstStyle/>
+          <a:p>
+            <a:pPr algn="ctr" indent="0" marL="0">
+              <a:lnSpc>
+                <a:spcPct val="115000"/>
+              </a:lnSpc>
+              <a:buNone/>
+            </a:pPr>
+            <a:r>
+              <a:rPr lang="en-US" sz="1050" dirty="0">
+                <a:solidFill>
+                  <a:srgbClr val="1A2733"/>
                 </a:solidFill>
                 <a:latin typeface="Calibri" pitchFamily="34" charset="0"/>
                 <a:ea typeface="Calibri" pitchFamily="34" charset="-122"/>
                 <a:cs typeface="Calibri" pitchFamily="34" charset="-120"/>
               </a:rPr>
-              <a:t>≈ 1–1,5 мин</a:t>
-            </a:r>
-            <a:endParaRPr lang="en-US" sz="1200" dirty="0"/>
-          </a:p>
-        </p:txBody>
-      </p:sp>
-      <p:sp>
-        <p:nvSpPr>
-          <p:cNvPr id="11" name="Shape 9"/>
+              <a:t>Музыка Глиэра официально утверждена гимном города — в год возвращения имени Санкт-Петербург</a:t>
+            </a:r>
+            <a:endParaRPr lang="en-US" sz="1050" dirty="0"/>
+          </a:p>
+        </p:txBody>
+      </p:sp>
+      <p:sp>
+        <p:nvSpPr>
+          <p:cNvPr id="18" name="Shape 16"/>
           <p:cNvSpPr/>
           <p:nvPr/>
         </p:nvSpPr>
         <p:spPr>
           <a:xfrm>
-            <a:off x="640080" y="3136392"/>
-            <a:ext cx="10908792" cy="822960"/>
-          </a:xfrm>
-          <a:prstGeom prst="roundRect">
-            <a:avLst>
-              <a:gd name="adj" fmla="val 8889"/>
-            </a:avLst>
-          </a:prstGeom>
-          <a:solidFill>
-            <a:srgbClr val="FFFFFF"/>
-          </a:solidFill>
-          <a:ln/>
-          <a:effectLst>
-            <a:outerShdw sx="100000" sy="100000" kx="0" ky="0" algn="bl" rotWithShape="0" blurRad="76200" dist="25400" dir="5400000">
-              <a:srgbClr val="1B3A5C">
-                <a:alpha val="12000"/>
-              </a:srgbClr>
-            </a:outerShdw>
-          </a:effectLst>
-        </p:spPr>
-      </p:sp>
-      <p:sp>
-        <p:nvSpPr>
-          <p:cNvPr id="12" name="Shape 10"/>
-          <p:cNvSpPr/>
-          <p:nvPr/>
-        </p:nvSpPr>
-        <p:spPr>
-          <a:xfrm>
-            <a:off x="960120" y="3273552"/>
-            <a:ext cx="548640" cy="548640"/>
+            <a:off x="9854946" y="4059936"/>
+            <a:ext cx="201168" cy="201168"/>
           </a:xfrm>
           <a:prstGeom prst="ellipse">
             <a:avLst/>
@@ -2542,19 +3538,24 @@
           <a:solidFill>
             <a:srgbClr val="1B3A5C"/>
           </a:solidFill>
-          <a:ln/>
-        </p:spPr>
-      </p:sp>
-      <p:sp>
-        <p:nvSpPr>
-          <p:cNvPr id="13" name="Text 11"/>
-          <p:cNvSpPr txBox="1"/>
-          <p:nvPr/>
-        </p:nvSpPr>
-        <p:spPr>
-          <a:xfrm>
-            <a:off x="960120" y="3273552"/>
-            <a:ext cx="548640" cy="548640"/>
+          <a:ln w="25400">
+            <a:solidFill>
+              <a:srgbClr val="C99A3E"/>
+            </a:solidFill>
+            <a:prstDash val="solid"/>
+          </a:ln>
+        </p:spPr>
+      </p:sp>
+      <p:sp>
+        <p:nvSpPr>
+          <p:cNvPr id="19" name="Text 17"/>
+          <p:cNvSpPr txBox="1"/>
+          <p:nvPr/>
+        </p:nvSpPr>
+        <p:spPr>
+          <a:xfrm>
+            <a:off x="8755380" y="3474720"/>
+            <a:ext cx="2400300" cy="457200"/>
           </a:xfrm>
           <a:prstGeom prst="rect">
             <a:avLst/>
@@ -2572,13 +3573,13 @@
             <a:r>
               <a:rPr lang="en-US" sz="1800" b="1" dirty="0">
                 <a:solidFill>
-                  <a:srgbClr val="FFFFFF"/>
+                  <a:srgbClr val="10253C"/>
                 </a:solidFill>
                 <a:latin typeface="Cambria" pitchFamily="34" charset="0"/>
                 <a:ea typeface="Cambria" pitchFamily="34" charset="-122"/>
                 <a:cs typeface="Cambria" pitchFamily="34" charset="-120"/>
               </a:rPr>
-              <a:t>2</a:t>
+              <a:t>2003</a:t>
             </a:r>
             <a:endParaRPr lang="en-US" sz="1800" dirty="0"/>
           </a:p>
@@ -2586,69 +3587,33 @@
       </p:sp>
       <p:sp>
         <p:nvSpPr>
-          <p:cNvPr id="14" name="Text 12"/>
-          <p:cNvSpPr txBox="1"/>
-          <p:nvPr/>
-        </p:nvSpPr>
-        <p:spPr>
-          <a:xfrm>
-            <a:off x="1783080" y="3209544"/>
-            <a:ext cx="2377440" cy="457200"/>
-          </a:xfrm>
-          <a:prstGeom prst="rect">
-            <a:avLst/>
-          </a:prstGeom>
-          <a:noFill/>
-          <a:ln/>
-        </p:spPr>
-        <p:txBody>
-          <a:bodyPr wrap="square" lIns="0" tIns="0" rIns="0" bIns="0" rtlCol="0" anchor="ctr"/>
-          <a:lstStyle/>
-          <a:p>
-            <a:pPr indent="0" marL="0">
-              <a:buNone/>
-            </a:pPr>
-            <a:r>
-              <a:rPr lang="en-US" sz="1600" b="1" dirty="0">
-                <a:solidFill>
-                  <a:srgbClr val="10253C"/>
-                </a:solidFill>
-                <a:latin typeface="Cambria" pitchFamily="34" charset="0"/>
-                <a:ea typeface="Cambria" pitchFamily="34" charset="-122"/>
-                <a:cs typeface="Cambria" pitchFamily="34" charset="-120"/>
-              </a:rPr>
-              <a:t>Тимур</a:t>
-            </a:r>
-            <a:endParaRPr lang="en-US" sz="1600" dirty="0"/>
-          </a:p>
-        </p:txBody>
-      </p:sp>
-      <p:sp>
-        <p:nvSpPr>
-          <p:cNvPr id="15" name="Text 13"/>
-          <p:cNvSpPr txBox="1"/>
-          <p:nvPr/>
-        </p:nvSpPr>
-        <p:spPr>
-          <a:xfrm>
-            <a:off x="4206240" y="3209544"/>
-            <a:ext cx="5577840" cy="548640"/>
-          </a:xfrm>
-          <a:prstGeom prst="rect">
-            <a:avLst/>
-          </a:prstGeom>
-          <a:noFill/>
-          <a:ln/>
-        </p:spPr>
-        <p:txBody>
-          <a:bodyPr wrap="square" lIns="0" tIns="0" rIns="0" bIns="0" rtlCol="0" anchor="ctr"/>
-          <a:lstStyle/>
-          <a:p>
-            <a:pPr indent="0" marL="0">
-              <a:buNone/>
-            </a:pPr>
-            <a:r>
-              <a:rPr lang="en-US" sz="1300" dirty="0">
+          <p:cNvPr id="20" name="Text 18"/>
+          <p:cNvSpPr txBox="1"/>
+          <p:nvPr/>
+        </p:nvSpPr>
+        <p:spPr>
+          <a:xfrm>
+            <a:off x="8709660" y="4389120"/>
+            <a:ext cx="2491740" cy="1737360"/>
+          </a:xfrm>
+          <a:prstGeom prst="rect">
+            <a:avLst/>
+          </a:prstGeom>
+          <a:noFill/>
+          <a:ln/>
+        </p:spPr>
+        <p:txBody>
+          <a:bodyPr wrap="square" lIns="0" tIns="0" rIns="0" bIns="0" rtlCol="0" anchor="ctr"/>
+          <a:lstStyle/>
+          <a:p>
+            <a:pPr algn="ctr" indent="0" marL="0">
+              <a:lnSpc>
+                <a:spcPct val="115000"/>
+              </a:lnSpc>
+              <a:buNone/>
+            </a:pPr>
+            <a:r>
+              <a:rPr lang="en-US" sz="1050" dirty="0">
                 <a:solidFill>
                   <a:srgbClr val="1A2733"/>
                 </a:solidFill>
@@ -2656,38 +3621,60 @@
                 <a:ea typeface="Calibri" pitchFamily="34" charset="-122"/>
                 <a:cs typeface="Calibri" pitchFamily="34" charset="-120"/>
               </a:rPr>
-              <a:t>История создания гимна</a:t>
-            </a:r>
-            <a:endParaRPr lang="en-US" sz="1300" dirty="0"/>
-          </a:p>
-        </p:txBody>
-      </p:sp>
-      <p:sp>
-        <p:nvSpPr>
-          <p:cNvPr id="16" name="Text 14"/>
-          <p:cNvSpPr txBox="1"/>
-          <p:nvPr/>
-        </p:nvSpPr>
-        <p:spPr>
-          <a:xfrm>
-            <a:off x="9692640" y="3136392"/>
-            <a:ext cx="1691640" cy="822960"/>
-          </a:xfrm>
-          <a:prstGeom prst="rect">
-            <a:avLst/>
-          </a:prstGeom>
-          <a:noFill/>
-          <a:ln/>
-        </p:spPr>
-        <p:txBody>
-          <a:bodyPr wrap="square" lIns="0" tIns="0" rIns="0" bIns="0" rtlCol="0" anchor="ctr"/>
-          <a:lstStyle/>
-          <a:p>
-            <a:pPr algn="r" indent="0" marL="0">
-              <a:buNone/>
-            </a:pPr>
-            <a:r>
-              <a:rPr lang="en-US" sz="1200" i="1" dirty="0">
+              <a:t>К 300-летию города утверждён текст гимна — автор слов Олег Чупров</a:t>
+            </a:r>
+            <a:endParaRPr lang="en-US" sz="1050" dirty="0"/>
+          </a:p>
+        </p:txBody>
+      </p:sp>
+      <p:sp>
+        <p:nvSpPr>
+          <p:cNvPr id="21" name="Shape 19"/>
+          <p:cNvSpPr/>
+          <p:nvPr/>
+        </p:nvSpPr>
+        <p:spPr>
+          <a:xfrm>
+            <a:off x="640080" y="6126480"/>
+            <a:ext cx="10908792" cy="548640"/>
+          </a:xfrm>
+          <a:prstGeom prst="roundRect">
+            <a:avLst>
+              <a:gd name="adj" fmla="val 10000"/>
+            </a:avLst>
+          </a:prstGeom>
+          <a:solidFill>
+            <a:srgbClr val="10253C"/>
+          </a:solidFill>
+          <a:ln/>
+        </p:spPr>
+      </p:sp>
+      <p:sp>
+        <p:nvSpPr>
+          <p:cNvPr id="22" name="Text 20"/>
+          <p:cNvSpPr txBox="1"/>
+          <p:nvPr/>
+        </p:nvSpPr>
+        <p:spPr>
+          <a:xfrm>
+            <a:off x="868680" y="6126480"/>
+            <a:ext cx="10424160" cy="548640"/>
+          </a:xfrm>
+          <a:prstGeom prst="rect">
+            <a:avLst/>
+          </a:prstGeom>
+          <a:noFill/>
+          <a:ln/>
+        </p:spPr>
+        <p:txBody>
+          <a:bodyPr wrap="square" lIns="0" tIns="0" rIns="0" bIns="0" rtlCol="0" anchor="ctr"/>
+          <a:lstStyle/>
+          <a:p>
+            <a:pPr indent="0" marL="0">
+              <a:buNone/>
+            </a:pPr>
+            <a:r>
+              <a:rPr lang="en-US" sz="1250" b="1" dirty="0">
                 <a:solidFill>
                   <a:srgbClr val="C99A3E"/>
                 </a:solidFill>
@@ -2695,188 +3682,36 @@
                 <a:ea typeface="Calibri" pitchFamily="34" charset="-122"/>
                 <a:cs typeface="Calibri" pitchFamily="34" charset="-120"/>
               </a:rPr>
-              <a:t>≈ 1,5–2 мин</a:t>
-            </a:r>
-            <a:endParaRPr lang="en-US" sz="1200" dirty="0"/>
-          </a:p>
-        </p:txBody>
-      </p:sp>
-      <p:sp>
-        <p:nvSpPr>
-          <p:cNvPr id="17" name="Shape 15"/>
-          <p:cNvSpPr/>
-          <p:nvPr/>
-        </p:nvSpPr>
-        <p:spPr>
-          <a:xfrm>
-            <a:off x="640080" y="4123944"/>
-            <a:ext cx="10908792" cy="822960"/>
-          </a:xfrm>
-          <a:prstGeom prst="roundRect">
-            <a:avLst>
-              <a:gd name="adj" fmla="val 8889"/>
-            </a:avLst>
-          </a:prstGeom>
-          <a:solidFill>
-            <a:srgbClr val="FFFFFF"/>
-          </a:solidFill>
-          <a:ln/>
-          <a:effectLst>
-            <a:outerShdw sx="100000" sy="100000" kx="0" ky="0" algn="bl" rotWithShape="0" blurRad="76200" dist="25400" dir="5400000">
-              <a:srgbClr val="1B3A5C">
-                <a:alpha val="12000"/>
-              </a:srgbClr>
-            </a:outerShdw>
-          </a:effectLst>
-        </p:spPr>
-      </p:sp>
-      <p:sp>
-        <p:nvSpPr>
-          <p:cNvPr id="18" name="Shape 16"/>
-          <p:cNvSpPr/>
-          <p:nvPr/>
-        </p:nvSpPr>
-        <p:spPr>
-          <a:xfrm>
-            <a:off x="960120" y="4261104"/>
-            <a:ext cx="548640" cy="548640"/>
-          </a:xfrm>
-          <a:prstGeom prst="ellipse">
-            <a:avLst/>
-          </a:prstGeom>
-          <a:solidFill>
-            <a:srgbClr val="1B3A5C"/>
-          </a:solidFill>
-          <a:ln/>
-        </p:spPr>
-      </p:sp>
-      <p:sp>
-        <p:nvSpPr>
-          <p:cNvPr id="19" name="Text 17"/>
-          <p:cNvSpPr txBox="1"/>
-          <p:nvPr/>
-        </p:nvSpPr>
-        <p:spPr>
-          <a:xfrm>
-            <a:off x="960120" y="4261104"/>
-            <a:ext cx="548640" cy="548640"/>
-          </a:xfrm>
-          <a:prstGeom prst="rect">
-            <a:avLst/>
-          </a:prstGeom>
-          <a:noFill/>
-          <a:ln/>
-        </p:spPr>
-        <p:txBody>
-          <a:bodyPr wrap="square" lIns="0" tIns="0" rIns="0" bIns="0" rtlCol="0" anchor="ctr"/>
-          <a:lstStyle/>
-          <a:p>
-            <a:pPr algn="ctr" indent="0" marL="0">
-              <a:buNone/>
-            </a:pPr>
-            <a:r>
-              <a:rPr lang="en-US" sz="1800" b="1" dirty="0">
+              <a:t>Факт:  </a:t>
+            </a:r>
+            <a:pPr indent="0" marL="0">
+              <a:buNone/>
+            </a:pPr>
+            <a:r>
+              <a:rPr lang="en-US" sz="1250" dirty="0">
                 <a:solidFill>
                   <a:srgbClr val="FFFFFF"/>
-                </a:solidFill>
-                <a:latin typeface="Cambria" pitchFamily="34" charset="0"/>
-                <a:ea typeface="Cambria" pitchFamily="34" charset="-122"/>
-                <a:cs typeface="Cambria" pitchFamily="34" charset="-120"/>
-              </a:rPr>
-              <a:t>3</a:t>
-            </a:r>
-            <a:endParaRPr lang="en-US" sz="1800" dirty="0"/>
-          </a:p>
-        </p:txBody>
-      </p:sp>
-      <p:sp>
-        <p:nvSpPr>
-          <p:cNvPr id="20" name="Text 18"/>
-          <p:cNvSpPr txBox="1"/>
-          <p:nvPr/>
-        </p:nvSpPr>
-        <p:spPr>
-          <a:xfrm>
-            <a:off x="1783080" y="4197096"/>
-            <a:ext cx="2377440" cy="457200"/>
-          </a:xfrm>
-          <a:prstGeom prst="rect">
-            <a:avLst/>
-          </a:prstGeom>
-          <a:noFill/>
-          <a:ln/>
-        </p:spPr>
-        <p:txBody>
-          <a:bodyPr wrap="square" lIns="0" tIns="0" rIns="0" bIns="0" rtlCol="0" anchor="ctr"/>
-          <a:lstStyle/>
-          <a:p>
-            <a:pPr indent="0" marL="0">
-              <a:buNone/>
-            </a:pPr>
-            <a:r>
-              <a:rPr lang="en-US" sz="1600" b="1" dirty="0">
-                <a:solidFill>
-                  <a:srgbClr val="10253C"/>
-                </a:solidFill>
-                <a:latin typeface="Cambria" pitchFamily="34" charset="0"/>
-                <a:ea typeface="Cambria" pitchFamily="34" charset="-122"/>
-                <a:cs typeface="Cambria" pitchFamily="34" charset="-120"/>
-              </a:rPr>
-              <a:t>Денис</a:t>
-            </a:r>
-            <a:endParaRPr lang="en-US" sz="1600" dirty="0"/>
-          </a:p>
-        </p:txBody>
-      </p:sp>
-      <p:sp>
-        <p:nvSpPr>
-          <p:cNvPr id="21" name="Text 19"/>
-          <p:cNvSpPr txBox="1"/>
-          <p:nvPr/>
-        </p:nvSpPr>
-        <p:spPr>
-          <a:xfrm>
-            <a:off x="4206240" y="4197096"/>
-            <a:ext cx="5577840" cy="548640"/>
-          </a:xfrm>
-          <a:prstGeom prst="rect">
-            <a:avLst/>
-          </a:prstGeom>
-          <a:noFill/>
-          <a:ln/>
-        </p:spPr>
-        <p:txBody>
-          <a:bodyPr wrap="square" lIns="0" tIns="0" rIns="0" bIns="0" rtlCol="0" anchor="ctr"/>
-          <a:lstStyle/>
-          <a:p>
-            <a:pPr indent="0" marL="0">
-              <a:buNone/>
-            </a:pPr>
-            <a:r>
-              <a:rPr lang="en-US" sz="1300" dirty="0">
-                <a:solidFill>
-                  <a:srgbClr val="1A2733"/>
                 </a:solidFill>
                 <a:latin typeface="Calibri" pitchFamily="34" charset="0"/>
                 <a:ea typeface="Calibri" pitchFamily="34" charset="-122"/>
                 <a:cs typeface="Calibri" pitchFamily="34" charset="-120"/>
               </a:rPr>
-              <a:t>Символика: что музыка говорит о городе</a:t>
-            </a:r>
-            <a:endParaRPr lang="en-US" sz="1300" dirty="0"/>
-          </a:p>
-        </p:txBody>
-      </p:sp>
-      <p:sp>
-        <p:nvSpPr>
-          <p:cNvPr id="22" name="Text 20"/>
-          <p:cNvSpPr txBox="1"/>
-          <p:nvPr/>
-        </p:nvSpPr>
-        <p:spPr>
-          <a:xfrm>
-            <a:off x="9692640" y="4123944"/>
-            <a:ext cx="1691640" cy="822960"/>
+              <a:t>полвека у гимна была музыка без единого слова текста.</a:t>
+            </a:r>
+            <a:endParaRPr lang="en-US" sz="1250" dirty="0"/>
+          </a:p>
+        </p:txBody>
+      </p:sp>
+      <p:sp>
+        <p:nvSpPr>
+          <p:cNvPr id="24" name="Text 21"/>
+          <p:cNvSpPr txBox="1"/>
+          <p:nvPr/>
+        </p:nvSpPr>
+        <p:spPr>
+          <a:xfrm>
+            <a:off x="11365992" y="6355080"/>
+            <a:ext cx="548640" cy="320040"/>
           </a:xfrm>
           <a:prstGeom prst="rect">
             <a:avLst/>
@@ -2892,259 +3727,15 @@
               <a:buNone/>
             </a:pPr>
             <a:r>
-              <a:rPr lang="en-US" sz="1200" i="1" dirty="0">
-                <a:solidFill>
-                  <a:srgbClr val="C99A3E"/>
+              <a:rPr lang="en-US" sz="1000" dirty="0">
+                <a:solidFill>
+                  <a:srgbClr val="5B6B7A"/>
                 </a:solidFill>
                 <a:latin typeface="Calibri" pitchFamily="34" charset="0"/>
                 <a:ea typeface="Calibri" pitchFamily="34" charset="-122"/>
                 <a:cs typeface="Calibri" pitchFamily="34" charset="-120"/>
               </a:rPr>
-              <a:t>≈ 1,5–2 мин</a:t>
-            </a:r>
-            <a:endParaRPr lang="en-US" sz="1200" dirty="0"/>
-          </a:p>
-        </p:txBody>
-      </p:sp>
-      <p:sp>
-        <p:nvSpPr>
-          <p:cNvPr id="23" name="Shape 21"/>
-          <p:cNvSpPr/>
-          <p:nvPr/>
-        </p:nvSpPr>
-        <p:spPr>
-          <a:xfrm>
-            <a:off x="640080" y="5111496"/>
-            <a:ext cx="10908792" cy="822960"/>
-          </a:xfrm>
-          <a:prstGeom prst="roundRect">
-            <a:avLst>
-              <a:gd name="adj" fmla="val 8889"/>
-            </a:avLst>
-          </a:prstGeom>
-          <a:solidFill>
-            <a:srgbClr val="FFFFFF"/>
-          </a:solidFill>
-          <a:ln/>
-          <a:effectLst>
-            <a:outerShdw sx="100000" sy="100000" kx="0" ky="0" algn="bl" rotWithShape="0" blurRad="76200" dist="25400" dir="5400000">
-              <a:srgbClr val="1B3A5C">
-                <a:alpha val="12000"/>
-              </a:srgbClr>
-            </a:outerShdw>
-          </a:effectLst>
-        </p:spPr>
-      </p:sp>
-      <p:sp>
-        <p:nvSpPr>
-          <p:cNvPr id="24" name="Shape 22"/>
-          <p:cNvSpPr/>
-          <p:nvPr/>
-        </p:nvSpPr>
-        <p:spPr>
-          <a:xfrm>
-            <a:off x="960120" y="5248656"/>
-            <a:ext cx="548640" cy="548640"/>
-          </a:xfrm>
-          <a:prstGeom prst="ellipse">
-            <a:avLst/>
-          </a:prstGeom>
-          <a:solidFill>
-            <a:srgbClr val="1B3A5C"/>
-          </a:solidFill>
-          <a:ln/>
-        </p:spPr>
-      </p:sp>
-      <p:sp>
-        <p:nvSpPr>
-          <p:cNvPr id="25" name="Text 23"/>
-          <p:cNvSpPr txBox="1"/>
-          <p:nvPr/>
-        </p:nvSpPr>
-        <p:spPr>
-          <a:xfrm>
-            <a:off x="960120" y="5248656"/>
-            <a:ext cx="548640" cy="548640"/>
-          </a:xfrm>
-          <a:prstGeom prst="rect">
-            <a:avLst/>
-          </a:prstGeom>
-          <a:noFill/>
-          <a:ln/>
-        </p:spPr>
-        <p:txBody>
-          <a:bodyPr wrap="square" lIns="0" tIns="0" rIns="0" bIns="0" rtlCol="0" anchor="ctr"/>
-          <a:lstStyle/>
-          <a:p>
-            <a:pPr algn="ctr" indent="0" marL="0">
-              <a:buNone/>
-            </a:pPr>
-            <a:r>
-              <a:rPr lang="en-US" sz="1800" b="1" dirty="0">
-                <a:solidFill>
-                  <a:srgbClr val="FFFFFF"/>
-                </a:solidFill>
-                <a:latin typeface="Cambria" pitchFamily="34" charset="0"/>
-                <a:ea typeface="Cambria" pitchFamily="34" charset="-122"/>
-                <a:cs typeface="Cambria" pitchFamily="34" charset="-120"/>
-              </a:rPr>
-              <a:t>4</a:t>
-            </a:r>
-            <a:endParaRPr lang="en-US" sz="1800" dirty="0"/>
-          </a:p>
-        </p:txBody>
-      </p:sp>
-      <p:sp>
-        <p:nvSpPr>
-          <p:cNvPr id="26" name="Text 24"/>
-          <p:cNvSpPr txBox="1"/>
-          <p:nvPr/>
-        </p:nvSpPr>
-        <p:spPr>
-          <a:xfrm>
-            <a:off x="1783080" y="5184648"/>
-            <a:ext cx="2377440" cy="457200"/>
-          </a:xfrm>
-          <a:prstGeom prst="rect">
-            <a:avLst/>
-          </a:prstGeom>
-          <a:noFill/>
-          <a:ln/>
-        </p:spPr>
-        <p:txBody>
-          <a:bodyPr wrap="square" lIns="0" tIns="0" rIns="0" bIns="0" rtlCol="0" anchor="ctr"/>
-          <a:lstStyle/>
-          <a:p>
-            <a:pPr indent="0" marL="0">
-              <a:buNone/>
-            </a:pPr>
-            <a:r>
-              <a:rPr lang="en-US" sz="1600" b="1" dirty="0">
-                <a:solidFill>
-                  <a:srgbClr val="10253C"/>
-                </a:solidFill>
-                <a:latin typeface="Cambria" pitchFamily="34" charset="0"/>
-                <a:ea typeface="Cambria" pitchFamily="34" charset="-122"/>
-                <a:cs typeface="Cambria" pitchFamily="34" charset="-120"/>
-              </a:rPr>
-              <a:t>Даниил</a:t>
-            </a:r>
-            <a:endParaRPr lang="en-US" sz="1600" dirty="0"/>
-          </a:p>
-        </p:txBody>
-      </p:sp>
-      <p:sp>
-        <p:nvSpPr>
-          <p:cNvPr id="27" name="Text 25"/>
-          <p:cNvSpPr txBox="1"/>
-          <p:nvPr/>
-        </p:nvSpPr>
-        <p:spPr>
-          <a:xfrm>
-            <a:off x="4206240" y="5184648"/>
-            <a:ext cx="5577840" cy="548640"/>
-          </a:xfrm>
-          <a:prstGeom prst="rect">
-            <a:avLst/>
-          </a:prstGeom>
-          <a:noFill/>
-          <a:ln/>
-        </p:spPr>
-        <p:txBody>
-          <a:bodyPr wrap="square" lIns="0" tIns="0" rIns="0" bIns="0" rtlCol="0" anchor="ctr"/>
-          <a:lstStyle/>
-          <a:p>
-            <a:pPr indent="0" marL="0">
-              <a:buNone/>
-            </a:pPr>
-            <a:r>
-              <a:rPr lang="en-US" sz="1300" dirty="0">
-                <a:solidFill>
-                  <a:srgbClr val="1A2733"/>
-                </a:solidFill>
-                <a:latin typeface="Calibri" pitchFamily="34" charset="0"/>
-                <a:ea typeface="Calibri" pitchFamily="34" charset="-122"/>
-                <a:cs typeface="Calibri" pitchFamily="34" charset="-120"/>
-              </a:rPr>
-              <a:t>Опрос, сравнение и заключение</a:t>
-            </a:r>
-            <a:endParaRPr lang="en-US" sz="1300" dirty="0"/>
-          </a:p>
-        </p:txBody>
-      </p:sp>
-      <p:sp>
-        <p:nvSpPr>
-          <p:cNvPr id="28" name="Text 26"/>
-          <p:cNvSpPr txBox="1"/>
-          <p:nvPr/>
-        </p:nvSpPr>
-        <p:spPr>
-          <a:xfrm>
-            <a:off x="9692640" y="5111496"/>
-            <a:ext cx="1691640" cy="822960"/>
-          </a:xfrm>
-          <a:prstGeom prst="rect">
-            <a:avLst/>
-          </a:prstGeom>
-          <a:noFill/>
-          <a:ln/>
-        </p:spPr>
-        <p:txBody>
-          <a:bodyPr wrap="square" lIns="0" tIns="0" rIns="0" bIns="0" rtlCol="0" anchor="ctr"/>
-          <a:lstStyle/>
-          <a:p>
-            <a:pPr algn="r" indent="0" marL="0">
-              <a:buNone/>
-            </a:pPr>
-            <a:r>
-              <a:rPr lang="en-US" sz="1200" i="1" dirty="0">
-                <a:solidFill>
-                  <a:srgbClr val="C99A3E"/>
-                </a:solidFill>
-                <a:latin typeface="Calibri" pitchFamily="34" charset="0"/>
-                <a:ea typeface="Calibri" pitchFamily="34" charset="-122"/>
-                <a:cs typeface="Calibri" pitchFamily="34" charset="-120"/>
-              </a:rPr>
-              <a:t>≈ 1,5–2 мин</a:t>
-            </a:r>
-            <a:endParaRPr lang="en-US" sz="1200" dirty="0"/>
-          </a:p>
-        </p:txBody>
-      </p:sp>
-      <p:sp>
-        <p:nvSpPr>
-          <p:cNvPr id="29" name="Text 27"/>
-          <p:cNvSpPr txBox="1"/>
-          <p:nvPr/>
-        </p:nvSpPr>
-        <p:spPr>
-          <a:xfrm>
-            <a:off x="11365992" y="6355080"/>
-            <a:ext cx="548640" cy="320040"/>
-          </a:xfrm>
-          <a:prstGeom prst="rect">
-            <a:avLst/>
-          </a:prstGeom>
-          <a:noFill/>
-          <a:ln/>
-        </p:spPr>
-        <p:txBody>
-          <a:bodyPr wrap="square" lIns="0" tIns="0" rIns="0" bIns="0" rtlCol="0" anchor="ctr"/>
-          <a:lstStyle/>
-          <a:p>
-            <a:pPr algn="r" indent="0" marL="0">
-              <a:buNone/>
-            </a:pPr>
-            <a:r>
-              <a:rPr lang="en-US" sz="1000" dirty="0">
-                <a:solidFill>
-                  <a:srgbClr val="5B6B7A"/>
-                </a:solidFill>
-                <a:latin typeface="Calibri" pitchFamily="34" charset="0"/>
-                <a:ea typeface="Calibri" pitchFamily="34" charset="-122"/>
-                <a:cs typeface="Calibri" pitchFamily="34" charset="-120"/>
-              </a:rPr>
-              <a:t>02</a:t>
+              <a:t>03</a:t>
             </a:r>
             <a:endParaRPr lang="en-US" sz="1000" dirty="0"/>
           </a:p>
@@ -3158,9 +3749,9 @@
 </p:sld>
 </file>
 
-<file path=ppt/slides/slide3.xml><?xml version="1.0" encoding="utf-8"?>
+<file path=ppt/slides/slide4.xml><?xml version="1.0" encoding="utf-8"?>
 <p:sld xmlns:a="http://schemas.openxmlformats.org/drawingml/2006/main" xmlns:r="http://schemas.openxmlformats.org/officeDocument/2006/relationships" xmlns:p="http://schemas.openxmlformats.org/presentationml/2006/main">
-  <p:cSld name="Slide 3">
+  <p:cSld name="Slide 4">
     <p:bg>
       <p:bgPr>
         <a:solidFill>
@@ -3184,23 +3775,42 @@
       </p:grpSpPr>
       <p:sp>
         <p:nvSpPr>
-          <p:cNvPr id="2" name="Shape 0"/>
-          <p:cNvSpPr/>
-          <p:nvPr/>
-        </p:nvSpPr>
-        <p:spPr>
-          <a:xfrm>
-            <a:off x="0" y="0"/>
-            <a:ext cx="4206240" cy="6858000"/>
-          </a:xfrm>
-          <a:prstGeom prst="rect">
-            <a:avLst/>
-          </a:prstGeom>
-          <a:solidFill>
-            <a:srgbClr val="10253C"/>
-          </a:solidFill>
-          <a:ln/>
-        </p:spPr>
+          <p:cNvPr id="2" name="Text 0"/>
+          <p:cNvSpPr txBox="1"/>
+          <p:nvPr/>
+        </p:nvSpPr>
+        <p:spPr>
+          <a:xfrm>
+            <a:off x="640080" y="411480"/>
+            <a:ext cx="7315200" cy="365760"/>
+          </a:xfrm>
+          <a:prstGeom prst="rect">
+            <a:avLst/>
+          </a:prstGeom>
+          <a:noFill/>
+          <a:ln/>
+        </p:spPr>
+        <p:txBody>
+          <a:bodyPr wrap="square" lIns="0" tIns="0" rIns="0" bIns="0" rtlCol="0" anchor="ctr"/>
+          <a:lstStyle/>
+          <a:p>
+            <a:pPr indent="0" marL="0">
+              <a:buNone/>
+            </a:pPr>
+            <a:r>
+              <a:rPr lang="en-US" sz="1200" b="1" spc="200" kern="0" dirty="0">
+                <a:solidFill>
+                  <a:srgbClr val="C99A3E"/>
+                </a:solidFill>
+                <a:latin typeface="Calibri" pitchFamily="34" charset="0"/>
+                <a:ea typeface="Calibri" pitchFamily="34" charset="-122"/>
+                <a:cs typeface="Calibri" pitchFamily="34" charset="-120"/>
+              </a:rPr>
+              <a:t>ТЕОРИЯ · ЧАСТЬ 2</a:t>
+            </a:r>
+            <a:endParaRPr lang="en-US" sz="1200" dirty="0"/>
+          </a:p>
+        </p:txBody>
       </p:sp>
       <p:sp>
         <p:nvSpPr>
@@ -3210,8 +3820,8 @@
         </p:nvSpPr>
         <p:spPr>
           <a:xfrm>
-            <a:off x="640080" y="548640"/>
-            <a:ext cx="640080" cy="640080"/>
+            <a:off x="10881360" y="457200"/>
+            <a:ext cx="502920" cy="502920"/>
           </a:xfrm>
           <a:prstGeom prst="ellipse">
             <a:avLst/>
@@ -3230,8 +3840,8 @@
         </p:nvSpPr>
         <p:spPr>
           <a:xfrm>
-            <a:off x="640080" y="548640"/>
-            <a:ext cx="640080" cy="640080"/>
+            <a:off x="10881360" y="457200"/>
+            <a:ext cx="502920" cy="502920"/>
           </a:xfrm>
           <a:prstGeom prst="rect">
             <a:avLst/>
@@ -3247,7 +3857,7 @@
               <a:buNone/>
             </a:pPr>
             <a:r>
-              <a:rPr lang="en-US" sz="2200" b="1" dirty="0">
+              <a:rPr lang="en-US" sz="1600" b="1" dirty="0">
                 <a:solidFill>
                   <a:srgbClr val="10253C"/>
                 </a:solidFill>
@@ -3255,9 +3865,9 @@
                 <a:ea typeface="Cambria" pitchFamily="34" charset="-122"/>
                 <a:cs typeface="Cambria" pitchFamily="34" charset="-120"/>
               </a:rPr>
-              <a:t>1</a:t>
-            </a:r>
-            <a:endParaRPr lang="en-US" sz="2200" dirty="0"/>
+              <a:t>3</a:t>
+            </a:r>
+            <a:endParaRPr lang="en-US" sz="1600" dirty="0"/>
           </a:p>
         </p:txBody>
       </p:sp>
@@ -3269,8 +3879,47 @@
         </p:nvSpPr>
         <p:spPr>
           <a:xfrm>
-            <a:off x="1463040" y="566928"/>
-            <a:ext cx="2377440" cy="457200"/>
+            <a:off x="9052560" y="502920"/>
+            <a:ext cx="1737360" cy="411480"/>
+          </a:xfrm>
+          <a:prstGeom prst="rect">
+            <a:avLst/>
+          </a:prstGeom>
+          <a:noFill/>
+          <a:ln/>
+        </p:spPr>
+        <p:txBody>
+          <a:bodyPr wrap="square" lIns="0" tIns="0" rIns="0" bIns="0" rtlCol="0" anchor="ctr"/>
+          <a:lstStyle/>
+          <a:p>
+            <a:pPr algn="r" indent="0" marL="0">
+              <a:buNone/>
+            </a:pPr>
+            <a:r>
+              <a:rPr lang="en-US" sz="1300" b="1" dirty="0">
+                <a:solidFill>
+                  <a:srgbClr val="10253C"/>
+                </a:solidFill>
+                <a:latin typeface="Calibri" pitchFamily="34" charset="0"/>
+                <a:ea typeface="Calibri" pitchFamily="34" charset="-122"/>
+                <a:cs typeface="Calibri" pitchFamily="34" charset="-120"/>
+              </a:rPr>
+              <a:t>Денис</a:t>
+            </a:r>
+            <a:endParaRPr lang="en-US" sz="1300" dirty="0"/>
+          </a:p>
+        </p:txBody>
+      </p:sp>
+      <p:sp>
+        <p:nvSpPr>
+          <p:cNvPr id="6" name="Text 4"/>
+          <p:cNvSpPr txBox="1"/>
+          <p:nvPr/>
+        </p:nvSpPr>
+        <p:spPr>
+          <a:xfrm>
+            <a:off x="640080" y="777240"/>
+            <a:ext cx="8686800" cy="640080"/>
           </a:xfrm>
           <a:prstGeom prst="rect">
             <a:avLst/>
@@ -3286,30 +3935,30 @@
               <a:buNone/>
             </a:pPr>
             <a:r>
-              <a:rPr lang="en-US" sz="2000" b="1" dirty="0">
-                <a:solidFill>
-                  <a:srgbClr val="FFFFFF"/>
+              <a:rPr lang="en-US" sz="2800" b="1" dirty="0">
+                <a:solidFill>
+                  <a:srgbClr val="10253C"/>
                 </a:solidFill>
                 <a:latin typeface="Cambria" pitchFamily="34" charset="0"/>
                 <a:ea typeface="Cambria" pitchFamily="34" charset="-122"/>
                 <a:cs typeface="Cambria" pitchFamily="34" charset="-120"/>
               </a:rPr>
-              <a:t>Никита</a:t>
-            </a:r>
-            <a:endParaRPr lang="en-US" sz="2000" dirty="0"/>
-          </a:p>
-        </p:txBody>
-      </p:sp>
-      <p:sp>
-        <p:nvSpPr>
-          <p:cNvPr id="6" name="Text 4"/>
-          <p:cNvSpPr txBox="1"/>
-          <p:nvPr/>
-        </p:nvSpPr>
-        <p:spPr>
-          <a:xfrm>
-            <a:off x="1463040" y="987552"/>
-            <a:ext cx="2560320" cy="320040"/>
+              <a:t>Музыка как портрет города</a:t>
+            </a:r>
+            <a:endParaRPr lang="en-US" sz="2800" dirty="0"/>
+          </a:p>
+        </p:txBody>
+      </p:sp>
+      <p:sp>
+        <p:nvSpPr>
+          <p:cNvPr id="7" name="Text 5"/>
+          <p:cNvSpPr txBox="1"/>
+          <p:nvPr/>
+        </p:nvSpPr>
+        <p:spPr>
+          <a:xfrm>
+            <a:off x="640080" y="1417320"/>
+            <a:ext cx="10515600" cy="457200"/>
           </a:xfrm>
           <a:prstGeom prst="rect">
             <a:avLst/>
@@ -3325,140 +3974,111 @@
               <a:buNone/>
             </a:pPr>
             <a:r>
-              <a:rPr lang="en-US" sz="1100" i="1" dirty="0">
-                <a:solidFill>
-                  <a:srgbClr val="9FB3CC"/>
+              <a:rPr lang="en-US" sz="1350" dirty="0">
+                <a:solidFill>
+                  <a:srgbClr val="1A2733"/>
                 </a:solidFill>
                 <a:latin typeface="Calibri" pitchFamily="34" charset="0"/>
                 <a:ea typeface="Calibri" pitchFamily="34" charset="-122"/>
                 <a:cs typeface="Calibri" pitchFamily="34" charset="-120"/>
               </a:rPr>
-              <a:t>вступление · цель · задачи</a:t>
-            </a:r>
-            <a:endParaRPr lang="en-US" sz="1100" dirty="0"/>
-          </a:p>
-        </p:txBody>
-      </p:sp>
-      <p:sp>
-        <p:nvSpPr>
-          <p:cNvPr id="7" name="Text 5"/>
-          <p:cNvSpPr txBox="1"/>
-          <p:nvPr/>
-        </p:nvSpPr>
-        <p:spPr>
-          <a:xfrm>
-            <a:off x="640080" y="1828800"/>
-            <a:ext cx="3200400" cy="2926080"/>
-          </a:xfrm>
-          <a:prstGeom prst="rect">
-            <a:avLst/>
-          </a:prstGeom>
-          <a:noFill/>
-          <a:ln/>
-        </p:spPr>
-        <p:txBody>
-          <a:bodyPr wrap="square" lIns="0" tIns="0" rIns="0" bIns="0" rtlCol="0" anchor="ctr"/>
-          <a:lstStyle/>
-          <a:p>
-            <a:pPr indent="0" marL="0">
-              <a:lnSpc>
-                <a:spcPct val="125000"/>
-              </a:lnSpc>
-              <a:buNone/>
-            </a:pPr>
-            <a:r>
-              <a:rPr lang="en-US" sz="1450" i="1" dirty="0">
-                <a:solidFill>
-                  <a:srgbClr val="EAF0F7"/>
-                </a:solidFill>
-                <a:latin typeface="Calibri" pitchFamily="34" charset="0"/>
-                <a:ea typeface="Calibri" pitchFamily="34" charset="-122"/>
-                <a:cs typeface="Calibri" pitchFamily="34" charset="-120"/>
-              </a:rPr>
-              <a:t>Мы слышим гимн города чаще, чем замечаем: на вокзале, на празднике, в День города.</a:t>
-            </a:r>
-            <a:endParaRPr lang="en-US" sz="1450" dirty="0"/>
-          </a:p>
-          <a:p>
-            <a:pPr indent="0" marL="0">
-              <a:lnSpc>
-                <a:spcPct val="125000"/>
-              </a:lnSpc>
-              <a:buNone/>
-            </a:pPr>
-            <a:endParaRPr lang="en-US" sz="1450" dirty="0"/>
-          </a:p>
-          <a:p>
-            <a:pPr indent="0" marL="0">
-              <a:lnSpc>
-                <a:spcPct val="125000"/>
-              </a:lnSpc>
-              <a:buNone/>
-            </a:pPr>
-            <a:r>
-              <a:rPr lang="en-US" sz="1450" i="1" dirty="0">
-                <a:solidFill>
-                  <a:srgbClr val="EAF0F7"/>
-                </a:solidFill>
-                <a:latin typeface="Calibri" pitchFamily="34" charset="0"/>
-                <a:ea typeface="Calibri" pitchFamily="34" charset="-122"/>
-                <a:cs typeface="Calibri" pitchFamily="34" charset="-120"/>
-              </a:rPr>
-              <a:t>Но кто его написал и о чём он — знают единицы.</a:t>
-            </a:r>
-            <a:endParaRPr lang="en-US" sz="1450" dirty="0"/>
-          </a:p>
-        </p:txBody>
-      </p:sp>
-      <p:sp>
-        <p:nvSpPr>
-          <p:cNvPr id="8" name="Text 6"/>
-          <p:cNvSpPr txBox="1"/>
-          <p:nvPr/>
-        </p:nvSpPr>
-        <p:spPr>
-          <a:xfrm>
-            <a:off x="640080" y="5806440"/>
-            <a:ext cx="3200400" cy="548640"/>
-          </a:xfrm>
-          <a:prstGeom prst="rect">
-            <a:avLst/>
-          </a:prstGeom>
-          <a:noFill/>
-          <a:ln/>
-        </p:spPr>
-        <p:txBody>
-          <a:bodyPr wrap="square" lIns="0" tIns="0" rIns="0" bIns="0" rtlCol="0" anchor="ctr"/>
-          <a:lstStyle/>
-          <a:p>
-            <a:pPr indent="0" marL="0">
-              <a:buNone/>
-            </a:pPr>
-            <a:r>
-              <a:rPr lang="en-US" sz="1300" b="1" dirty="0">
-                <a:solidFill>
-                  <a:srgbClr val="C99A3E"/>
+              <a:t>Гимн не рассказывает о Петербурге словами — он его изображает звуком. Пять приёмов, в которых это слышно:</a:t>
+            </a:r>
+            <a:endParaRPr lang="en-US" sz="1350" dirty="0"/>
+          </a:p>
+        </p:txBody>
+      </p:sp>
+      <p:sp>
+        <p:nvSpPr>
+          <p:cNvPr id="8" name="Shape 6"/>
+          <p:cNvSpPr/>
+          <p:nvPr/>
+        </p:nvSpPr>
+        <p:spPr>
+          <a:xfrm>
+            <a:off x="640080" y="2057400"/>
+            <a:ext cx="3429000" cy="1417320"/>
+          </a:xfrm>
+          <a:prstGeom prst="roundRect">
+            <a:avLst>
+              <a:gd name="adj" fmla="val 5161"/>
+            </a:avLst>
+          </a:prstGeom>
+          <a:solidFill>
+            <a:srgbClr val="EAF0F7"/>
+          </a:solidFill>
+          <a:ln/>
+        </p:spPr>
+      </p:sp>
+      <p:sp>
+        <p:nvSpPr>
+          <p:cNvPr id="9" name="Shape 7"/>
+          <p:cNvSpPr/>
+          <p:nvPr/>
+        </p:nvSpPr>
+        <p:spPr>
+          <a:xfrm>
+            <a:off x="868680" y="2258568"/>
+            <a:ext cx="384048" cy="384048"/>
+          </a:xfrm>
+          <a:prstGeom prst="ellipse">
+            <a:avLst/>
+          </a:prstGeom>
+          <a:solidFill>
+            <a:srgbClr val="1B3A5C"/>
+          </a:solidFill>
+          <a:ln/>
+        </p:spPr>
+      </p:sp>
+      <p:sp>
+        <p:nvSpPr>
+          <p:cNvPr id="10" name="Text 8"/>
+          <p:cNvSpPr txBox="1"/>
+          <p:nvPr/>
+        </p:nvSpPr>
+        <p:spPr>
+          <a:xfrm>
+            <a:off x="868680" y="2258568"/>
+            <a:ext cx="384048" cy="384048"/>
+          </a:xfrm>
+          <a:prstGeom prst="rect">
+            <a:avLst/>
+          </a:prstGeom>
+          <a:noFill/>
+          <a:ln/>
+        </p:spPr>
+        <p:txBody>
+          <a:bodyPr wrap="square" lIns="0" tIns="0" rIns="0" bIns="0" rtlCol="0" anchor="ctr"/>
+          <a:lstStyle/>
+          <a:p>
+            <a:pPr algn="ctr" indent="0" marL="0">
+              <a:buNone/>
+            </a:pPr>
+            <a:r>
+              <a:rPr lang="en-US" sz="1600" b="1" dirty="0">
+                <a:solidFill>
+                  <a:srgbClr val="FFFFFF"/>
                 </a:solidFill>
                 <a:latin typeface="Cambria" pitchFamily="34" charset="0"/>
                 <a:ea typeface="Cambria" pitchFamily="34" charset="-122"/>
                 <a:cs typeface="Cambria" pitchFamily="34" charset="-120"/>
               </a:rPr>
-              <a:t>«Гимн великому городу»</a:t>
-            </a:r>
-            <a:endParaRPr lang="en-US" sz="1300" dirty="0"/>
-          </a:p>
-        </p:txBody>
-      </p:sp>
-      <p:sp>
-        <p:nvSpPr>
-          <p:cNvPr id="9" name="Text 7"/>
-          <p:cNvSpPr txBox="1"/>
-          <p:nvPr/>
-        </p:nvSpPr>
-        <p:spPr>
-          <a:xfrm>
-            <a:off x="4663440" y="594360"/>
-            <a:ext cx="6675120" cy="365760"/>
+              <a:t>♪</a:t>
+            </a:r>
+            <a:endParaRPr lang="en-US" sz="1600" dirty="0"/>
+          </a:p>
+        </p:txBody>
+      </p:sp>
+      <p:sp>
+        <p:nvSpPr>
+          <p:cNvPr id="11" name="Text 9"/>
+          <p:cNvSpPr txBox="1"/>
+          <p:nvPr/>
+        </p:nvSpPr>
+        <p:spPr>
+          <a:xfrm>
+            <a:off x="868680" y="2743200"/>
+            <a:ext cx="2971800" cy="365760"/>
           </a:xfrm>
           <a:prstGeom prst="rect">
             <a:avLst/>
@@ -3474,131 +4094,30 @@
               <a:buNone/>
             </a:pPr>
             <a:r>
-              <a:rPr lang="en-US" sz="1300" b="1" spc="200" kern="0" dirty="0">
-                <a:solidFill>
-                  <a:srgbClr val="C99A3E"/>
-                </a:solidFill>
-                <a:latin typeface="Calibri" pitchFamily="34" charset="0"/>
-                <a:ea typeface="Calibri" pitchFamily="34" charset="-122"/>
-                <a:cs typeface="Calibri" pitchFamily="34" charset="-120"/>
-              </a:rPr>
-              <a:t>ЦЕЛЬ</a:t>
-            </a:r>
-            <a:endParaRPr lang="en-US" sz="1300" dirty="0"/>
-          </a:p>
-        </p:txBody>
-      </p:sp>
-      <p:sp>
-        <p:nvSpPr>
-          <p:cNvPr id="10" name="Text 8"/>
-          <p:cNvSpPr txBox="1"/>
-          <p:nvPr/>
-        </p:nvSpPr>
-        <p:spPr>
-          <a:xfrm>
-            <a:off x="4663440" y="960120"/>
-            <a:ext cx="6675120" cy="914400"/>
-          </a:xfrm>
-          <a:prstGeom prst="rect">
-            <a:avLst/>
-          </a:prstGeom>
-          <a:noFill/>
-          <a:ln/>
-        </p:spPr>
-        <p:txBody>
-          <a:bodyPr wrap="square" lIns="0" tIns="0" rIns="0" bIns="0" rtlCol="0" anchor="ctr"/>
-          <a:lstStyle/>
-          <a:p>
-            <a:pPr indent="0" marL="0">
-              <a:lnSpc>
-                <a:spcPct val="120000"/>
-              </a:lnSpc>
-              <a:buNone/>
-            </a:pPr>
-            <a:r>
-              <a:rPr lang="en-US" sz="1400" dirty="0">
-                <a:solidFill>
-                  <a:srgbClr val="1A2733"/>
-                </a:solidFill>
-                <a:latin typeface="Calibri" pitchFamily="34" charset="0"/>
-                <a:ea typeface="Calibri" pitchFamily="34" charset="-122"/>
-                <a:cs typeface="Calibri" pitchFamily="34" charset="-120"/>
-              </a:rPr>
-              <a:t>Изучить историю создания, символику и значение гимна Санкт-Петербурга — и рассказать о нём так, чтобы каждый мог объяснить, что это за музыка и почему она именно такая.</a:t>
-            </a:r>
-            <a:endParaRPr lang="en-US" sz="1400" dirty="0"/>
-          </a:p>
-        </p:txBody>
-      </p:sp>
-      <p:sp>
-        <p:nvSpPr>
-          <p:cNvPr id="11" name="Text 9"/>
-          <p:cNvSpPr txBox="1"/>
-          <p:nvPr/>
-        </p:nvSpPr>
-        <p:spPr>
-          <a:xfrm>
-            <a:off x="4663440" y="1965960"/>
-            <a:ext cx="6675120" cy="365760"/>
-          </a:xfrm>
-          <a:prstGeom prst="rect">
-            <a:avLst/>
-          </a:prstGeom>
-          <a:noFill/>
-          <a:ln/>
-        </p:spPr>
-        <p:txBody>
-          <a:bodyPr wrap="square" lIns="0" tIns="0" rIns="0" bIns="0" rtlCol="0" anchor="ctr"/>
-          <a:lstStyle/>
-          <a:p>
-            <a:pPr indent="0" marL="0">
-              <a:buNone/>
-            </a:pPr>
-            <a:r>
-              <a:rPr lang="en-US" sz="1300" b="1" spc="200" kern="0" dirty="0">
-                <a:solidFill>
-                  <a:srgbClr val="C99A3E"/>
-                </a:solidFill>
-                <a:latin typeface="Calibri" pitchFamily="34" charset="0"/>
-                <a:ea typeface="Calibri" pitchFamily="34" charset="-122"/>
-                <a:cs typeface="Calibri" pitchFamily="34" charset="-120"/>
-              </a:rPr>
-              <a:t>ЗАДАЧИ</a:t>
-            </a:r>
-            <a:endParaRPr lang="en-US" sz="1300" dirty="0"/>
-          </a:p>
-        </p:txBody>
-      </p:sp>
-      <p:sp>
-        <p:nvSpPr>
-          <p:cNvPr id="12" name="Shape 10"/>
-          <p:cNvSpPr/>
-          <p:nvPr/>
-        </p:nvSpPr>
-        <p:spPr>
-          <a:xfrm>
-            <a:off x="4663440" y="2423160"/>
-            <a:ext cx="201168" cy="201168"/>
-          </a:xfrm>
-          <a:prstGeom prst="ellipse">
-            <a:avLst/>
-          </a:prstGeom>
-          <a:solidFill>
-            <a:srgbClr val="C99A3E"/>
-          </a:solidFill>
-          <a:ln/>
-        </p:spPr>
-      </p:sp>
-      <p:sp>
-        <p:nvSpPr>
-          <p:cNvPr id="13" name="Text 11"/>
-          <p:cNvSpPr txBox="1"/>
-          <p:nvPr/>
-        </p:nvSpPr>
-        <p:spPr>
-          <a:xfrm>
-            <a:off x="5074920" y="2322576"/>
-            <a:ext cx="6263640" cy="502920"/>
+              <a:rPr lang="en-US" sz="1250" b="1" dirty="0">
+                <a:solidFill>
+                  <a:srgbClr val="10253C"/>
+                </a:solidFill>
+                <a:latin typeface="Cambria" pitchFamily="34" charset="0"/>
+                <a:ea typeface="Cambria" pitchFamily="34" charset="-122"/>
+                <a:cs typeface="Cambria" pitchFamily="34" charset="-120"/>
+              </a:rPr>
+              <a:t>Медленный, широкий темп</a:t>
+            </a:r>
+            <a:endParaRPr lang="en-US" sz="1250" dirty="0"/>
+          </a:p>
+        </p:txBody>
+      </p:sp>
+      <p:sp>
+        <p:nvSpPr>
+          <p:cNvPr id="12" name="Text 10"/>
+          <p:cNvSpPr txBox="1"/>
+          <p:nvPr/>
+        </p:nvSpPr>
+        <p:spPr>
+          <a:xfrm>
+            <a:off x="868680" y="3063240"/>
+            <a:ext cx="2971800" cy="502920"/>
           </a:xfrm>
           <a:prstGeom prst="rect">
             <a:avLst/>
@@ -3617,19 +4136,41 @@
               <a:buNone/>
             </a:pPr>
             <a:r>
-              <a:rPr lang="en-US" sz="1250" dirty="0">
-                <a:solidFill>
-                  <a:srgbClr val="1A2733"/>
+              <a:rPr lang="en-US" sz="1050" dirty="0">
+                <a:solidFill>
+                  <a:srgbClr val="5B6B7A"/>
                 </a:solidFill>
                 <a:latin typeface="Calibri" pitchFamily="34" charset="0"/>
                 <a:ea typeface="Calibri" pitchFamily="34" charset="-122"/>
                 <a:cs typeface="Calibri" pitchFamily="34" charset="-120"/>
               </a:rPr>
-              <a:t>Узнать, кто написал музыку и слова и при каких обстоятельствах создавался гимн</a:t>
-            </a:r>
-            <a:endParaRPr lang="en-US" sz="1250" dirty="0"/>
-          </a:p>
-        </p:txBody>
+              <a:t>Величие и спокойствие — город никуда не торопится</a:t>
+            </a:r>
+            <a:endParaRPr lang="en-US" sz="1050" dirty="0"/>
+          </a:p>
+        </p:txBody>
+      </p:sp>
+      <p:sp>
+        <p:nvSpPr>
+          <p:cNvPr id="13" name="Shape 11"/>
+          <p:cNvSpPr/>
+          <p:nvPr/>
+        </p:nvSpPr>
+        <p:spPr>
+          <a:xfrm>
+            <a:off x="4297680" y="2057400"/>
+            <a:ext cx="3429000" cy="1417320"/>
+          </a:xfrm>
+          <a:prstGeom prst="roundRect">
+            <a:avLst>
+              <a:gd name="adj" fmla="val 5161"/>
+            </a:avLst>
+          </a:prstGeom>
+          <a:solidFill>
+            <a:srgbClr val="EAF0F7"/>
+          </a:solidFill>
+          <a:ln/>
+        </p:spPr>
       </p:sp>
       <p:sp>
         <p:nvSpPr>
@@ -3639,14 +4180,14 @@
         </p:nvSpPr>
         <p:spPr>
           <a:xfrm>
-            <a:off x="4663440" y="3081528"/>
-            <a:ext cx="201168" cy="201168"/>
+            <a:off x="4526280" y="2258568"/>
+            <a:ext cx="384048" cy="384048"/>
           </a:xfrm>
           <a:prstGeom prst="ellipse">
             <a:avLst/>
           </a:prstGeom>
           <a:solidFill>
-            <a:srgbClr val="C99A3E"/>
+            <a:srgbClr val="1B3A5C"/>
           </a:solidFill>
           <a:ln/>
         </p:spPr>
@@ -3659,8 +4200,86 @@
         </p:nvSpPr>
         <p:spPr>
           <a:xfrm>
-            <a:off x="5074920" y="2980944"/>
-            <a:ext cx="6263640" cy="502920"/>
+            <a:off x="4526280" y="2258568"/>
+            <a:ext cx="384048" cy="384048"/>
+          </a:xfrm>
+          <a:prstGeom prst="rect">
+            <a:avLst/>
+          </a:prstGeom>
+          <a:noFill/>
+          <a:ln/>
+        </p:spPr>
+        <p:txBody>
+          <a:bodyPr wrap="square" lIns="0" tIns="0" rIns="0" bIns="0" rtlCol="0" anchor="ctr"/>
+          <a:lstStyle/>
+          <a:p>
+            <a:pPr algn="ctr" indent="0" marL="0">
+              <a:buNone/>
+            </a:pPr>
+            <a:r>
+              <a:rPr lang="en-US" sz="1600" b="1" dirty="0">
+                <a:solidFill>
+                  <a:srgbClr val="FFFFFF"/>
+                </a:solidFill>
+                <a:latin typeface="Cambria" pitchFamily="34" charset="0"/>
+                <a:ea typeface="Cambria" pitchFamily="34" charset="-122"/>
+                <a:cs typeface="Cambria" pitchFamily="34" charset="-120"/>
+              </a:rPr>
+              <a:t>♪</a:t>
+            </a:r>
+            <a:endParaRPr lang="en-US" sz="1600" dirty="0"/>
+          </a:p>
+        </p:txBody>
+      </p:sp>
+      <p:sp>
+        <p:nvSpPr>
+          <p:cNvPr id="16" name="Text 14"/>
+          <p:cNvSpPr txBox="1"/>
+          <p:nvPr/>
+        </p:nvSpPr>
+        <p:spPr>
+          <a:xfrm>
+            <a:off x="4526280" y="2743200"/>
+            <a:ext cx="2971800" cy="365760"/>
+          </a:xfrm>
+          <a:prstGeom prst="rect">
+            <a:avLst/>
+          </a:prstGeom>
+          <a:noFill/>
+          <a:ln/>
+        </p:spPr>
+        <p:txBody>
+          <a:bodyPr wrap="square" lIns="0" tIns="0" rIns="0" bIns="0" rtlCol="0" anchor="ctr"/>
+          <a:lstStyle/>
+          <a:p>
+            <a:pPr indent="0" marL="0">
+              <a:buNone/>
+            </a:pPr>
+            <a:r>
+              <a:rPr lang="en-US" sz="1250" b="1" dirty="0">
+                <a:solidFill>
+                  <a:srgbClr val="10253C"/>
+                </a:solidFill>
+                <a:latin typeface="Cambria" pitchFamily="34" charset="0"/>
+                <a:ea typeface="Cambria" pitchFamily="34" charset="-122"/>
+                <a:cs typeface="Cambria" pitchFamily="34" charset="-120"/>
+              </a:rPr>
+              <a:t>Мощные духовые и медь</a:t>
+            </a:r>
+            <a:endParaRPr lang="en-US" sz="1250" dirty="0"/>
+          </a:p>
+        </p:txBody>
+      </p:sp>
+      <p:sp>
+        <p:nvSpPr>
+          <p:cNvPr id="17" name="Text 15"/>
+          <p:cNvSpPr txBox="1"/>
+          <p:nvPr/>
+        </p:nvSpPr>
+        <p:spPr>
+          <a:xfrm>
+            <a:off x="4526280" y="3063240"/>
+            <a:ext cx="2971800" cy="502920"/>
           </a:xfrm>
           <a:prstGeom prst="rect">
             <a:avLst/>
@@ -3679,15 +4298,135 @@
               <a:buNone/>
             </a:pPr>
             <a:r>
-              <a:rPr lang="en-US" sz="1250" dirty="0">
-                <a:solidFill>
-                  <a:srgbClr val="1A2733"/>
+              <a:rPr lang="en-US" sz="1050" dirty="0">
+                <a:solidFill>
+                  <a:srgbClr val="5B6B7A"/>
                 </a:solidFill>
                 <a:latin typeface="Calibri" pitchFamily="34" charset="0"/>
                 <a:ea typeface="Calibri" pitchFamily="34" charset="-122"/>
                 <a:cs typeface="Calibri" pitchFamily="34" charset="-120"/>
               </a:rPr>
-              <a:t>Разобраться, как гимн стал официальным символом города</a:t>
+              <a:t>Гранит, камень, монументальная архитектура</a:t>
+            </a:r>
+            <a:endParaRPr lang="en-US" sz="1050" dirty="0"/>
+          </a:p>
+        </p:txBody>
+      </p:sp>
+      <p:sp>
+        <p:nvSpPr>
+          <p:cNvPr id="18" name="Shape 16"/>
+          <p:cNvSpPr/>
+          <p:nvPr/>
+        </p:nvSpPr>
+        <p:spPr>
+          <a:xfrm>
+            <a:off x="7955280" y="2057400"/>
+            <a:ext cx="3429000" cy="1417320"/>
+          </a:xfrm>
+          <a:prstGeom prst="roundRect">
+            <a:avLst>
+              <a:gd name="adj" fmla="val 5161"/>
+            </a:avLst>
+          </a:prstGeom>
+          <a:solidFill>
+            <a:srgbClr val="EAF0F7"/>
+          </a:solidFill>
+          <a:ln/>
+        </p:spPr>
+      </p:sp>
+      <p:sp>
+        <p:nvSpPr>
+          <p:cNvPr id="19" name="Shape 17"/>
+          <p:cNvSpPr/>
+          <p:nvPr/>
+        </p:nvSpPr>
+        <p:spPr>
+          <a:xfrm>
+            <a:off x="8183880" y="2258568"/>
+            <a:ext cx="384048" cy="384048"/>
+          </a:xfrm>
+          <a:prstGeom prst="ellipse">
+            <a:avLst/>
+          </a:prstGeom>
+          <a:solidFill>
+            <a:srgbClr val="1B3A5C"/>
+          </a:solidFill>
+          <a:ln/>
+        </p:spPr>
+      </p:sp>
+      <p:sp>
+        <p:nvSpPr>
+          <p:cNvPr id="20" name="Text 18"/>
+          <p:cNvSpPr txBox="1"/>
+          <p:nvPr/>
+        </p:nvSpPr>
+        <p:spPr>
+          <a:xfrm>
+            <a:off x="8183880" y="2258568"/>
+            <a:ext cx="384048" cy="384048"/>
+          </a:xfrm>
+          <a:prstGeom prst="rect">
+            <a:avLst/>
+          </a:prstGeom>
+          <a:noFill/>
+          <a:ln/>
+        </p:spPr>
+        <p:txBody>
+          <a:bodyPr wrap="square" lIns="0" tIns="0" rIns="0" bIns="0" rtlCol="0" anchor="ctr"/>
+          <a:lstStyle/>
+          <a:p>
+            <a:pPr algn="ctr" indent="0" marL="0">
+              <a:buNone/>
+            </a:pPr>
+            <a:r>
+              <a:rPr lang="en-US" sz="1600" b="1" dirty="0">
+                <a:solidFill>
+                  <a:srgbClr val="FFFFFF"/>
+                </a:solidFill>
+                <a:latin typeface="Cambria" pitchFamily="34" charset="0"/>
+                <a:ea typeface="Cambria" pitchFamily="34" charset="-122"/>
+                <a:cs typeface="Cambria" pitchFamily="34" charset="-120"/>
+              </a:rPr>
+              <a:t>♪</a:t>
+            </a:r>
+            <a:endParaRPr lang="en-US" sz="1600" dirty="0"/>
+          </a:p>
+        </p:txBody>
+      </p:sp>
+      <p:sp>
+        <p:nvSpPr>
+          <p:cNvPr id="21" name="Text 19"/>
+          <p:cNvSpPr txBox="1"/>
+          <p:nvPr/>
+        </p:nvSpPr>
+        <p:spPr>
+          <a:xfrm>
+            <a:off x="8183880" y="2743200"/>
+            <a:ext cx="2971800" cy="365760"/>
+          </a:xfrm>
+          <a:prstGeom prst="rect">
+            <a:avLst/>
+          </a:prstGeom>
+          <a:noFill/>
+          <a:ln/>
+        </p:spPr>
+        <p:txBody>
+          <a:bodyPr wrap="square" lIns="0" tIns="0" rIns="0" bIns="0" rtlCol="0" anchor="ctr"/>
+          <a:lstStyle/>
+          <a:p>
+            <a:pPr indent="0" marL="0">
+              <a:buNone/>
+            </a:pPr>
+            <a:r>
+              <a:rPr lang="en-US" sz="1250" b="1" dirty="0">
+                <a:solidFill>
+                  <a:srgbClr val="10253C"/>
+                </a:solidFill>
+                <a:latin typeface="Cambria" pitchFamily="34" charset="0"/>
+                <a:ea typeface="Cambria" pitchFamily="34" charset="-122"/>
+                <a:cs typeface="Cambria" pitchFamily="34" charset="-120"/>
+              </a:rPr>
+              <a:t>Торжественный, гимнический характер</a:t>
             </a:r>
             <a:endParaRPr lang="en-US" sz="1250" dirty="0"/>
           </a:p>
@@ -3695,34 +4434,14 @@
       </p:sp>
       <p:sp>
         <p:nvSpPr>
-          <p:cNvPr id="16" name="Shape 14"/>
-          <p:cNvSpPr/>
-          <p:nvPr/>
-        </p:nvSpPr>
-        <p:spPr>
-          <a:xfrm>
-            <a:off x="4663440" y="3739896"/>
-            <a:ext cx="201168" cy="201168"/>
-          </a:xfrm>
-          <a:prstGeom prst="ellipse">
-            <a:avLst/>
-          </a:prstGeom>
-          <a:solidFill>
-            <a:srgbClr val="C99A3E"/>
-          </a:solidFill>
-          <a:ln/>
-        </p:spPr>
-      </p:sp>
-      <p:sp>
-        <p:nvSpPr>
-          <p:cNvPr id="17" name="Text 15"/>
-          <p:cNvSpPr txBox="1"/>
-          <p:nvPr/>
-        </p:nvSpPr>
-        <p:spPr>
-          <a:xfrm>
-            <a:off x="5074920" y="3639312"/>
-            <a:ext cx="6263640" cy="502920"/>
+          <p:cNvPr id="22" name="Text 20"/>
+          <p:cNvSpPr txBox="1"/>
+          <p:nvPr/>
+        </p:nvSpPr>
+        <p:spPr>
+          <a:xfrm>
+            <a:off x="8183880" y="3063240"/>
+            <a:ext cx="2971800" cy="502920"/>
           </a:xfrm>
           <a:prstGeom prst="rect">
             <a:avLst/>
@@ -3741,15 +4460,135 @@
               <a:buNone/>
             </a:pPr>
             <a:r>
-              <a:rPr lang="en-US" sz="1250" dirty="0">
-                <a:solidFill>
-                  <a:srgbClr val="1A2733"/>
+              <a:rPr lang="en-US" sz="1050" dirty="0">
+                <a:solidFill>
+                  <a:srgbClr val="5B6B7A"/>
                 </a:solidFill>
                 <a:latin typeface="Calibri" pitchFamily="34" charset="0"/>
                 <a:ea typeface="Calibri" pitchFamily="34" charset="-122"/>
                 <a:cs typeface="Calibri" pitchFamily="34" charset="-120"/>
               </a:rPr>
-              <a:t>Проанализировать музыку и текст: какими средствами передан характер Петербурга</a:t>
+              <a:t>Праздник и гордость, парадный облик города</a:t>
+            </a:r>
+            <a:endParaRPr lang="en-US" sz="1050" dirty="0"/>
+          </a:p>
+        </p:txBody>
+      </p:sp>
+      <p:sp>
+        <p:nvSpPr>
+          <p:cNvPr id="23" name="Shape 21"/>
+          <p:cNvSpPr/>
+          <p:nvPr/>
+        </p:nvSpPr>
+        <p:spPr>
+          <a:xfrm>
+            <a:off x="640080" y="3703320"/>
+            <a:ext cx="3429000" cy="1417320"/>
+          </a:xfrm>
+          <a:prstGeom prst="roundRect">
+            <a:avLst>
+              <a:gd name="adj" fmla="val 5161"/>
+            </a:avLst>
+          </a:prstGeom>
+          <a:solidFill>
+            <a:srgbClr val="EAF0F7"/>
+          </a:solidFill>
+          <a:ln/>
+        </p:spPr>
+      </p:sp>
+      <p:sp>
+        <p:nvSpPr>
+          <p:cNvPr id="24" name="Shape 22"/>
+          <p:cNvSpPr/>
+          <p:nvPr/>
+        </p:nvSpPr>
+        <p:spPr>
+          <a:xfrm>
+            <a:off x="868680" y="3904488"/>
+            <a:ext cx="384048" cy="384048"/>
+          </a:xfrm>
+          <a:prstGeom prst="ellipse">
+            <a:avLst/>
+          </a:prstGeom>
+          <a:solidFill>
+            <a:srgbClr val="1B3A5C"/>
+          </a:solidFill>
+          <a:ln/>
+        </p:spPr>
+      </p:sp>
+      <p:sp>
+        <p:nvSpPr>
+          <p:cNvPr id="25" name="Text 23"/>
+          <p:cNvSpPr txBox="1"/>
+          <p:nvPr/>
+        </p:nvSpPr>
+        <p:spPr>
+          <a:xfrm>
+            <a:off x="868680" y="3904488"/>
+            <a:ext cx="384048" cy="384048"/>
+          </a:xfrm>
+          <a:prstGeom prst="rect">
+            <a:avLst/>
+          </a:prstGeom>
+          <a:noFill/>
+          <a:ln/>
+        </p:spPr>
+        <p:txBody>
+          <a:bodyPr wrap="square" lIns="0" tIns="0" rIns="0" bIns="0" rtlCol="0" anchor="ctr"/>
+          <a:lstStyle/>
+          <a:p>
+            <a:pPr algn="ctr" indent="0" marL="0">
+              <a:buNone/>
+            </a:pPr>
+            <a:r>
+              <a:rPr lang="en-US" sz="1600" b="1" dirty="0">
+                <a:solidFill>
+                  <a:srgbClr val="FFFFFF"/>
+                </a:solidFill>
+                <a:latin typeface="Cambria" pitchFamily="34" charset="0"/>
+                <a:ea typeface="Cambria" pitchFamily="34" charset="-122"/>
+                <a:cs typeface="Cambria" pitchFamily="34" charset="-120"/>
+              </a:rPr>
+              <a:t>♪</a:t>
+            </a:r>
+            <a:endParaRPr lang="en-US" sz="1600" dirty="0"/>
+          </a:p>
+        </p:txBody>
+      </p:sp>
+      <p:sp>
+        <p:nvSpPr>
+          <p:cNvPr id="26" name="Text 24"/>
+          <p:cNvSpPr txBox="1"/>
+          <p:nvPr/>
+        </p:nvSpPr>
+        <p:spPr>
+          <a:xfrm>
+            <a:off x="868680" y="4389120"/>
+            <a:ext cx="2971800" cy="365760"/>
+          </a:xfrm>
+          <a:prstGeom prst="rect">
+            <a:avLst/>
+          </a:prstGeom>
+          <a:noFill/>
+          <a:ln/>
+        </p:spPr>
+        <p:txBody>
+          <a:bodyPr wrap="square" lIns="0" tIns="0" rIns="0" bIns="0" rtlCol="0" anchor="ctr"/>
+          <a:lstStyle/>
+          <a:p>
+            <a:pPr indent="0" marL="0">
+              <a:buNone/>
+            </a:pPr>
+            <a:r>
+              <a:rPr lang="en-US" sz="1250" b="1" dirty="0">
+                <a:solidFill>
+                  <a:srgbClr val="10253C"/>
+                </a:solidFill>
+                <a:latin typeface="Cambria" pitchFamily="34" charset="0"/>
+                <a:ea typeface="Cambria" pitchFamily="34" charset="-122"/>
+                <a:cs typeface="Cambria" pitchFamily="34" charset="-120"/>
+              </a:rPr>
+              <a:t>Плавные, широкие фразы</a:t>
             </a:r>
             <a:endParaRPr lang="en-US" sz="1250" dirty="0"/>
           </a:p>
@@ -3757,34 +4596,14 @@
       </p:sp>
       <p:sp>
         <p:nvSpPr>
-          <p:cNvPr id="18" name="Shape 16"/>
-          <p:cNvSpPr/>
-          <p:nvPr/>
-        </p:nvSpPr>
-        <p:spPr>
-          <a:xfrm>
-            <a:off x="4663440" y="4398264"/>
-            <a:ext cx="201168" cy="201168"/>
-          </a:xfrm>
-          <a:prstGeom prst="ellipse">
-            <a:avLst/>
-          </a:prstGeom>
-          <a:solidFill>
-            <a:srgbClr val="C99A3E"/>
-          </a:solidFill>
-          <a:ln/>
-        </p:spPr>
-      </p:sp>
-      <p:sp>
-        <p:nvSpPr>
-          <p:cNvPr id="19" name="Text 17"/>
-          <p:cNvSpPr txBox="1"/>
-          <p:nvPr/>
-        </p:nvSpPr>
-        <p:spPr>
-          <a:xfrm>
-            <a:off x="5074920" y="4297680"/>
-            <a:ext cx="6263640" cy="502920"/>
+          <p:cNvPr id="27" name="Text 25"/>
+          <p:cNvSpPr txBox="1"/>
+          <p:nvPr/>
+        </p:nvSpPr>
+        <p:spPr>
+          <a:xfrm>
+            <a:off x="868680" y="4709160"/>
+            <a:ext cx="2971800" cy="502920"/>
           </a:xfrm>
           <a:prstGeom prst="rect">
             <a:avLst/>
@@ -3803,15 +4622,135 @@
               <a:buNone/>
             </a:pPr>
             <a:r>
-              <a:rPr lang="en-US" sz="1250" dirty="0">
-                <a:solidFill>
-                  <a:srgbClr val="1A2733"/>
+              <a:rPr lang="en-US" sz="1050" dirty="0">
+                <a:solidFill>
+                  <a:srgbClr val="5B6B7A"/>
                 </a:solidFill>
                 <a:latin typeface="Calibri" pitchFamily="34" charset="0"/>
                 <a:ea typeface="Calibri" pitchFamily="34" charset="-122"/>
                 <a:cs typeface="Calibri" pitchFamily="34" charset="-120"/>
               </a:rPr>
-              <a:t>Сравнить наш гимн с гимном другого региона</a:t>
+              <a:t>Нева, простор, открытые панорамы</a:t>
+            </a:r>
+            <a:endParaRPr lang="en-US" sz="1050" dirty="0"/>
+          </a:p>
+        </p:txBody>
+      </p:sp>
+      <p:sp>
+        <p:nvSpPr>
+          <p:cNvPr id="28" name="Shape 26"/>
+          <p:cNvSpPr/>
+          <p:nvPr/>
+        </p:nvSpPr>
+        <p:spPr>
+          <a:xfrm>
+            <a:off x="4297680" y="3703320"/>
+            <a:ext cx="3429000" cy="1417320"/>
+          </a:xfrm>
+          <a:prstGeom prst="roundRect">
+            <a:avLst>
+              <a:gd name="adj" fmla="val 5161"/>
+            </a:avLst>
+          </a:prstGeom>
+          <a:solidFill>
+            <a:srgbClr val="EAF0F7"/>
+          </a:solidFill>
+          <a:ln/>
+        </p:spPr>
+      </p:sp>
+      <p:sp>
+        <p:nvSpPr>
+          <p:cNvPr id="29" name="Shape 27"/>
+          <p:cNvSpPr/>
+          <p:nvPr/>
+        </p:nvSpPr>
+        <p:spPr>
+          <a:xfrm>
+            <a:off x="4526280" y="3904488"/>
+            <a:ext cx="384048" cy="384048"/>
+          </a:xfrm>
+          <a:prstGeom prst="ellipse">
+            <a:avLst/>
+          </a:prstGeom>
+          <a:solidFill>
+            <a:srgbClr val="1B3A5C"/>
+          </a:solidFill>
+          <a:ln/>
+        </p:spPr>
+      </p:sp>
+      <p:sp>
+        <p:nvSpPr>
+          <p:cNvPr id="30" name="Text 28"/>
+          <p:cNvSpPr txBox="1"/>
+          <p:nvPr/>
+        </p:nvSpPr>
+        <p:spPr>
+          <a:xfrm>
+            <a:off x="4526280" y="3904488"/>
+            <a:ext cx="384048" cy="384048"/>
+          </a:xfrm>
+          <a:prstGeom prst="rect">
+            <a:avLst/>
+          </a:prstGeom>
+          <a:noFill/>
+          <a:ln/>
+        </p:spPr>
+        <p:txBody>
+          <a:bodyPr wrap="square" lIns="0" tIns="0" rIns="0" bIns="0" rtlCol="0" anchor="ctr"/>
+          <a:lstStyle/>
+          <a:p>
+            <a:pPr algn="ctr" indent="0" marL="0">
+              <a:buNone/>
+            </a:pPr>
+            <a:r>
+              <a:rPr lang="en-US" sz="1600" b="1" dirty="0">
+                <a:solidFill>
+                  <a:srgbClr val="FFFFFF"/>
+                </a:solidFill>
+                <a:latin typeface="Cambria" pitchFamily="34" charset="0"/>
+                <a:ea typeface="Cambria" pitchFamily="34" charset="-122"/>
+                <a:cs typeface="Cambria" pitchFamily="34" charset="-120"/>
+              </a:rPr>
+              <a:t>♪</a:t>
+            </a:r>
+            <a:endParaRPr lang="en-US" sz="1600" dirty="0"/>
+          </a:p>
+        </p:txBody>
+      </p:sp>
+      <p:sp>
+        <p:nvSpPr>
+          <p:cNvPr id="31" name="Text 29"/>
+          <p:cNvSpPr txBox="1"/>
+          <p:nvPr/>
+        </p:nvSpPr>
+        <p:spPr>
+          <a:xfrm>
+            <a:off x="4526280" y="4389120"/>
+            <a:ext cx="2971800" cy="365760"/>
+          </a:xfrm>
+          <a:prstGeom prst="rect">
+            <a:avLst/>
+          </a:prstGeom>
+          <a:noFill/>
+          <a:ln/>
+        </p:spPr>
+        <p:txBody>
+          <a:bodyPr wrap="square" lIns="0" tIns="0" rIns="0" bIns="0" rtlCol="0" anchor="ctr"/>
+          <a:lstStyle/>
+          <a:p>
+            <a:pPr indent="0" marL="0">
+              <a:buNone/>
+            </a:pPr>
+            <a:r>
+              <a:rPr lang="en-US" sz="1250" b="1" dirty="0">
+                <a:solidFill>
+                  <a:srgbClr val="10253C"/>
+                </a:solidFill>
+                <a:latin typeface="Cambria" pitchFamily="34" charset="0"/>
+                <a:ea typeface="Cambria" pitchFamily="34" charset="-122"/>
+                <a:cs typeface="Cambria" pitchFamily="34" charset="-120"/>
+              </a:rPr>
+              <a:t>Минорные оттенки</a:t>
             </a:r>
             <a:endParaRPr lang="en-US" sz="1250" dirty="0"/>
           </a:p>
@@ -3819,34 +4758,14 @@
       </p:sp>
       <p:sp>
         <p:nvSpPr>
-          <p:cNvPr id="20" name="Shape 18"/>
-          <p:cNvSpPr/>
-          <p:nvPr/>
-        </p:nvSpPr>
-        <p:spPr>
-          <a:xfrm>
-            <a:off x="4663440" y="5056632"/>
-            <a:ext cx="201168" cy="201168"/>
-          </a:xfrm>
-          <a:prstGeom prst="ellipse">
-            <a:avLst/>
-          </a:prstGeom>
-          <a:solidFill>
-            <a:srgbClr val="C99A3E"/>
-          </a:solidFill>
-          <a:ln/>
-        </p:spPr>
-      </p:sp>
-      <p:sp>
-        <p:nvSpPr>
-          <p:cNvPr id="21" name="Text 19"/>
-          <p:cNvSpPr txBox="1"/>
-          <p:nvPr/>
-        </p:nvSpPr>
-        <p:spPr>
-          <a:xfrm>
-            <a:off x="5074920" y="4956048"/>
-            <a:ext cx="6263640" cy="502920"/>
+          <p:cNvPr id="32" name="Text 30"/>
+          <p:cNvSpPr txBox="1"/>
+          <p:nvPr/>
+        </p:nvSpPr>
+        <p:spPr>
+          <a:xfrm>
+            <a:off x="4526280" y="4709160"/>
+            <a:ext cx="2971800" cy="502920"/>
           </a:xfrm>
           <a:prstGeom prst="rect">
             <a:avLst/>
@@ -3865,52 +4784,52 @@
               <a:buNone/>
             </a:pPr>
             <a:r>
-              <a:rPr lang="en-US" sz="1250" dirty="0">
-                <a:solidFill>
-                  <a:srgbClr val="1A2733"/>
+              <a:rPr lang="en-US" sz="1050" dirty="0">
+                <a:solidFill>
+                  <a:srgbClr val="5B6B7A"/>
                 </a:solidFill>
                 <a:latin typeface="Calibri" pitchFamily="34" charset="0"/>
                 <a:ea typeface="Calibri" pitchFamily="34" charset="-122"/>
                 <a:cs typeface="Calibri" pitchFamily="34" charset="-120"/>
               </a:rPr>
-              <a:t>Провести опрос: как к гимну относятся сами петербуржцы</a:t>
-            </a:r>
-            <a:endParaRPr lang="en-US" sz="1250" dirty="0"/>
-          </a:p>
-        </p:txBody>
-      </p:sp>
-      <p:sp>
-        <p:nvSpPr>
-          <p:cNvPr id="22" name="Shape 20"/>
+              <a:t>Строгость и память о пережитом — прежде всего о блокаде</a:t>
+            </a:r>
+            <a:endParaRPr lang="en-US" sz="1050" dirty="0"/>
+          </a:p>
+        </p:txBody>
+      </p:sp>
+      <p:sp>
+        <p:nvSpPr>
+          <p:cNvPr id="33" name="Shape 31"/>
           <p:cNvSpPr/>
           <p:nvPr/>
         </p:nvSpPr>
         <p:spPr>
           <a:xfrm>
-            <a:off x="4663440" y="5715000"/>
-            <a:ext cx="6675120" cy="685800"/>
+            <a:off x="7955280" y="3703320"/>
+            <a:ext cx="3429000" cy="1417320"/>
           </a:xfrm>
           <a:prstGeom prst="roundRect">
             <a:avLst>
-              <a:gd name="adj" fmla="val 8000"/>
+              <a:gd name="adj" fmla="val 5161"/>
             </a:avLst>
           </a:prstGeom>
           <a:solidFill>
-            <a:srgbClr val="EAF0F7"/>
+            <a:srgbClr val="10253C"/>
           </a:solidFill>
           <a:ln/>
         </p:spPr>
       </p:sp>
       <p:sp>
         <p:nvSpPr>
-          <p:cNvPr id="23" name="Text 21"/>
-          <p:cNvSpPr txBox="1"/>
-          <p:nvPr/>
-        </p:nvSpPr>
-        <p:spPr>
-          <a:xfrm>
-            <a:off x="4892040" y="5788152"/>
-            <a:ext cx="6217920" cy="548640"/>
+          <p:cNvPr id="34" name="Text 32"/>
+          <p:cNvSpPr txBox="1"/>
+          <p:nvPr/>
+        </p:nvSpPr>
+        <p:spPr>
+          <a:xfrm>
+            <a:off x="8183880" y="3867912"/>
+            <a:ext cx="2971800" cy="1088136"/>
           </a:xfrm>
           <a:prstGeom prst="rect">
             <a:avLst/>
@@ -3923,40 +4842,50 @@
           <a:lstStyle/>
           <a:p>
             <a:pPr indent="0" marL="0">
-              <a:buNone/>
-            </a:pPr>
-            <a:r>
-              <a:rPr lang="en-US" sz="1150" b="1" dirty="0">
-                <a:solidFill>
-                  <a:srgbClr val="10253C"/>
+              <a:lnSpc>
+                <a:spcPct val="115000"/>
+              </a:lnSpc>
+              <a:buNone/>
+            </a:pPr>
+            <a:r>
+              <a:rPr lang="en-US" sz="1250" b="1" dirty="0">
+                <a:solidFill>
+                  <a:srgbClr val="C99A3E"/>
                 </a:solidFill>
                 <a:latin typeface="Calibri" pitchFamily="34" charset="0"/>
                 <a:ea typeface="Calibri" pitchFamily="34" charset="-122"/>
                 <a:cs typeface="Calibri" pitchFamily="34" charset="-120"/>
               </a:rPr>
-              <a:t>Гипотеза:  </a:t>
-            </a:r>
+              <a:t>«Медный всадник»
+</a:t>
+            </a:r>
+            <a:endParaRPr lang="en-US" sz="1250" dirty="0"/>
+          </a:p>
+          <a:p>
             <a:pPr indent="0" marL="0">
-              <a:buNone/>
-            </a:pPr>
-            <a:r>
-              <a:rPr lang="en-US" sz="1150" dirty="0">
-                <a:solidFill>
-                  <a:srgbClr val="1A2733"/>
+              <a:lnSpc>
+                <a:spcPct val="115000"/>
+              </a:lnSpc>
+              <a:buNone/>
+            </a:pPr>
+            <a:r>
+              <a:rPr lang="en-US" sz="1050" dirty="0">
+                <a:solidFill>
+                  <a:srgbClr val="EAF0F7"/>
                 </a:solidFill>
                 <a:latin typeface="Calibri" pitchFamily="34" charset="0"/>
                 <a:ea typeface="Calibri" pitchFamily="34" charset="-122"/>
                 <a:cs typeface="Calibri" pitchFamily="34" charset="-120"/>
               </a:rPr>
-              <a:t>петербуржцы любят гимн за музыку, а не за текст — большинство не назовёт автора и не вспомнит строчки.</a:t>
-            </a:r>
-            <a:endParaRPr lang="en-US" sz="1150" dirty="0"/>
-          </a:p>
-        </p:txBody>
-      </p:sp>
-      <p:sp>
-        <p:nvSpPr>
-          <p:cNvPr id="25" name="Text 22"/>
+              <a:t>Гимн родился из балета о памятнике Петру I — теме основания города силой воли, на пустом месте.</a:t>
+            </a:r>
+            <a:endParaRPr lang="en-US" sz="1250" dirty="0"/>
+          </a:p>
+        </p:txBody>
+      </p:sp>
+      <p:sp>
+        <p:nvSpPr>
+          <p:cNvPr id="36" name="Text 33"/>
           <p:cNvSpPr txBox="1"/>
           <p:nvPr/>
         </p:nvSpPr>
@@ -3987,7 +4916,7 @@
                 <a:ea typeface="Calibri" pitchFamily="34" charset="-122"/>
                 <a:cs typeface="Calibri" pitchFamily="34" charset="-120"/>
               </a:rPr>
-              <a:t>03</a:t>
+              <a:t>04</a:t>
             </a:r>
             <a:endParaRPr lang="en-US" sz="1000" dirty="0"/>
           </a:p>
@@ -4001,9 +4930,9 @@
 </p:sld>
 </file>
 
-<file path=ppt/slides/slide4.xml><?xml version="1.0" encoding="utf-8"?>
+<file path=ppt/slides/slide5.xml><?xml version="1.0" encoding="utf-8"?>
 <p:sld xmlns:a="http://schemas.openxmlformats.org/drawingml/2006/main" xmlns:r="http://schemas.openxmlformats.org/officeDocument/2006/relationships" xmlns:p="http://schemas.openxmlformats.org/presentationml/2006/main">
-  <p:cSld name="Slide 4">
+  <p:cSld name="Slide 5">
     <p:bg>
       <p:bgPr>
         <a:solidFill>
@@ -4058,7 +4987,7 @@
                 <a:ea typeface="Calibri" pitchFamily="34" charset="-122"/>
                 <a:cs typeface="Calibri" pitchFamily="34" charset="-120"/>
               </a:rPr>
-              <a:t>ТЕОРИЯ · ЧАСТЬ 1</a:t>
+              <a:t>ПРАКТИКА</a:t>
             </a:r>
             <a:endParaRPr lang="en-US" sz="1200" dirty="0"/>
           </a:p>
@@ -4117,7 +5046,7 @@
                 <a:ea typeface="Cambria" pitchFamily="34" charset="-122"/>
                 <a:cs typeface="Cambria" pitchFamily="34" charset="-120"/>
               </a:rPr>
-              <a:t>2</a:t>
+              <a:t>4</a:t>
             </a:r>
             <a:endParaRPr lang="en-US" sz="1600" dirty="0"/>
           </a:p>
@@ -4131,8 +5060,8 @@
         </p:nvSpPr>
         <p:spPr>
           <a:xfrm>
-            <a:off x="9052560" y="502920"/>
-            <a:ext cx="1737360" cy="411480"/>
+            <a:off x="8869680" y="502920"/>
+            <a:ext cx="1920240" cy="411480"/>
           </a:xfrm>
           <a:prstGeom prst="rect">
             <a:avLst/>
@@ -4156,7 +5085,7 @@
                 <a:ea typeface="Calibri" pitchFamily="34" charset="-122"/>
                 <a:cs typeface="Calibri" pitchFamily="34" charset="-120"/>
               </a:rPr>
-              <a:t>Тимур</a:t>
+              <a:t>Даниил</a:t>
             </a:r>
             <a:endParaRPr lang="en-US" sz="1300" dirty="0"/>
           </a:p>
@@ -4171,7 +5100,7 @@
         <p:spPr>
           <a:xfrm>
             <a:off x="640080" y="777240"/>
-            <a:ext cx="8229600" cy="640080"/>
+            <a:ext cx="8686800" cy="640080"/>
           </a:xfrm>
           <a:prstGeom prst="rect">
             <a:avLst/>
@@ -4195,7 +5124,7 @@
                 <a:ea typeface="Cambria" pitchFamily="34" charset="-122"/>
                 <a:cs typeface="Cambria" pitchFamily="34" charset="-120"/>
               </a:rPr>
-              <a:t>Как рождался гимн</a:t>
+              <a:t>Что говорят сами петербуржцы</a:t>
             </a:r>
             <a:endParaRPr lang="en-US" sz="2800" dirty="0"/>
           </a:p>
@@ -4210,7 +5139,7 @@
         <p:spPr>
           <a:xfrm>
             <a:off x="640080" y="1417320"/>
-            <a:ext cx="10881360" cy="548640"/>
+            <a:ext cx="10515600" cy="411480"/>
           </a:xfrm>
           <a:prstGeom prst="rect">
             <a:avLst/>
@@ -4223,13 +5152,10 @@
           <a:lstStyle/>
           <a:p>
             <a:pPr indent="0" marL="0">
-              <a:lnSpc>
-                <a:spcPct val="120000"/>
-              </a:lnSpc>
-              <a:buNone/>
-            </a:pPr>
-            <a:r>
-              <a:rPr lang="en-US" sz="1400" dirty="0">
+              <a:buNone/>
+            </a:pPr>
+            <a:r>
+              <a:rPr lang="en-US" sz="1350" dirty="0">
                 <a:solidFill>
                   <a:srgbClr val="1A2733"/>
                 </a:solidFill>
@@ -4237,2068 +5163,45 @@
                 <a:ea typeface="Calibri" pitchFamily="34" charset="-122"/>
                 <a:cs typeface="Calibri" pitchFamily="34" charset="-120"/>
               </a:rPr>
-              <a:t>Мелодию написал </a:t>
-            </a:r>
+              <a:t>Мы слушали реакцию знакомых, спрашивали и сравнивали наш гимн с гимном Москвы.</a:t>
+            </a:r>
+            <a:endParaRPr lang="en-US" sz="1350" dirty="0"/>
+          </a:p>
+        </p:txBody>
+      </p:sp>
+      <p:sp>
+        <p:nvSpPr>
+          <p:cNvPr id="8" name="Text 6"/>
+          <p:cNvSpPr txBox="1"/>
+          <p:nvPr/>
+        </p:nvSpPr>
+        <p:spPr>
+          <a:xfrm>
+            <a:off x="640080" y="1965960"/>
+            <a:ext cx="5486400" cy="320040"/>
+          </a:xfrm>
+          <a:prstGeom prst="rect">
+            <a:avLst/>
+          </a:prstGeom>
+          <a:noFill/>
+          <a:ln/>
+        </p:spPr>
+        <p:txBody>
+          <a:bodyPr wrap="square" lIns="0" tIns="0" rIns="0" bIns="0" rtlCol="0" anchor="ctr"/>
+          <a:lstStyle/>
+          <a:p>
             <a:pPr indent="0" marL="0">
-              <a:lnSpc>
-                <a:spcPct val="120000"/>
-              </a:lnSpc>
-              <a:buNone/>
-            </a:pPr>
-            <a:r>
-              <a:rPr lang="en-US" sz="1400" b="1" dirty="0">
-                <a:solidFill>
-                  <a:srgbClr val="10253C"/>
+              <a:buNone/>
+            </a:pPr>
+            <a:r>
+              <a:rPr lang="en-US" sz="1200" b="1" spc="200" kern="0" dirty="0">
+                <a:solidFill>
+                  <a:srgbClr val="C99A3E"/>
                 </a:solidFill>
                 <a:latin typeface="Calibri" pitchFamily="34" charset="0"/>
                 <a:ea typeface="Calibri" pitchFamily="34" charset="-122"/>
                 <a:cs typeface="Calibri" pitchFamily="34" charset="-120"/>
               </a:rPr>
-              <a:t>Рейнгольд Глиэр</a:t>
-            </a:r>
-            <a:pPr indent="0" marL="0">
-              <a:lnSpc>
-                <a:spcPct val="120000"/>
-              </a:lnSpc>
-              <a:buNone/>
-            </a:pPr>
-            <a:r>
-              <a:rPr lang="en-US" sz="1400" dirty="0">
-                <a:solidFill>
-                  <a:srgbClr val="1A2733"/>
-                </a:solidFill>
-                <a:latin typeface="Calibri" pitchFamily="34" charset="0"/>
-                <a:ea typeface="Calibri" pitchFamily="34" charset="-122"/>
-                <a:cs typeface="Calibri" pitchFamily="34" charset="-120"/>
-              </a:rPr>
-              <a:t> как финал балета «Медный всадник» по поэме Пушкина — премьера прошла в Ленинграде, только пережившем блокаду. Слова появились лишь через полвека.</a:t>
-            </a:r>
-            <a:endParaRPr lang="en-US" sz="1400" dirty="0"/>
-          </a:p>
-        </p:txBody>
-      </p:sp>
-      <p:sp>
-        <p:nvSpPr>
-          <p:cNvPr id="8" name="Shape 6"/>
-          <p:cNvSpPr/>
-          <p:nvPr/>
-        </p:nvSpPr>
-        <p:spPr>
-          <a:xfrm>
-            <a:off x="914400" y="4160520"/>
-            <a:ext cx="10332720" cy="0"/>
-          </a:xfrm>
-          <a:prstGeom prst="line">
-            <a:avLst/>
-          </a:prstGeom>
-          <a:noFill/>
-          <a:ln w="31750">
-            <a:solidFill>
-              <a:srgbClr val="C99A3E"/>
-            </a:solidFill>
-            <a:prstDash val="solid"/>
-          </a:ln>
-        </p:spPr>
-      </p:sp>
-      <p:sp>
-        <p:nvSpPr>
-          <p:cNvPr id="9" name="Shape 7"/>
-          <p:cNvSpPr/>
-          <p:nvPr/>
-        </p:nvSpPr>
-        <p:spPr>
-          <a:xfrm>
-            <a:off x="2105406" y="4059936"/>
-            <a:ext cx="201168" cy="201168"/>
-          </a:xfrm>
-          <a:prstGeom prst="ellipse">
-            <a:avLst/>
-          </a:prstGeom>
-          <a:solidFill>
-            <a:srgbClr val="1B3A5C"/>
-          </a:solidFill>
-          <a:ln w="25400">
-            <a:solidFill>
-              <a:srgbClr val="C99A3E"/>
-            </a:solidFill>
-            <a:prstDash val="solid"/>
-          </a:ln>
-        </p:spPr>
-      </p:sp>
-      <p:sp>
-        <p:nvSpPr>
-          <p:cNvPr id="10" name="Text 8"/>
-          <p:cNvSpPr txBox="1"/>
-          <p:nvPr/>
-        </p:nvSpPr>
-        <p:spPr>
-          <a:xfrm>
-            <a:off x="1005840" y="3474720"/>
-            <a:ext cx="2400300" cy="457200"/>
-          </a:xfrm>
-          <a:prstGeom prst="rect">
-            <a:avLst/>
-          </a:prstGeom>
-          <a:noFill/>
-          <a:ln/>
-        </p:spPr>
-        <p:txBody>
-          <a:bodyPr wrap="square" lIns="0" tIns="0" rIns="0" bIns="0" rtlCol="0" anchor="ctr"/>
-          <a:lstStyle/>
-          <a:p>
-            <a:pPr algn="ctr" indent="0" marL="0">
-              <a:buNone/>
-            </a:pPr>
-            <a:r>
-              <a:rPr lang="en-US" sz="1800" b="1" dirty="0">
-                <a:solidFill>
-                  <a:srgbClr val="10253C"/>
-                </a:solidFill>
-                <a:latin typeface="Cambria" pitchFamily="34" charset="0"/>
-                <a:ea typeface="Cambria" pitchFamily="34" charset="-122"/>
-                <a:cs typeface="Cambria" pitchFamily="34" charset="-120"/>
-              </a:rPr>
-              <a:t>1949</a:t>
-            </a:r>
-            <a:endParaRPr lang="en-US" sz="1800" dirty="0"/>
-          </a:p>
-        </p:txBody>
-      </p:sp>
-      <p:sp>
-        <p:nvSpPr>
-          <p:cNvPr id="11" name="Text 9"/>
-          <p:cNvSpPr txBox="1"/>
-          <p:nvPr/>
-        </p:nvSpPr>
-        <p:spPr>
-          <a:xfrm>
-            <a:off x="960120" y="4389120"/>
-            <a:ext cx="2491740" cy="1737360"/>
-          </a:xfrm>
-          <a:prstGeom prst="rect">
-            <a:avLst/>
-          </a:prstGeom>
-          <a:noFill/>
-          <a:ln/>
-        </p:spPr>
-        <p:txBody>
-          <a:bodyPr wrap="square" lIns="0" tIns="0" rIns="0" bIns="0" rtlCol="0" anchor="ctr"/>
-          <a:lstStyle/>
-          <a:p>
-            <a:pPr algn="ctr" indent="0" marL="0">
-              <a:lnSpc>
-                <a:spcPct val="115000"/>
-              </a:lnSpc>
-              <a:buNone/>
-            </a:pPr>
-            <a:r>
-              <a:rPr lang="en-US" sz="1050" dirty="0">
-                <a:solidFill>
-                  <a:srgbClr val="1A2733"/>
-                </a:solidFill>
-                <a:latin typeface="Calibri" pitchFamily="34" charset="0"/>
-                <a:ea typeface="Calibri" pitchFamily="34" charset="-122"/>
-                <a:cs typeface="Calibri" pitchFamily="34" charset="-120"/>
-              </a:rPr>
-              <a:t>Премьера балета «Медный всадник» в Ленинграде. Финал — «Гимн великому городу»</a:t>
-            </a:r>
-            <a:endParaRPr lang="en-US" sz="1050" dirty="0"/>
-          </a:p>
-        </p:txBody>
-      </p:sp>
-      <p:sp>
-        <p:nvSpPr>
-          <p:cNvPr id="12" name="Shape 10"/>
-          <p:cNvSpPr/>
-          <p:nvPr/>
-        </p:nvSpPr>
-        <p:spPr>
-          <a:xfrm>
-            <a:off x="4688586" y="4059936"/>
-            <a:ext cx="201168" cy="201168"/>
-          </a:xfrm>
-          <a:prstGeom prst="ellipse">
-            <a:avLst/>
-          </a:prstGeom>
-          <a:solidFill>
-            <a:srgbClr val="1B3A5C"/>
-          </a:solidFill>
-          <a:ln w="25400">
-            <a:solidFill>
-              <a:srgbClr val="C99A3E"/>
-            </a:solidFill>
-            <a:prstDash val="solid"/>
-          </a:ln>
-        </p:spPr>
-      </p:sp>
-      <p:sp>
-        <p:nvSpPr>
-          <p:cNvPr id="13" name="Text 11"/>
-          <p:cNvSpPr txBox="1"/>
-          <p:nvPr/>
-        </p:nvSpPr>
-        <p:spPr>
-          <a:xfrm>
-            <a:off x="3589020" y="3474720"/>
-            <a:ext cx="2400300" cy="457200"/>
-          </a:xfrm>
-          <a:prstGeom prst="rect">
-            <a:avLst/>
-          </a:prstGeom>
-          <a:noFill/>
-          <a:ln/>
-        </p:spPr>
-        <p:txBody>
-          <a:bodyPr wrap="square" lIns="0" tIns="0" rIns="0" bIns="0" rtlCol="0" anchor="ctr"/>
-          <a:lstStyle/>
-          <a:p>
-            <a:pPr algn="ctr" indent="0" marL="0">
-              <a:buNone/>
-            </a:pPr>
-            <a:r>
-              <a:rPr lang="en-US" sz="1800" b="1" dirty="0">
-                <a:solidFill>
-                  <a:srgbClr val="10253C"/>
-                </a:solidFill>
-                <a:latin typeface="Cambria" pitchFamily="34" charset="0"/>
-                <a:ea typeface="Cambria" pitchFamily="34" charset="-122"/>
-                <a:cs typeface="Cambria" pitchFamily="34" charset="-120"/>
-              </a:rPr>
-              <a:t>1950-е–80-е</a:t>
-            </a:r>
-            <a:endParaRPr lang="en-US" sz="1800" dirty="0"/>
-          </a:p>
-        </p:txBody>
-      </p:sp>
-      <p:sp>
-        <p:nvSpPr>
-          <p:cNvPr id="14" name="Text 12"/>
-          <p:cNvSpPr txBox="1"/>
-          <p:nvPr/>
-        </p:nvSpPr>
-        <p:spPr>
-          <a:xfrm>
-            <a:off x="3543300" y="4389120"/>
-            <a:ext cx="2491740" cy="1737360"/>
-          </a:xfrm>
-          <a:prstGeom prst="rect">
-            <a:avLst/>
-          </a:prstGeom>
-          <a:noFill/>
-          <a:ln/>
-        </p:spPr>
-        <p:txBody>
-          <a:bodyPr wrap="square" lIns="0" tIns="0" rIns="0" bIns="0" rtlCol="0" anchor="ctr"/>
-          <a:lstStyle/>
-          <a:p>
-            <a:pPr algn="ctr" indent="0" marL="0">
-              <a:lnSpc>
-                <a:spcPct val="115000"/>
-              </a:lnSpc>
-              <a:buNone/>
-            </a:pPr>
-            <a:r>
-              <a:rPr lang="en-US" sz="1050" dirty="0">
-                <a:solidFill>
-                  <a:srgbClr val="1A2733"/>
-                </a:solidFill>
-                <a:latin typeface="Calibri" pitchFamily="34" charset="0"/>
-                <a:ea typeface="Calibri" pitchFamily="34" charset="-122"/>
-                <a:cs typeface="Calibri" pitchFamily="34" charset="-120"/>
-              </a:rPr>
-              <a:t>Мелодия звучит отдельно от балета и становится музыкальным символом Ленинграда</a:t>
-            </a:r>
-            <a:endParaRPr lang="en-US" sz="1050" dirty="0"/>
-          </a:p>
-        </p:txBody>
-      </p:sp>
-      <p:sp>
-        <p:nvSpPr>
-          <p:cNvPr id="15" name="Shape 13"/>
-          <p:cNvSpPr/>
-          <p:nvPr/>
-        </p:nvSpPr>
-        <p:spPr>
-          <a:xfrm>
-            <a:off x="7271766" y="4059936"/>
-            <a:ext cx="201168" cy="201168"/>
-          </a:xfrm>
-          <a:prstGeom prst="ellipse">
-            <a:avLst/>
-          </a:prstGeom>
-          <a:solidFill>
-            <a:srgbClr val="1B3A5C"/>
-          </a:solidFill>
-          <a:ln w="25400">
-            <a:solidFill>
-              <a:srgbClr val="C99A3E"/>
-            </a:solidFill>
-            <a:prstDash val="solid"/>
-          </a:ln>
-        </p:spPr>
-      </p:sp>
-      <p:sp>
-        <p:nvSpPr>
-          <p:cNvPr id="16" name="Text 14"/>
-          <p:cNvSpPr txBox="1"/>
-          <p:nvPr/>
-        </p:nvSpPr>
-        <p:spPr>
-          <a:xfrm>
-            <a:off x="6172200" y="3474720"/>
-            <a:ext cx="2400300" cy="457200"/>
-          </a:xfrm>
-          <a:prstGeom prst="rect">
-            <a:avLst/>
-          </a:prstGeom>
-          <a:noFill/>
-          <a:ln/>
-        </p:spPr>
-        <p:txBody>
-          <a:bodyPr wrap="square" lIns="0" tIns="0" rIns="0" bIns="0" rtlCol="0" anchor="ctr"/>
-          <a:lstStyle/>
-          <a:p>
-            <a:pPr algn="ctr" indent="0" marL="0">
-              <a:buNone/>
-            </a:pPr>
-            <a:r>
-              <a:rPr lang="en-US" sz="1800" b="1" dirty="0">
-                <a:solidFill>
-                  <a:srgbClr val="10253C"/>
-                </a:solidFill>
-                <a:latin typeface="Cambria" pitchFamily="34" charset="0"/>
-                <a:ea typeface="Cambria" pitchFamily="34" charset="-122"/>
-                <a:cs typeface="Cambria" pitchFamily="34" charset="-120"/>
-              </a:rPr>
-              <a:t>1991</a:t>
-            </a:r>
-            <a:endParaRPr lang="en-US" sz="1800" dirty="0"/>
-          </a:p>
-        </p:txBody>
-      </p:sp>
-      <p:sp>
-        <p:nvSpPr>
-          <p:cNvPr id="17" name="Text 15"/>
-          <p:cNvSpPr txBox="1"/>
-          <p:nvPr/>
-        </p:nvSpPr>
-        <p:spPr>
-          <a:xfrm>
-            <a:off x="6126480" y="4389120"/>
-            <a:ext cx="2491740" cy="1737360"/>
-          </a:xfrm>
-          <a:prstGeom prst="rect">
-            <a:avLst/>
-          </a:prstGeom>
-          <a:noFill/>
-          <a:ln/>
-        </p:spPr>
-        <p:txBody>
-          <a:bodyPr wrap="square" lIns="0" tIns="0" rIns="0" bIns="0" rtlCol="0" anchor="ctr"/>
-          <a:lstStyle/>
-          <a:p>
-            <a:pPr algn="ctr" indent="0" marL="0">
-              <a:lnSpc>
-                <a:spcPct val="115000"/>
-              </a:lnSpc>
-              <a:buNone/>
-            </a:pPr>
-            <a:r>
-              <a:rPr lang="en-US" sz="1050" dirty="0">
-                <a:solidFill>
-                  <a:srgbClr val="1A2733"/>
-                </a:solidFill>
-                <a:latin typeface="Calibri" pitchFamily="34" charset="0"/>
-                <a:ea typeface="Calibri" pitchFamily="34" charset="-122"/>
-                <a:cs typeface="Calibri" pitchFamily="34" charset="-120"/>
-              </a:rPr>
-              <a:t>Музыка Глиэра официально утверждена гимном города — в год возвращения имени Санкт-Петербург</a:t>
-            </a:r>
-            <a:endParaRPr lang="en-US" sz="1050" dirty="0"/>
-          </a:p>
-        </p:txBody>
-      </p:sp>
-      <p:sp>
-        <p:nvSpPr>
-          <p:cNvPr id="18" name="Shape 16"/>
-          <p:cNvSpPr/>
-          <p:nvPr/>
-        </p:nvSpPr>
-        <p:spPr>
-          <a:xfrm>
-            <a:off x="9854946" y="4059936"/>
-            <a:ext cx="201168" cy="201168"/>
-          </a:xfrm>
-          <a:prstGeom prst="ellipse">
-            <a:avLst/>
-          </a:prstGeom>
-          <a:solidFill>
-            <a:srgbClr val="1B3A5C"/>
-          </a:solidFill>
-          <a:ln w="25400">
-            <a:solidFill>
-              <a:srgbClr val="C99A3E"/>
-            </a:solidFill>
-            <a:prstDash val="solid"/>
-          </a:ln>
-        </p:spPr>
-      </p:sp>
-      <p:sp>
-        <p:nvSpPr>
-          <p:cNvPr id="19" name="Text 17"/>
-          <p:cNvSpPr txBox="1"/>
-          <p:nvPr/>
-        </p:nvSpPr>
-        <p:spPr>
-          <a:xfrm>
-            <a:off x="8755380" y="3474720"/>
-            <a:ext cx="2400300" cy="457200"/>
-          </a:xfrm>
-          <a:prstGeom prst="rect">
-            <a:avLst/>
-          </a:prstGeom>
-          <a:noFill/>
-          <a:ln/>
-        </p:spPr>
-        <p:txBody>
-          <a:bodyPr wrap="square" lIns="0" tIns="0" rIns="0" bIns="0" rtlCol="0" anchor="ctr"/>
-          <a:lstStyle/>
-          <a:p>
-            <a:pPr algn="ctr" indent="0" marL="0">
-              <a:buNone/>
-            </a:pPr>
-            <a:r>
-              <a:rPr lang="en-US" sz="1800" b="1" dirty="0">
-                <a:solidFill>
-                  <a:srgbClr val="10253C"/>
-                </a:solidFill>
-                <a:latin typeface="Cambria" pitchFamily="34" charset="0"/>
-                <a:ea typeface="Cambria" pitchFamily="34" charset="-122"/>
-                <a:cs typeface="Cambria" pitchFamily="34" charset="-120"/>
-              </a:rPr>
-              <a:t>2003</a:t>
-            </a:r>
-            <a:endParaRPr lang="en-US" sz="1800" dirty="0"/>
-          </a:p>
-        </p:txBody>
-      </p:sp>
-      <p:sp>
-        <p:nvSpPr>
-          <p:cNvPr id="20" name="Text 18"/>
-          <p:cNvSpPr txBox="1"/>
-          <p:nvPr/>
-        </p:nvSpPr>
-        <p:spPr>
-          <a:xfrm>
-            <a:off x="8709660" y="4389120"/>
-            <a:ext cx="2491740" cy="1737360"/>
-          </a:xfrm>
-          <a:prstGeom prst="rect">
-            <a:avLst/>
-          </a:prstGeom>
-          <a:noFill/>
-          <a:ln/>
-        </p:spPr>
-        <p:txBody>
-          <a:bodyPr wrap="square" lIns="0" tIns="0" rIns="0" bIns="0" rtlCol="0" anchor="ctr"/>
-          <a:lstStyle/>
-          <a:p>
-            <a:pPr algn="ctr" indent="0" marL="0">
-              <a:lnSpc>
-                <a:spcPct val="115000"/>
-              </a:lnSpc>
-              <a:buNone/>
-            </a:pPr>
-            <a:r>
-              <a:rPr lang="en-US" sz="1050" dirty="0">
-                <a:solidFill>
-                  <a:srgbClr val="1A2733"/>
-                </a:solidFill>
-                <a:latin typeface="Calibri" pitchFamily="34" charset="0"/>
-                <a:ea typeface="Calibri" pitchFamily="34" charset="-122"/>
-                <a:cs typeface="Calibri" pitchFamily="34" charset="-120"/>
-              </a:rPr>
-              <a:t>К 300-летию города утверждён текст гимна — автор слов Олег Чупров</a:t>
-            </a:r>
-            <a:endParaRPr lang="en-US" sz="1050" dirty="0"/>
-          </a:p>
-        </p:txBody>
-      </p:sp>
-      <p:sp>
-        <p:nvSpPr>
-          <p:cNvPr id="21" name="Shape 19"/>
-          <p:cNvSpPr/>
-          <p:nvPr/>
-        </p:nvSpPr>
-        <p:spPr>
-          <a:xfrm>
-            <a:off x="640080" y="6126480"/>
-            <a:ext cx="10908792" cy="548640"/>
-          </a:xfrm>
-          <a:prstGeom prst="roundRect">
-            <a:avLst>
-              <a:gd name="adj" fmla="val 10000"/>
-            </a:avLst>
-          </a:prstGeom>
-          <a:solidFill>
-            <a:srgbClr val="10253C"/>
-          </a:solidFill>
-          <a:ln/>
-        </p:spPr>
-      </p:sp>
-      <p:sp>
-        <p:nvSpPr>
-          <p:cNvPr id="22" name="Text 20"/>
-          <p:cNvSpPr txBox="1"/>
-          <p:nvPr/>
-        </p:nvSpPr>
-        <p:spPr>
-          <a:xfrm>
-            <a:off x="868680" y="6126480"/>
-            <a:ext cx="10424160" cy="548640"/>
-          </a:xfrm>
-          <a:prstGeom prst="rect">
-            <a:avLst/>
-          </a:prstGeom>
-          <a:noFill/>
-          <a:ln/>
-        </p:spPr>
-        <p:txBody>
-          <a:bodyPr wrap="square" lIns="0" tIns="0" rIns="0" bIns="0" rtlCol="0" anchor="ctr"/>
-          <a:lstStyle/>
-          <a:p>
-            <a:pPr indent="0" marL="0">
-              <a:buNone/>
-            </a:pPr>
-            <a:r>
-              <a:rPr lang="en-US" sz="1250" b="1" dirty="0">
-                <a:solidFill>
-                  <a:srgbClr val="C99A3E"/>
-                </a:solidFill>
-                <a:latin typeface="Calibri" pitchFamily="34" charset="0"/>
-                <a:ea typeface="Calibri" pitchFamily="34" charset="-122"/>
-                <a:cs typeface="Calibri" pitchFamily="34" charset="-120"/>
-              </a:rPr>
-              <a:t>Факт:  </a:t>
-            </a:r>
-            <a:pPr indent="0" marL="0">
-              <a:buNone/>
-            </a:pPr>
-            <a:r>
-              <a:rPr lang="en-US" sz="1250" dirty="0">
-                <a:solidFill>
-                  <a:srgbClr val="FFFFFF"/>
-                </a:solidFill>
-                <a:latin typeface="Calibri" pitchFamily="34" charset="0"/>
-                <a:ea typeface="Calibri" pitchFamily="34" charset="-122"/>
-                <a:cs typeface="Calibri" pitchFamily="34" charset="-120"/>
-              </a:rPr>
-              <a:t>полвека у гимна была музыка без единого слова текста.</a:t>
-            </a:r>
-            <a:endParaRPr lang="en-US" sz="1250" dirty="0"/>
-          </a:p>
-        </p:txBody>
-      </p:sp>
-      <p:sp>
-        <p:nvSpPr>
-          <p:cNvPr id="24" name="Text 21"/>
-          <p:cNvSpPr txBox="1"/>
-          <p:nvPr/>
-        </p:nvSpPr>
-        <p:spPr>
-          <a:xfrm>
-            <a:off x="11365992" y="6355080"/>
-            <a:ext cx="548640" cy="320040"/>
-          </a:xfrm>
-          <a:prstGeom prst="rect">
-            <a:avLst/>
-          </a:prstGeom>
-          <a:noFill/>
-          <a:ln/>
-        </p:spPr>
-        <p:txBody>
-          <a:bodyPr wrap="square" lIns="0" tIns="0" rIns="0" bIns="0" rtlCol="0" anchor="ctr"/>
-          <a:lstStyle/>
-          <a:p>
-            <a:pPr algn="r" indent="0" marL="0">
-              <a:buNone/>
-            </a:pPr>
-            <a:r>
-              <a:rPr lang="en-US" sz="1000" dirty="0">
-                <a:solidFill>
-                  <a:srgbClr val="5B6B7A"/>
-                </a:solidFill>
-                <a:latin typeface="Calibri" pitchFamily="34" charset="0"/>
-                <a:ea typeface="Calibri" pitchFamily="34" charset="-122"/>
-                <a:cs typeface="Calibri" pitchFamily="34" charset="-120"/>
-              </a:rPr>
-              <a:t>04</a:t>
-            </a:r>
-            <a:endParaRPr lang="en-US" sz="1000" dirty="0"/>
-          </a:p>
-        </p:txBody>
-      </p:sp>
-    </p:spTree>
-  </p:cSld>
-  <p:clrMapOvr>
-    <a:masterClrMapping/>
-  </p:clrMapOvr>
-</p:sld>
-</file>
-
-<file path=ppt/slides/slide5.xml><?xml version="1.0" encoding="utf-8"?>
-<p:sld xmlns:a="http://schemas.openxmlformats.org/drawingml/2006/main" xmlns:r="http://schemas.openxmlformats.org/officeDocument/2006/relationships" xmlns:p="http://schemas.openxmlformats.org/presentationml/2006/main">
-  <p:cSld name="Slide 5">
-    <p:bg>
-      <p:bgPr>
-        <a:solidFill>
-          <a:srgbClr val="FFFFFF"/>
-        </a:solidFill>
-      </p:bgPr>
-    </p:bg>
-    <p:spTree>
-      <p:nvGrpSpPr>
-        <p:cNvPr id="1" name=""/>
-        <p:cNvGrpSpPr/>
-        <p:nvPr/>
-      </p:nvGrpSpPr>
-      <p:grpSpPr>
-        <a:xfrm>
-          <a:off x="0" y="0"/>
-          <a:ext cx="0" cy="0"/>
-          <a:chOff x="0" y="0"/>
-          <a:chExt cx="0" cy="0"/>
-        </a:xfrm>
-      </p:grpSpPr>
-      <p:sp>
-        <p:nvSpPr>
-          <p:cNvPr id="2" name="Text 0"/>
-          <p:cNvSpPr txBox="1"/>
-          <p:nvPr/>
-        </p:nvSpPr>
-        <p:spPr>
-          <a:xfrm>
-            <a:off x="640080" y="411480"/>
-            <a:ext cx="7315200" cy="365760"/>
-          </a:xfrm>
-          <a:prstGeom prst="rect">
-            <a:avLst/>
-          </a:prstGeom>
-          <a:noFill/>
-          <a:ln/>
-        </p:spPr>
-        <p:txBody>
-          <a:bodyPr wrap="square" lIns="0" tIns="0" rIns="0" bIns="0" rtlCol="0" anchor="ctr"/>
-          <a:lstStyle/>
-          <a:p>
-            <a:pPr indent="0" marL="0">
-              <a:buNone/>
-            </a:pPr>
-            <a:r>
-              <a:rPr lang="en-US" sz="1200" b="1" spc="200" kern="0" dirty="0">
-                <a:solidFill>
-                  <a:srgbClr val="C99A3E"/>
-                </a:solidFill>
-                <a:latin typeface="Calibri" pitchFamily="34" charset="0"/>
-                <a:ea typeface="Calibri" pitchFamily="34" charset="-122"/>
-                <a:cs typeface="Calibri" pitchFamily="34" charset="-120"/>
-              </a:rPr>
-              <a:t>ТЕОРИЯ · ЧАСТЬ 2</a:t>
-            </a:r>
-            <a:endParaRPr lang="en-US" sz="1200" dirty="0"/>
-          </a:p>
-        </p:txBody>
-      </p:sp>
-      <p:sp>
-        <p:nvSpPr>
-          <p:cNvPr id="3" name="Shape 1"/>
-          <p:cNvSpPr/>
-          <p:nvPr/>
-        </p:nvSpPr>
-        <p:spPr>
-          <a:xfrm>
-            <a:off x="10881360" y="457200"/>
-            <a:ext cx="502920" cy="502920"/>
-          </a:xfrm>
-          <a:prstGeom prst="ellipse">
-            <a:avLst/>
-          </a:prstGeom>
-          <a:solidFill>
-            <a:srgbClr val="C99A3E"/>
-          </a:solidFill>
-          <a:ln/>
-        </p:spPr>
-      </p:sp>
-      <p:sp>
-        <p:nvSpPr>
-          <p:cNvPr id="4" name="Text 2"/>
-          <p:cNvSpPr txBox="1"/>
-          <p:nvPr/>
-        </p:nvSpPr>
-        <p:spPr>
-          <a:xfrm>
-            <a:off x="10881360" y="457200"/>
-            <a:ext cx="502920" cy="502920"/>
-          </a:xfrm>
-          <a:prstGeom prst="rect">
-            <a:avLst/>
-          </a:prstGeom>
-          <a:noFill/>
-          <a:ln/>
-        </p:spPr>
-        <p:txBody>
-          <a:bodyPr wrap="square" lIns="0" tIns="0" rIns="0" bIns="0" rtlCol="0" anchor="ctr"/>
-          <a:lstStyle/>
-          <a:p>
-            <a:pPr algn="ctr" indent="0" marL="0">
-              <a:buNone/>
-            </a:pPr>
-            <a:r>
-              <a:rPr lang="en-US" sz="1600" b="1" dirty="0">
-                <a:solidFill>
-                  <a:srgbClr val="10253C"/>
-                </a:solidFill>
-                <a:latin typeface="Cambria" pitchFamily="34" charset="0"/>
-                <a:ea typeface="Cambria" pitchFamily="34" charset="-122"/>
-                <a:cs typeface="Cambria" pitchFamily="34" charset="-120"/>
-              </a:rPr>
-              <a:t>3</a:t>
-            </a:r>
-            <a:endParaRPr lang="en-US" sz="1600" dirty="0"/>
-          </a:p>
-        </p:txBody>
-      </p:sp>
-      <p:sp>
-        <p:nvSpPr>
-          <p:cNvPr id="5" name="Text 3"/>
-          <p:cNvSpPr txBox="1"/>
-          <p:nvPr/>
-        </p:nvSpPr>
-        <p:spPr>
-          <a:xfrm>
-            <a:off x="9052560" y="502920"/>
-            <a:ext cx="1737360" cy="411480"/>
-          </a:xfrm>
-          <a:prstGeom prst="rect">
-            <a:avLst/>
-          </a:prstGeom>
-          <a:noFill/>
-          <a:ln/>
-        </p:spPr>
-        <p:txBody>
-          <a:bodyPr wrap="square" lIns="0" tIns="0" rIns="0" bIns="0" rtlCol="0" anchor="ctr"/>
-          <a:lstStyle/>
-          <a:p>
-            <a:pPr algn="r" indent="0" marL="0">
-              <a:buNone/>
-            </a:pPr>
-            <a:r>
-              <a:rPr lang="en-US" sz="1300" b="1" dirty="0">
-                <a:solidFill>
-                  <a:srgbClr val="10253C"/>
-                </a:solidFill>
-                <a:latin typeface="Calibri" pitchFamily="34" charset="0"/>
-                <a:ea typeface="Calibri" pitchFamily="34" charset="-122"/>
-                <a:cs typeface="Calibri" pitchFamily="34" charset="-120"/>
-              </a:rPr>
-              <a:t>Денис</a:t>
-            </a:r>
-            <a:endParaRPr lang="en-US" sz="1300" dirty="0"/>
-          </a:p>
-        </p:txBody>
-      </p:sp>
-      <p:sp>
-        <p:nvSpPr>
-          <p:cNvPr id="6" name="Text 4"/>
-          <p:cNvSpPr txBox="1"/>
-          <p:nvPr/>
-        </p:nvSpPr>
-        <p:spPr>
-          <a:xfrm>
-            <a:off x="640080" y="777240"/>
-            <a:ext cx="8686800" cy="640080"/>
-          </a:xfrm>
-          <a:prstGeom prst="rect">
-            <a:avLst/>
-          </a:prstGeom>
-          <a:noFill/>
-          <a:ln/>
-        </p:spPr>
-        <p:txBody>
-          <a:bodyPr wrap="square" lIns="0" tIns="0" rIns="0" bIns="0" rtlCol="0" anchor="ctr"/>
-          <a:lstStyle/>
-          <a:p>
-            <a:pPr indent="0" marL="0">
-              <a:buNone/>
-            </a:pPr>
-            <a:r>
-              <a:rPr lang="en-US" sz="2800" b="1" dirty="0">
-                <a:solidFill>
-                  <a:srgbClr val="10253C"/>
-                </a:solidFill>
-                <a:latin typeface="Cambria" pitchFamily="34" charset="0"/>
-                <a:ea typeface="Cambria" pitchFamily="34" charset="-122"/>
-                <a:cs typeface="Cambria" pitchFamily="34" charset="-120"/>
-              </a:rPr>
-              <a:t>Музыка как портрет города</a:t>
-            </a:r>
-            <a:endParaRPr lang="en-US" sz="2800" dirty="0"/>
-          </a:p>
-        </p:txBody>
-      </p:sp>
-      <p:sp>
-        <p:nvSpPr>
-          <p:cNvPr id="7" name="Text 5"/>
-          <p:cNvSpPr txBox="1"/>
-          <p:nvPr/>
-        </p:nvSpPr>
-        <p:spPr>
-          <a:xfrm>
-            <a:off x="640080" y="1417320"/>
-            <a:ext cx="10515600" cy="457200"/>
-          </a:xfrm>
-          <a:prstGeom prst="rect">
-            <a:avLst/>
-          </a:prstGeom>
-          <a:noFill/>
-          <a:ln/>
-        </p:spPr>
-        <p:txBody>
-          <a:bodyPr wrap="square" lIns="0" tIns="0" rIns="0" bIns="0" rtlCol="0" anchor="ctr"/>
-          <a:lstStyle/>
-          <a:p>
-            <a:pPr indent="0" marL="0">
-              <a:buNone/>
-            </a:pPr>
-            <a:r>
-              <a:rPr lang="en-US" sz="1350" dirty="0">
-                <a:solidFill>
-                  <a:srgbClr val="1A2733"/>
-                </a:solidFill>
-                <a:latin typeface="Calibri" pitchFamily="34" charset="0"/>
-                <a:ea typeface="Calibri" pitchFamily="34" charset="-122"/>
-                <a:cs typeface="Calibri" pitchFamily="34" charset="-120"/>
-              </a:rPr>
-              <a:t>Гимн не рассказывает о Петербурге словами — он его изображает звуком. Пять приёмов, в которых это слышно:</a:t>
-            </a:r>
-            <a:endParaRPr lang="en-US" sz="1350" dirty="0"/>
-          </a:p>
-        </p:txBody>
-      </p:sp>
-      <p:sp>
-        <p:nvSpPr>
-          <p:cNvPr id="8" name="Shape 6"/>
-          <p:cNvSpPr/>
-          <p:nvPr/>
-        </p:nvSpPr>
-        <p:spPr>
-          <a:xfrm>
-            <a:off x="640080" y="2057400"/>
-            <a:ext cx="3429000" cy="1417320"/>
-          </a:xfrm>
-          <a:prstGeom prst="roundRect">
-            <a:avLst>
-              <a:gd name="adj" fmla="val 5161"/>
-            </a:avLst>
-          </a:prstGeom>
-          <a:solidFill>
-            <a:srgbClr val="EAF0F7"/>
-          </a:solidFill>
-          <a:ln/>
-        </p:spPr>
-      </p:sp>
-      <p:sp>
-        <p:nvSpPr>
-          <p:cNvPr id="9" name="Shape 7"/>
-          <p:cNvSpPr/>
-          <p:nvPr/>
-        </p:nvSpPr>
-        <p:spPr>
-          <a:xfrm>
-            <a:off x="868680" y="2258568"/>
-            <a:ext cx="384048" cy="384048"/>
-          </a:xfrm>
-          <a:prstGeom prst="ellipse">
-            <a:avLst/>
-          </a:prstGeom>
-          <a:solidFill>
-            <a:srgbClr val="1B3A5C"/>
-          </a:solidFill>
-          <a:ln/>
-        </p:spPr>
-      </p:sp>
-      <p:sp>
-        <p:nvSpPr>
-          <p:cNvPr id="10" name="Text 8"/>
-          <p:cNvSpPr txBox="1"/>
-          <p:nvPr/>
-        </p:nvSpPr>
-        <p:spPr>
-          <a:xfrm>
-            <a:off x="868680" y="2258568"/>
-            <a:ext cx="384048" cy="384048"/>
-          </a:xfrm>
-          <a:prstGeom prst="rect">
-            <a:avLst/>
-          </a:prstGeom>
-          <a:noFill/>
-          <a:ln/>
-        </p:spPr>
-        <p:txBody>
-          <a:bodyPr wrap="square" lIns="0" tIns="0" rIns="0" bIns="0" rtlCol="0" anchor="ctr"/>
-          <a:lstStyle/>
-          <a:p>
-            <a:pPr algn="ctr" indent="0" marL="0">
-              <a:buNone/>
-            </a:pPr>
-            <a:r>
-              <a:rPr lang="en-US" sz="1600" b="1" dirty="0">
-                <a:solidFill>
-                  <a:srgbClr val="FFFFFF"/>
-                </a:solidFill>
-                <a:latin typeface="Cambria" pitchFamily="34" charset="0"/>
-                <a:ea typeface="Cambria" pitchFamily="34" charset="-122"/>
-                <a:cs typeface="Cambria" pitchFamily="34" charset="-120"/>
-              </a:rPr>
-              <a:t>♪</a:t>
-            </a:r>
-            <a:endParaRPr lang="en-US" sz="1600" dirty="0"/>
-          </a:p>
-        </p:txBody>
-      </p:sp>
-      <p:sp>
-        <p:nvSpPr>
-          <p:cNvPr id="11" name="Text 9"/>
-          <p:cNvSpPr txBox="1"/>
-          <p:nvPr/>
-        </p:nvSpPr>
-        <p:spPr>
-          <a:xfrm>
-            <a:off x="868680" y="2743200"/>
-            <a:ext cx="2971800" cy="365760"/>
-          </a:xfrm>
-          <a:prstGeom prst="rect">
-            <a:avLst/>
-          </a:prstGeom>
-          <a:noFill/>
-          <a:ln/>
-        </p:spPr>
-        <p:txBody>
-          <a:bodyPr wrap="square" lIns="0" tIns="0" rIns="0" bIns="0" rtlCol="0" anchor="ctr"/>
-          <a:lstStyle/>
-          <a:p>
-            <a:pPr indent="0" marL="0">
-              <a:buNone/>
-            </a:pPr>
-            <a:r>
-              <a:rPr lang="en-US" sz="1250" b="1" dirty="0">
-                <a:solidFill>
-                  <a:srgbClr val="10253C"/>
-                </a:solidFill>
-                <a:latin typeface="Cambria" pitchFamily="34" charset="0"/>
-                <a:ea typeface="Cambria" pitchFamily="34" charset="-122"/>
-                <a:cs typeface="Cambria" pitchFamily="34" charset="-120"/>
-              </a:rPr>
-              <a:t>Медленный, широкий темп</a:t>
-            </a:r>
-            <a:endParaRPr lang="en-US" sz="1250" dirty="0"/>
-          </a:p>
-        </p:txBody>
-      </p:sp>
-      <p:sp>
-        <p:nvSpPr>
-          <p:cNvPr id="12" name="Text 10"/>
-          <p:cNvSpPr txBox="1"/>
-          <p:nvPr/>
-        </p:nvSpPr>
-        <p:spPr>
-          <a:xfrm>
-            <a:off x="868680" y="3063240"/>
-            <a:ext cx="2971800" cy="502920"/>
-          </a:xfrm>
-          <a:prstGeom prst="rect">
-            <a:avLst/>
-          </a:prstGeom>
-          <a:noFill/>
-          <a:ln/>
-        </p:spPr>
-        <p:txBody>
-          <a:bodyPr wrap="square" lIns="0" tIns="0" rIns="0" bIns="0" rtlCol="0" anchor="ctr"/>
-          <a:lstStyle/>
-          <a:p>
-            <a:pPr indent="0" marL="0">
-              <a:lnSpc>
-                <a:spcPct val="110000"/>
-              </a:lnSpc>
-              <a:buNone/>
-            </a:pPr>
-            <a:r>
-              <a:rPr lang="en-US" sz="1050" dirty="0">
-                <a:solidFill>
-                  <a:srgbClr val="5B6B7A"/>
-                </a:solidFill>
-                <a:latin typeface="Calibri" pitchFamily="34" charset="0"/>
-                <a:ea typeface="Calibri" pitchFamily="34" charset="-122"/>
-                <a:cs typeface="Calibri" pitchFamily="34" charset="-120"/>
-              </a:rPr>
-              <a:t>Величие и спокойствие — город никуда не торопится</a:t>
-            </a:r>
-            <a:endParaRPr lang="en-US" sz="1050" dirty="0"/>
-          </a:p>
-        </p:txBody>
-      </p:sp>
-      <p:sp>
-        <p:nvSpPr>
-          <p:cNvPr id="13" name="Shape 11"/>
-          <p:cNvSpPr/>
-          <p:nvPr/>
-        </p:nvSpPr>
-        <p:spPr>
-          <a:xfrm>
-            <a:off x="4297680" y="2057400"/>
-            <a:ext cx="3429000" cy="1417320"/>
-          </a:xfrm>
-          <a:prstGeom prst="roundRect">
-            <a:avLst>
-              <a:gd name="adj" fmla="val 5161"/>
-            </a:avLst>
-          </a:prstGeom>
-          <a:solidFill>
-            <a:srgbClr val="EAF0F7"/>
-          </a:solidFill>
-          <a:ln/>
-        </p:spPr>
-      </p:sp>
-      <p:sp>
-        <p:nvSpPr>
-          <p:cNvPr id="14" name="Shape 12"/>
-          <p:cNvSpPr/>
-          <p:nvPr/>
-        </p:nvSpPr>
-        <p:spPr>
-          <a:xfrm>
-            <a:off x="4526280" y="2258568"/>
-            <a:ext cx="384048" cy="384048"/>
-          </a:xfrm>
-          <a:prstGeom prst="ellipse">
-            <a:avLst/>
-          </a:prstGeom>
-          <a:solidFill>
-            <a:srgbClr val="1B3A5C"/>
-          </a:solidFill>
-          <a:ln/>
-        </p:spPr>
-      </p:sp>
-      <p:sp>
-        <p:nvSpPr>
-          <p:cNvPr id="15" name="Text 13"/>
-          <p:cNvSpPr txBox="1"/>
-          <p:nvPr/>
-        </p:nvSpPr>
-        <p:spPr>
-          <a:xfrm>
-            <a:off x="4526280" y="2258568"/>
-            <a:ext cx="384048" cy="384048"/>
-          </a:xfrm>
-          <a:prstGeom prst="rect">
-            <a:avLst/>
-          </a:prstGeom>
-          <a:noFill/>
-          <a:ln/>
-        </p:spPr>
-        <p:txBody>
-          <a:bodyPr wrap="square" lIns="0" tIns="0" rIns="0" bIns="0" rtlCol="0" anchor="ctr"/>
-          <a:lstStyle/>
-          <a:p>
-            <a:pPr algn="ctr" indent="0" marL="0">
-              <a:buNone/>
-            </a:pPr>
-            <a:r>
-              <a:rPr lang="en-US" sz="1600" b="1" dirty="0">
-                <a:solidFill>
-                  <a:srgbClr val="FFFFFF"/>
-                </a:solidFill>
-                <a:latin typeface="Cambria" pitchFamily="34" charset="0"/>
-                <a:ea typeface="Cambria" pitchFamily="34" charset="-122"/>
-                <a:cs typeface="Cambria" pitchFamily="34" charset="-120"/>
-              </a:rPr>
-              <a:t>♪</a:t>
-            </a:r>
-            <a:endParaRPr lang="en-US" sz="1600" dirty="0"/>
-          </a:p>
-        </p:txBody>
-      </p:sp>
-      <p:sp>
-        <p:nvSpPr>
-          <p:cNvPr id="16" name="Text 14"/>
-          <p:cNvSpPr txBox="1"/>
-          <p:nvPr/>
-        </p:nvSpPr>
-        <p:spPr>
-          <a:xfrm>
-            <a:off x="4526280" y="2743200"/>
-            <a:ext cx="2971800" cy="365760"/>
-          </a:xfrm>
-          <a:prstGeom prst="rect">
-            <a:avLst/>
-          </a:prstGeom>
-          <a:noFill/>
-          <a:ln/>
-        </p:spPr>
-        <p:txBody>
-          <a:bodyPr wrap="square" lIns="0" tIns="0" rIns="0" bIns="0" rtlCol="0" anchor="ctr"/>
-          <a:lstStyle/>
-          <a:p>
-            <a:pPr indent="0" marL="0">
-              <a:buNone/>
-            </a:pPr>
-            <a:r>
-              <a:rPr lang="en-US" sz="1250" b="1" dirty="0">
-                <a:solidFill>
-                  <a:srgbClr val="10253C"/>
-                </a:solidFill>
-                <a:latin typeface="Cambria" pitchFamily="34" charset="0"/>
-                <a:ea typeface="Cambria" pitchFamily="34" charset="-122"/>
-                <a:cs typeface="Cambria" pitchFamily="34" charset="-120"/>
-              </a:rPr>
-              <a:t>Мощные духовые и медь</a:t>
-            </a:r>
-            <a:endParaRPr lang="en-US" sz="1250" dirty="0"/>
-          </a:p>
-        </p:txBody>
-      </p:sp>
-      <p:sp>
-        <p:nvSpPr>
-          <p:cNvPr id="17" name="Text 15"/>
-          <p:cNvSpPr txBox="1"/>
-          <p:nvPr/>
-        </p:nvSpPr>
-        <p:spPr>
-          <a:xfrm>
-            <a:off x="4526280" y="3063240"/>
-            <a:ext cx="2971800" cy="502920"/>
-          </a:xfrm>
-          <a:prstGeom prst="rect">
-            <a:avLst/>
-          </a:prstGeom>
-          <a:noFill/>
-          <a:ln/>
-        </p:spPr>
-        <p:txBody>
-          <a:bodyPr wrap="square" lIns="0" tIns="0" rIns="0" bIns="0" rtlCol="0" anchor="ctr"/>
-          <a:lstStyle/>
-          <a:p>
-            <a:pPr indent="0" marL="0">
-              <a:lnSpc>
-                <a:spcPct val="110000"/>
-              </a:lnSpc>
-              <a:buNone/>
-            </a:pPr>
-            <a:r>
-              <a:rPr lang="en-US" sz="1050" dirty="0">
-                <a:solidFill>
-                  <a:srgbClr val="5B6B7A"/>
-                </a:solidFill>
-                <a:latin typeface="Calibri" pitchFamily="34" charset="0"/>
-                <a:ea typeface="Calibri" pitchFamily="34" charset="-122"/>
-                <a:cs typeface="Calibri" pitchFamily="34" charset="-120"/>
-              </a:rPr>
-              <a:t>Гранит, камень, монументальная архитектура</a:t>
-            </a:r>
-            <a:endParaRPr lang="en-US" sz="1050" dirty="0"/>
-          </a:p>
-        </p:txBody>
-      </p:sp>
-      <p:sp>
-        <p:nvSpPr>
-          <p:cNvPr id="18" name="Shape 16"/>
-          <p:cNvSpPr/>
-          <p:nvPr/>
-        </p:nvSpPr>
-        <p:spPr>
-          <a:xfrm>
-            <a:off x="7955280" y="2057400"/>
-            <a:ext cx="3429000" cy="1417320"/>
-          </a:xfrm>
-          <a:prstGeom prst="roundRect">
-            <a:avLst>
-              <a:gd name="adj" fmla="val 5161"/>
-            </a:avLst>
-          </a:prstGeom>
-          <a:solidFill>
-            <a:srgbClr val="EAF0F7"/>
-          </a:solidFill>
-          <a:ln/>
-        </p:spPr>
-      </p:sp>
-      <p:sp>
-        <p:nvSpPr>
-          <p:cNvPr id="19" name="Shape 17"/>
-          <p:cNvSpPr/>
-          <p:nvPr/>
-        </p:nvSpPr>
-        <p:spPr>
-          <a:xfrm>
-            <a:off x="8183880" y="2258568"/>
-            <a:ext cx="384048" cy="384048"/>
-          </a:xfrm>
-          <a:prstGeom prst="ellipse">
-            <a:avLst/>
-          </a:prstGeom>
-          <a:solidFill>
-            <a:srgbClr val="1B3A5C"/>
-          </a:solidFill>
-          <a:ln/>
-        </p:spPr>
-      </p:sp>
-      <p:sp>
-        <p:nvSpPr>
-          <p:cNvPr id="20" name="Text 18"/>
-          <p:cNvSpPr txBox="1"/>
-          <p:nvPr/>
-        </p:nvSpPr>
-        <p:spPr>
-          <a:xfrm>
-            <a:off x="8183880" y="2258568"/>
-            <a:ext cx="384048" cy="384048"/>
-          </a:xfrm>
-          <a:prstGeom prst="rect">
-            <a:avLst/>
-          </a:prstGeom>
-          <a:noFill/>
-          <a:ln/>
-        </p:spPr>
-        <p:txBody>
-          <a:bodyPr wrap="square" lIns="0" tIns="0" rIns="0" bIns="0" rtlCol="0" anchor="ctr"/>
-          <a:lstStyle/>
-          <a:p>
-            <a:pPr algn="ctr" indent="0" marL="0">
-              <a:buNone/>
-            </a:pPr>
-            <a:r>
-              <a:rPr lang="en-US" sz="1600" b="1" dirty="0">
-                <a:solidFill>
-                  <a:srgbClr val="FFFFFF"/>
-                </a:solidFill>
-                <a:latin typeface="Cambria" pitchFamily="34" charset="0"/>
-                <a:ea typeface="Cambria" pitchFamily="34" charset="-122"/>
-                <a:cs typeface="Cambria" pitchFamily="34" charset="-120"/>
-              </a:rPr>
-              <a:t>♪</a:t>
-            </a:r>
-            <a:endParaRPr lang="en-US" sz="1600" dirty="0"/>
-          </a:p>
-        </p:txBody>
-      </p:sp>
-      <p:sp>
-        <p:nvSpPr>
-          <p:cNvPr id="21" name="Text 19"/>
-          <p:cNvSpPr txBox="1"/>
-          <p:nvPr/>
-        </p:nvSpPr>
-        <p:spPr>
-          <a:xfrm>
-            <a:off x="8183880" y="2743200"/>
-            <a:ext cx="2971800" cy="365760"/>
-          </a:xfrm>
-          <a:prstGeom prst="rect">
-            <a:avLst/>
-          </a:prstGeom>
-          <a:noFill/>
-          <a:ln/>
-        </p:spPr>
-        <p:txBody>
-          <a:bodyPr wrap="square" lIns="0" tIns="0" rIns="0" bIns="0" rtlCol="0" anchor="ctr"/>
-          <a:lstStyle/>
-          <a:p>
-            <a:pPr indent="0" marL="0">
-              <a:buNone/>
-            </a:pPr>
-            <a:r>
-              <a:rPr lang="en-US" sz="1250" b="1" dirty="0">
-                <a:solidFill>
-                  <a:srgbClr val="10253C"/>
-                </a:solidFill>
-                <a:latin typeface="Cambria" pitchFamily="34" charset="0"/>
-                <a:ea typeface="Cambria" pitchFamily="34" charset="-122"/>
-                <a:cs typeface="Cambria" pitchFamily="34" charset="-120"/>
-              </a:rPr>
-              <a:t>Торжественный, гимнический характер</a:t>
-            </a:r>
-            <a:endParaRPr lang="en-US" sz="1250" dirty="0"/>
-          </a:p>
-        </p:txBody>
-      </p:sp>
-      <p:sp>
-        <p:nvSpPr>
-          <p:cNvPr id="22" name="Text 20"/>
-          <p:cNvSpPr txBox="1"/>
-          <p:nvPr/>
-        </p:nvSpPr>
-        <p:spPr>
-          <a:xfrm>
-            <a:off x="8183880" y="3063240"/>
-            <a:ext cx="2971800" cy="502920"/>
-          </a:xfrm>
-          <a:prstGeom prst="rect">
-            <a:avLst/>
-          </a:prstGeom>
-          <a:noFill/>
-          <a:ln/>
-        </p:spPr>
-        <p:txBody>
-          <a:bodyPr wrap="square" lIns="0" tIns="0" rIns="0" bIns="0" rtlCol="0" anchor="ctr"/>
-          <a:lstStyle/>
-          <a:p>
-            <a:pPr indent="0" marL="0">
-              <a:lnSpc>
-                <a:spcPct val="110000"/>
-              </a:lnSpc>
-              <a:buNone/>
-            </a:pPr>
-            <a:r>
-              <a:rPr lang="en-US" sz="1050" dirty="0">
-                <a:solidFill>
-                  <a:srgbClr val="5B6B7A"/>
-                </a:solidFill>
-                <a:latin typeface="Calibri" pitchFamily="34" charset="0"/>
-                <a:ea typeface="Calibri" pitchFamily="34" charset="-122"/>
-                <a:cs typeface="Calibri" pitchFamily="34" charset="-120"/>
-              </a:rPr>
-              <a:t>Праздник и гордость, парадный облик города</a:t>
-            </a:r>
-            <a:endParaRPr lang="en-US" sz="1050" dirty="0"/>
-          </a:p>
-        </p:txBody>
-      </p:sp>
-      <p:sp>
-        <p:nvSpPr>
-          <p:cNvPr id="23" name="Shape 21"/>
-          <p:cNvSpPr/>
-          <p:nvPr/>
-        </p:nvSpPr>
-        <p:spPr>
-          <a:xfrm>
-            <a:off x="640080" y="3703320"/>
-            <a:ext cx="3429000" cy="1417320"/>
-          </a:xfrm>
-          <a:prstGeom prst="roundRect">
-            <a:avLst>
-              <a:gd name="adj" fmla="val 5161"/>
-            </a:avLst>
-          </a:prstGeom>
-          <a:solidFill>
-            <a:srgbClr val="EAF0F7"/>
-          </a:solidFill>
-          <a:ln/>
-        </p:spPr>
-      </p:sp>
-      <p:sp>
-        <p:nvSpPr>
-          <p:cNvPr id="24" name="Shape 22"/>
-          <p:cNvSpPr/>
-          <p:nvPr/>
-        </p:nvSpPr>
-        <p:spPr>
-          <a:xfrm>
-            <a:off x="868680" y="3904488"/>
-            <a:ext cx="384048" cy="384048"/>
-          </a:xfrm>
-          <a:prstGeom prst="ellipse">
-            <a:avLst/>
-          </a:prstGeom>
-          <a:solidFill>
-            <a:srgbClr val="1B3A5C"/>
-          </a:solidFill>
-          <a:ln/>
-        </p:spPr>
-      </p:sp>
-      <p:sp>
-        <p:nvSpPr>
-          <p:cNvPr id="25" name="Text 23"/>
-          <p:cNvSpPr txBox="1"/>
-          <p:nvPr/>
-        </p:nvSpPr>
-        <p:spPr>
-          <a:xfrm>
-            <a:off x="868680" y="3904488"/>
-            <a:ext cx="384048" cy="384048"/>
-          </a:xfrm>
-          <a:prstGeom prst="rect">
-            <a:avLst/>
-          </a:prstGeom>
-          <a:noFill/>
-          <a:ln/>
-        </p:spPr>
-        <p:txBody>
-          <a:bodyPr wrap="square" lIns="0" tIns="0" rIns="0" bIns="0" rtlCol="0" anchor="ctr"/>
-          <a:lstStyle/>
-          <a:p>
-            <a:pPr algn="ctr" indent="0" marL="0">
-              <a:buNone/>
-            </a:pPr>
-            <a:r>
-              <a:rPr lang="en-US" sz="1600" b="1" dirty="0">
-                <a:solidFill>
-                  <a:srgbClr val="FFFFFF"/>
-                </a:solidFill>
-                <a:latin typeface="Cambria" pitchFamily="34" charset="0"/>
-                <a:ea typeface="Cambria" pitchFamily="34" charset="-122"/>
-                <a:cs typeface="Cambria" pitchFamily="34" charset="-120"/>
-              </a:rPr>
-              <a:t>♪</a:t>
-            </a:r>
-            <a:endParaRPr lang="en-US" sz="1600" dirty="0"/>
-          </a:p>
-        </p:txBody>
-      </p:sp>
-      <p:sp>
-        <p:nvSpPr>
-          <p:cNvPr id="26" name="Text 24"/>
-          <p:cNvSpPr txBox="1"/>
-          <p:nvPr/>
-        </p:nvSpPr>
-        <p:spPr>
-          <a:xfrm>
-            <a:off x="868680" y="4389120"/>
-            <a:ext cx="2971800" cy="365760"/>
-          </a:xfrm>
-          <a:prstGeom prst="rect">
-            <a:avLst/>
-          </a:prstGeom>
-          <a:noFill/>
-          <a:ln/>
-        </p:spPr>
-        <p:txBody>
-          <a:bodyPr wrap="square" lIns="0" tIns="0" rIns="0" bIns="0" rtlCol="0" anchor="ctr"/>
-          <a:lstStyle/>
-          <a:p>
-            <a:pPr indent="0" marL="0">
-              <a:buNone/>
-            </a:pPr>
-            <a:r>
-              <a:rPr lang="en-US" sz="1250" b="1" dirty="0">
-                <a:solidFill>
-                  <a:srgbClr val="10253C"/>
-                </a:solidFill>
-                <a:latin typeface="Cambria" pitchFamily="34" charset="0"/>
-                <a:ea typeface="Cambria" pitchFamily="34" charset="-122"/>
-                <a:cs typeface="Cambria" pitchFamily="34" charset="-120"/>
-              </a:rPr>
-              <a:t>Плавные, широкие фразы</a:t>
-            </a:r>
-            <a:endParaRPr lang="en-US" sz="1250" dirty="0"/>
-          </a:p>
-        </p:txBody>
-      </p:sp>
-      <p:sp>
-        <p:nvSpPr>
-          <p:cNvPr id="27" name="Text 25"/>
-          <p:cNvSpPr txBox="1"/>
-          <p:nvPr/>
-        </p:nvSpPr>
-        <p:spPr>
-          <a:xfrm>
-            <a:off x="868680" y="4709160"/>
-            <a:ext cx="2971800" cy="502920"/>
-          </a:xfrm>
-          <a:prstGeom prst="rect">
-            <a:avLst/>
-          </a:prstGeom>
-          <a:noFill/>
-          <a:ln/>
-        </p:spPr>
-        <p:txBody>
-          <a:bodyPr wrap="square" lIns="0" tIns="0" rIns="0" bIns="0" rtlCol="0" anchor="ctr"/>
-          <a:lstStyle/>
-          <a:p>
-            <a:pPr indent="0" marL="0">
-              <a:lnSpc>
-                <a:spcPct val="110000"/>
-              </a:lnSpc>
-              <a:buNone/>
-            </a:pPr>
-            <a:r>
-              <a:rPr lang="en-US" sz="1050" dirty="0">
-                <a:solidFill>
-                  <a:srgbClr val="5B6B7A"/>
-                </a:solidFill>
-                <a:latin typeface="Calibri" pitchFamily="34" charset="0"/>
-                <a:ea typeface="Calibri" pitchFamily="34" charset="-122"/>
-                <a:cs typeface="Calibri" pitchFamily="34" charset="-120"/>
-              </a:rPr>
-              <a:t>Нева, простор, открытые панорамы</a:t>
-            </a:r>
-            <a:endParaRPr lang="en-US" sz="1050" dirty="0"/>
-          </a:p>
-        </p:txBody>
-      </p:sp>
-      <p:sp>
-        <p:nvSpPr>
-          <p:cNvPr id="28" name="Shape 26"/>
-          <p:cNvSpPr/>
-          <p:nvPr/>
-        </p:nvSpPr>
-        <p:spPr>
-          <a:xfrm>
-            <a:off x="4297680" y="3703320"/>
-            <a:ext cx="3429000" cy="1417320"/>
-          </a:xfrm>
-          <a:prstGeom prst="roundRect">
-            <a:avLst>
-              <a:gd name="adj" fmla="val 5161"/>
-            </a:avLst>
-          </a:prstGeom>
-          <a:solidFill>
-            <a:srgbClr val="EAF0F7"/>
-          </a:solidFill>
-          <a:ln/>
-        </p:spPr>
-      </p:sp>
-      <p:sp>
-        <p:nvSpPr>
-          <p:cNvPr id="29" name="Shape 27"/>
-          <p:cNvSpPr/>
-          <p:nvPr/>
-        </p:nvSpPr>
-        <p:spPr>
-          <a:xfrm>
-            <a:off x="4526280" y="3904488"/>
-            <a:ext cx="384048" cy="384048"/>
-          </a:xfrm>
-          <a:prstGeom prst="ellipse">
-            <a:avLst/>
-          </a:prstGeom>
-          <a:solidFill>
-            <a:srgbClr val="1B3A5C"/>
-          </a:solidFill>
-          <a:ln/>
-        </p:spPr>
-      </p:sp>
-      <p:sp>
-        <p:nvSpPr>
-          <p:cNvPr id="30" name="Text 28"/>
-          <p:cNvSpPr txBox="1"/>
-          <p:nvPr/>
-        </p:nvSpPr>
-        <p:spPr>
-          <a:xfrm>
-            <a:off x="4526280" y="3904488"/>
-            <a:ext cx="384048" cy="384048"/>
-          </a:xfrm>
-          <a:prstGeom prst="rect">
-            <a:avLst/>
-          </a:prstGeom>
-          <a:noFill/>
-          <a:ln/>
-        </p:spPr>
-        <p:txBody>
-          <a:bodyPr wrap="square" lIns="0" tIns="0" rIns="0" bIns="0" rtlCol="0" anchor="ctr"/>
-          <a:lstStyle/>
-          <a:p>
-            <a:pPr algn="ctr" indent="0" marL="0">
-              <a:buNone/>
-            </a:pPr>
-            <a:r>
-              <a:rPr lang="en-US" sz="1600" b="1" dirty="0">
-                <a:solidFill>
-                  <a:srgbClr val="FFFFFF"/>
-                </a:solidFill>
-                <a:latin typeface="Cambria" pitchFamily="34" charset="0"/>
-                <a:ea typeface="Cambria" pitchFamily="34" charset="-122"/>
-                <a:cs typeface="Cambria" pitchFamily="34" charset="-120"/>
-              </a:rPr>
-              <a:t>♪</a:t>
-            </a:r>
-            <a:endParaRPr lang="en-US" sz="1600" dirty="0"/>
-          </a:p>
-        </p:txBody>
-      </p:sp>
-      <p:sp>
-        <p:nvSpPr>
-          <p:cNvPr id="31" name="Text 29"/>
-          <p:cNvSpPr txBox="1"/>
-          <p:nvPr/>
-        </p:nvSpPr>
-        <p:spPr>
-          <a:xfrm>
-            <a:off x="4526280" y="4389120"/>
-            <a:ext cx="2971800" cy="365760"/>
-          </a:xfrm>
-          <a:prstGeom prst="rect">
-            <a:avLst/>
-          </a:prstGeom>
-          <a:noFill/>
-          <a:ln/>
-        </p:spPr>
-        <p:txBody>
-          <a:bodyPr wrap="square" lIns="0" tIns="0" rIns="0" bIns="0" rtlCol="0" anchor="ctr"/>
-          <a:lstStyle/>
-          <a:p>
-            <a:pPr indent="0" marL="0">
-              <a:buNone/>
-            </a:pPr>
-            <a:r>
-              <a:rPr lang="en-US" sz="1250" b="1" dirty="0">
-                <a:solidFill>
-                  <a:srgbClr val="10253C"/>
-                </a:solidFill>
-                <a:latin typeface="Cambria" pitchFamily="34" charset="0"/>
-                <a:ea typeface="Cambria" pitchFamily="34" charset="-122"/>
-                <a:cs typeface="Cambria" pitchFamily="34" charset="-120"/>
-              </a:rPr>
-              <a:t>Минорные оттенки</a:t>
-            </a:r>
-            <a:endParaRPr lang="en-US" sz="1250" dirty="0"/>
-          </a:p>
-        </p:txBody>
-      </p:sp>
-      <p:sp>
-        <p:nvSpPr>
-          <p:cNvPr id="32" name="Text 30"/>
-          <p:cNvSpPr txBox="1"/>
-          <p:nvPr/>
-        </p:nvSpPr>
-        <p:spPr>
-          <a:xfrm>
-            <a:off x="4526280" y="4709160"/>
-            <a:ext cx="2971800" cy="502920"/>
-          </a:xfrm>
-          <a:prstGeom prst="rect">
-            <a:avLst/>
-          </a:prstGeom>
-          <a:noFill/>
-          <a:ln/>
-        </p:spPr>
-        <p:txBody>
-          <a:bodyPr wrap="square" lIns="0" tIns="0" rIns="0" bIns="0" rtlCol="0" anchor="ctr"/>
-          <a:lstStyle/>
-          <a:p>
-            <a:pPr indent="0" marL="0">
-              <a:lnSpc>
-                <a:spcPct val="110000"/>
-              </a:lnSpc>
-              <a:buNone/>
-            </a:pPr>
-            <a:r>
-              <a:rPr lang="en-US" sz="1050" dirty="0">
-                <a:solidFill>
-                  <a:srgbClr val="5B6B7A"/>
-                </a:solidFill>
-                <a:latin typeface="Calibri" pitchFamily="34" charset="0"/>
-                <a:ea typeface="Calibri" pitchFamily="34" charset="-122"/>
-                <a:cs typeface="Calibri" pitchFamily="34" charset="-120"/>
-              </a:rPr>
-              <a:t>Строгость и память о пережитом — прежде всего о блокаде</a:t>
-            </a:r>
-            <a:endParaRPr lang="en-US" sz="1050" dirty="0"/>
-          </a:p>
-        </p:txBody>
-      </p:sp>
-      <p:sp>
-        <p:nvSpPr>
-          <p:cNvPr id="33" name="Shape 31"/>
-          <p:cNvSpPr/>
-          <p:nvPr/>
-        </p:nvSpPr>
-        <p:spPr>
-          <a:xfrm>
-            <a:off x="7955280" y="3703320"/>
-            <a:ext cx="3429000" cy="1417320"/>
-          </a:xfrm>
-          <a:prstGeom prst="roundRect">
-            <a:avLst>
-              <a:gd name="adj" fmla="val 5161"/>
-            </a:avLst>
-          </a:prstGeom>
-          <a:solidFill>
-            <a:srgbClr val="10253C"/>
-          </a:solidFill>
-          <a:ln/>
-        </p:spPr>
-      </p:sp>
-      <p:sp>
-        <p:nvSpPr>
-          <p:cNvPr id="34" name="Text 32"/>
-          <p:cNvSpPr txBox="1"/>
-          <p:nvPr/>
-        </p:nvSpPr>
-        <p:spPr>
-          <a:xfrm>
-            <a:off x="8183880" y="3867912"/>
-            <a:ext cx="2971800" cy="1088136"/>
-          </a:xfrm>
-          <a:prstGeom prst="rect">
-            <a:avLst/>
-          </a:prstGeom>
-          <a:noFill/>
-          <a:ln/>
-        </p:spPr>
-        <p:txBody>
-          <a:bodyPr wrap="square" lIns="0" tIns="0" rIns="0" bIns="0" rtlCol="0" anchor="ctr"/>
-          <a:lstStyle/>
-          <a:p>
-            <a:pPr indent="0" marL="0">
-              <a:lnSpc>
-                <a:spcPct val="115000"/>
-              </a:lnSpc>
-              <a:buNone/>
-            </a:pPr>
-            <a:r>
-              <a:rPr lang="en-US" sz="1250" b="1" dirty="0">
-                <a:solidFill>
-                  <a:srgbClr val="C99A3E"/>
-                </a:solidFill>
-                <a:latin typeface="Calibri" pitchFamily="34" charset="0"/>
-                <a:ea typeface="Calibri" pitchFamily="34" charset="-122"/>
-                <a:cs typeface="Calibri" pitchFamily="34" charset="-120"/>
-              </a:rPr>
-              <a:t>«Медный всадник»
-</a:t>
-            </a:r>
-            <a:endParaRPr lang="en-US" sz="1250" dirty="0"/>
-          </a:p>
-          <a:p>
-            <a:pPr indent="0" marL="0">
-              <a:lnSpc>
-                <a:spcPct val="115000"/>
-              </a:lnSpc>
-              <a:buNone/>
-            </a:pPr>
-            <a:r>
-              <a:rPr lang="en-US" sz="1050" dirty="0">
-                <a:solidFill>
-                  <a:srgbClr val="EAF0F7"/>
-                </a:solidFill>
-                <a:latin typeface="Calibri" pitchFamily="34" charset="0"/>
-                <a:ea typeface="Calibri" pitchFamily="34" charset="-122"/>
-                <a:cs typeface="Calibri" pitchFamily="34" charset="-120"/>
-              </a:rPr>
-              <a:t>Гимн родился из балета о памятнике Петру I — теме основания города силой воли, на пустом месте.</a:t>
-            </a:r>
-            <a:endParaRPr lang="en-US" sz="1250" dirty="0"/>
-          </a:p>
-        </p:txBody>
-      </p:sp>
-      <p:sp>
-        <p:nvSpPr>
-          <p:cNvPr id="36" name="Text 33"/>
-          <p:cNvSpPr txBox="1"/>
-          <p:nvPr/>
-        </p:nvSpPr>
-        <p:spPr>
-          <a:xfrm>
-            <a:off x="11365992" y="6355080"/>
-            <a:ext cx="548640" cy="320040"/>
-          </a:xfrm>
-          <a:prstGeom prst="rect">
-            <a:avLst/>
-          </a:prstGeom>
-          <a:noFill/>
-          <a:ln/>
-        </p:spPr>
-        <p:txBody>
-          <a:bodyPr wrap="square" lIns="0" tIns="0" rIns="0" bIns="0" rtlCol="0" anchor="ctr"/>
-          <a:lstStyle/>
-          <a:p>
-            <a:pPr algn="r" indent="0" marL="0">
-              <a:buNone/>
-            </a:pPr>
-            <a:r>
-              <a:rPr lang="en-US" sz="1000" dirty="0">
-                <a:solidFill>
-                  <a:srgbClr val="5B6B7A"/>
-                </a:solidFill>
-                <a:latin typeface="Calibri" pitchFamily="34" charset="0"/>
-                <a:ea typeface="Calibri" pitchFamily="34" charset="-122"/>
-                <a:cs typeface="Calibri" pitchFamily="34" charset="-120"/>
-              </a:rPr>
-              <a:t>05</a:t>
-            </a:r>
-            <a:endParaRPr lang="en-US" sz="1000" dirty="0"/>
-          </a:p>
-        </p:txBody>
-      </p:sp>
-    </p:spTree>
-  </p:cSld>
-  <p:clrMapOvr>
-    <a:masterClrMapping/>
-  </p:clrMapOvr>
-</p:sld>
-</file>
-
-<file path=ppt/slides/slide6.xml><?xml version="1.0" encoding="utf-8"?>
-<p:sld xmlns:a="http://schemas.openxmlformats.org/drawingml/2006/main" xmlns:r="http://schemas.openxmlformats.org/officeDocument/2006/relationships" xmlns:p="http://schemas.openxmlformats.org/presentationml/2006/main">
-  <p:cSld name="Slide 6">
-    <p:bg>
-      <p:bgPr>
-        <a:solidFill>
-          <a:srgbClr val="EAF0F7"/>
-        </a:solidFill>
-      </p:bgPr>
-    </p:bg>
-    <p:spTree>
-      <p:nvGrpSpPr>
-        <p:cNvPr id="1" name=""/>
-        <p:cNvGrpSpPr/>
-        <p:nvPr/>
-      </p:nvGrpSpPr>
-      <p:grpSpPr>
-        <a:xfrm>
-          <a:off x="0" y="0"/>
-          <a:ext cx="0" cy="0"/>
-          <a:chOff x="0" y="0"/>
-          <a:chExt cx="0" cy="0"/>
-        </a:xfrm>
-      </p:grpSpPr>
-      <p:sp>
-        <p:nvSpPr>
-          <p:cNvPr id="2" name="Text 0"/>
-          <p:cNvSpPr txBox="1"/>
-          <p:nvPr/>
-        </p:nvSpPr>
-        <p:spPr>
-          <a:xfrm>
-            <a:off x="640080" y="411480"/>
-            <a:ext cx="7315200" cy="365760"/>
-          </a:xfrm>
-          <a:prstGeom prst="rect">
-            <a:avLst/>
-          </a:prstGeom>
-          <a:noFill/>
-          <a:ln/>
-        </p:spPr>
-        <p:txBody>
-          <a:bodyPr wrap="square" lIns="0" tIns="0" rIns="0" bIns="0" rtlCol="0" anchor="ctr"/>
-          <a:lstStyle/>
-          <a:p>
-            <a:pPr indent="0" marL="0">
-              <a:buNone/>
-            </a:pPr>
-            <a:r>
-              <a:rPr lang="en-US" sz="1200" b="1" spc="200" kern="0" dirty="0">
-                <a:solidFill>
-                  <a:srgbClr val="C99A3E"/>
-                </a:solidFill>
-                <a:latin typeface="Calibri" pitchFamily="34" charset="0"/>
-                <a:ea typeface="Calibri" pitchFamily="34" charset="-122"/>
-                <a:cs typeface="Calibri" pitchFamily="34" charset="-120"/>
-              </a:rPr>
-              <a:t>ПРАКТИКА</a:t>
-            </a:r>
-            <a:endParaRPr lang="en-US" sz="1200" dirty="0"/>
-          </a:p>
-        </p:txBody>
-      </p:sp>
-      <p:sp>
-        <p:nvSpPr>
-          <p:cNvPr id="3" name="Shape 1"/>
-          <p:cNvSpPr/>
-          <p:nvPr/>
-        </p:nvSpPr>
-        <p:spPr>
-          <a:xfrm>
-            <a:off x="10881360" y="457200"/>
-            <a:ext cx="502920" cy="502920"/>
-          </a:xfrm>
-          <a:prstGeom prst="ellipse">
-            <a:avLst/>
-          </a:prstGeom>
-          <a:solidFill>
-            <a:srgbClr val="C99A3E"/>
-          </a:solidFill>
-          <a:ln/>
-        </p:spPr>
-      </p:sp>
-      <p:sp>
-        <p:nvSpPr>
-          <p:cNvPr id="4" name="Text 2"/>
-          <p:cNvSpPr txBox="1"/>
-          <p:nvPr/>
-        </p:nvSpPr>
-        <p:spPr>
-          <a:xfrm>
-            <a:off x="10881360" y="457200"/>
-            <a:ext cx="502920" cy="502920"/>
-          </a:xfrm>
-          <a:prstGeom prst="rect">
-            <a:avLst/>
-          </a:prstGeom>
-          <a:noFill/>
-          <a:ln/>
-        </p:spPr>
-        <p:txBody>
-          <a:bodyPr wrap="square" lIns="0" tIns="0" rIns="0" bIns="0" rtlCol="0" anchor="ctr"/>
-          <a:lstStyle/>
-          <a:p>
-            <a:pPr algn="ctr" indent="0" marL="0">
-              <a:buNone/>
-            </a:pPr>
-            <a:r>
-              <a:rPr lang="en-US" sz="1600" b="1" dirty="0">
-                <a:solidFill>
-                  <a:srgbClr val="10253C"/>
-                </a:solidFill>
-                <a:latin typeface="Cambria" pitchFamily="34" charset="0"/>
-                <a:ea typeface="Cambria" pitchFamily="34" charset="-122"/>
-                <a:cs typeface="Cambria" pitchFamily="34" charset="-120"/>
-              </a:rPr>
-              <a:t>4</a:t>
-            </a:r>
-            <a:endParaRPr lang="en-US" sz="1600" dirty="0"/>
-          </a:p>
-        </p:txBody>
-      </p:sp>
-      <p:sp>
-        <p:nvSpPr>
-          <p:cNvPr id="5" name="Text 3"/>
-          <p:cNvSpPr txBox="1"/>
-          <p:nvPr/>
-        </p:nvSpPr>
-        <p:spPr>
-          <a:xfrm>
-            <a:off x="8869680" y="502920"/>
-            <a:ext cx="1920240" cy="411480"/>
-          </a:xfrm>
-          <a:prstGeom prst="rect">
-            <a:avLst/>
-          </a:prstGeom>
-          <a:noFill/>
-          <a:ln/>
-        </p:spPr>
-        <p:txBody>
-          <a:bodyPr wrap="square" lIns="0" tIns="0" rIns="0" bIns="0" rtlCol="0" anchor="ctr"/>
-          <a:lstStyle/>
-          <a:p>
-            <a:pPr algn="r" indent="0" marL="0">
-              <a:buNone/>
-            </a:pPr>
-            <a:r>
-              <a:rPr lang="en-US" sz="1300" b="1" dirty="0">
-                <a:solidFill>
-                  <a:srgbClr val="10253C"/>
-                </a:solidFill>
-                <a:latin typeface="Calibri" pitchFamily="34" charset="0"/>
-                <a:ea typeface="Calibri" pitchFamily="34" charset="-122"/>
-                <a:cs typeface="Calibri" pitchFamily="34" charset="-120"/>
-              </a:rPr>
-              <a:t>Даниил</a:t>
-            </a:r>
-            <a:endParaRPr lang="en-US" sz="1300" dirty="0"/>
-          </a:p>
-        </p:txBody>
-      </p:sp>
-      <p:sp>
-        <p:nvSpPr>
-          <p:cNvPr id="6" name="Text 4"/>
-          <p:cNvSpPr txBox="1"/>
-          <p:nvPr/>
-        </p:nvSpPr>
-        <p:spPr>
-          <a:xfrm>
-            <a:off x="640080" y="777240"/>
-            <a:ext cx="8686800" cy="640080"/>
-          </a:xfrm>
-          <a:prstGeom prst="rect">
-            <a:avLst/>
-          </a:prstGeom>
-          <a:noFill/>
-          <a:ln/>
-        </p:spPr>
-        <p:txBody>
-          <a:bodyPr wrap="square" lIns="0" tIns="0" rIns="0" bIns="0" rtlCol="0" anchor="ctr"/>
-          <a:lstStyle/>
-          <a:p>
-            <a:pPr indent="0" marL="0">
-              <a:buNone/>
-            </a:pPr>
-            <a:r>
-              <a:rPr lang="en-US" sz="2800" b="1" dirty="0">
-                <a:solidFill>
-                  <a:srgbClr val="10253C"/>
-                </a:solidFill>
-                <a:latin typeface="Cambria" pitchFamily="34" charset="0"/>
-                <a:ea typeface="Cambria" pitchFamily="34" charset="-122"/>
-                <a:cs typeface="Cambria" pitchFamily="34" charset="-120"/>
-              </a:rPr>
-              <a:t>Что говорят сами петербуржцы</a:t>
-            </a:r>
-            <a:endParaRPr lang="en-US" sz="2800" dirty="0"/>
-          </a:p>
-        </p:txBody>
-      </p:sp>
-      <p:sp>
-        <p:nvSpPr>
-          <p:cNvPr id="7" name="Text 5"/>
-          <p:cNvSpPr txBox="1"/>
-          <p:nvPr/>
-        </p:nvSpPr>
-        <p:spPr>
-          <a:xfrm>
-            <a:off x="640080" y="1417320"/>
-            <a:ext cx="10515600" cy="411480"/>
-          </a:xfrm>
-          <a:prstGeom prst="rect">
-            <a:avLst/>
-          </a:prstGeom>
-          <a:noFill/>
-          <a:ln/>
-        </p:spPr>
-        <p:txBody>
-          <a:bodyPr wrap="square" lIns="0" tIns="0" rIns="0" bIns="0" rtlCol="0" anchor="ctr"/>
-          <a:lstStyle/>
-          <a:p>
-            <a:pPr indent="0" marL="0">
-              <a:buNone/>
-            </a:pPr>
-            <a:r>
-              <a:rPr lang="en-US" sz="1350" dirty="0">
-                <a:solidFill>
-                  <a:srgbClr val="1A2733"/>
-                </a:solidFill>
-                <a:latin typeface="Calibri" pitchFamily="34" charset="0"/>
-                <a:ea typeface="Calibri" pitchFamily="34" charset="-122"/>
-                <a:cs typeface="Calibri" pitchFamily="34" charset="-120"/>
-              </a:rPr>
-              <a:t>Мы слушали реакцию знакомых, спрашивали и сравнивали наш гимн с гимном Москвы.</a:t>
-            </a:r>
-            <a:endParaRPr lang="en-US" sz="1350" dirty="0"/>
-          </a:p>
-        </p:txBody>
-      </p:sp>
-      <p:sp>
-        <p:nvSpPr>
-          <p:cNvPr id="8" name="Text 6"/>
-          <p:cNvSpPr txBox="1"/>
-          <p:nvPr/>
-        </p:nvSpPr>
-        <p:spPr>
-          <a:xfrm>
-            <a:off x="640080" y="1965960"/>
-            <a:ext cx="5486400" cy="320040"/>
-          </a:xfrm>
-          <a:prstGeom prst="rect">
-            <a:avLst/>
-          </a:prstGeom>
-          <a:noFill/>
-          <a:ln/>
-        </p:spPr>
-        <p:txBody>
-          <a:bodyPr wrap="square" lIns="0" tIns="0" rIns="0" bIns="0" rtlCol="0" anchor="ctr"/>
-          <a:lstStyle/>
-          <a:p>
-            <a:pPr indent="0" marL="0">
-              <a:buNone/>
-            </a:pPr>
-            <a:r>
-              <a:rPr lang="en-US" sz="1200" b="1" spc="200" kern="0" dirty="0">
-                <a:solidFill>
-                  <a:srgbClr val="C99A3E"/>
-                </a:solidFill>
-                <a:latin typeface="Calibri" pitchFamily="34" charset="0"/>
-                <a:ea typeface="Calibri" pitchFamily="34" charset="-122"/>
-                <a:cs typeface="Calibri" pitchFamily="34" charset="-120"/>
-              </a:rPr>
               <a:t>НАШ ОПРОС</a:t>
             </a:r>
             <a:endParaRPr lang="en-US" sz="1200" dirty="0"/>
@@ -6307,7 +5210,7 @@
       </p:sp>
       <p:graphicFrame>
         <p:nvGraphicFramePr>
-          <p:cNvPr id="7" name="Table 0"/>
+          <p:cNvPr id="6" name="Table 0"/>
           <p:cNvGraphicFramePr>
             <a:graphicFrameLocks noGrp="1"/>
           </p:cNvGraphicFramePr>
@@ -7447,7 +6350,7 @@
                 <a:ea typeface="Calibri" pitchFamily="34" charset="-122"/>
                 <a:cs typeface="Calibri" pitchFamily="34" charset="-120"/>
               </a:rPr>
-              <a:t>06</a:t>
+              <a:t>05</a:t>
             </a:r>
             <a:endParaRPr lang="en-US" sz="1000" dirty="0"/>
           </a:p>
@@ -7461,9 +6364,9 @@
 </p:sld>
 </file>
 
-<file path=ppt/slides/slide7.xml><?xml version="1.0" encoding="utf-8"?>
+<file path=ppt/slides/slide6.xml><?xml version="1.0" encoding="utf-8"?>
 <p:sld xmlns:a="http://schemas.openxmlformats.org/drawingml/2006/main" xmlns:r="http://schemas.openxmlformats.org/officeDocument/2006/relationships" xmlns:p="http://schemas.openxmlformats.org/presentationml/2006/main">
-  <p:cSld name="Slide 7">
+  <p:cSld name="Slide 6">
     <p:bg>
       <p:bgPr>
         <a:solidFill>
@@ -7769,7 +6672,7 @@
                 <a:ea typeface="Calibri" pitchFamily="34" charset="-122"/>
                 <a:cs typeface="Calibri" pitchFamily="34" charset="-120"/>
               </a:rPr>
-              <a:t>07</a:t>
+              <a:t>06</a:t>
             </a:r>
             <a:endParaRPr lang="en-US" sz="1000" dirty="0"/>
           </a:p>
@@ -7783,9 +6686,9 @@
 </p:sld>
 </file>
 
-<file path=ppt/slides/slide8.xml><?xml version="1.0" encoding="utf-8"?>
+<file path=ppt/slides/slide7.xml><?xml version="1.0" encoding="utf-8"?>
 <p:sld xmlns:a="http://schemas.openxmlformats.org/drawingml/2006/main" xmlns:r="http://schemas.openxmlformats.org/officeDocument/2006/relationships" xmlns:p="http://schemas.openxmlformats.org/presentationml/2006/main">
-  <p:cSld name="Slide 8">
+  <p:cSld name="Slide 7">
     <p:bg>
       <p:bgPr>
         <a:solidFill>
@@ -8289,7 +7192,7 @@
                 <a:ea typeface="Calibri" pitchFamily="34" charset="-122"/>
                 <a:cs typeface="Calibri" pitchFamily="34" charset="-120"/>
               </a:rPr>
-              <a:t>08</a:t>
+              <a:t>07</a:t>
             </a:r>
             <a:endParaRPr lang="en-US" sz="1000" dirty="0"/>
           </a:p>

--- a/Гимн_Санкт-Петербурга_презентация.pptx
+++ b/Гимн_Санкт-Петербурга_презентация.pptx
@@ -1630,7 +1630,7 @@
         </p:nvSpPr>
         <p:spPr>
           <a:xfrm>
-            <a:off x="1892808" y="4434840"/>
+            <a:off x="1892808" y="4617720"/>
             <a:ext cx="585216" cy="585216"/>
           </a:xfrm>
           <a:prstGeom prst="ellipse">
@@ -1650,7 +1650,7 @@
         </p:nvSpPr>
         <p:spPr>
           <a:xfrm>
-            <a:off x="1892808" y="4434840"/>
+            <a:off x="1892808" y="4617720"/>
             <a:ext cx="585216" cy="585216"/>
           </a:xfrm>
           <a:prstGeom prst="rect">
@@ -1683,52 +1683,13 @@
       </p:sp>
       <p:sp>
         <p:nvSpPr>
-          <p:cNvPr id="10" name="Text 8"/>
-          <p:cNvSpPr txBox="1"/>
-          <p:nvPr/>
-        </p:nvSpPr>
-        <p:spPr>
-          <a:xfrm>
-            <a:off x="1042416" y="5120640"/>
-            <a:ext cx="2286000" cy="365760"/>
-          </a:xfrm>
-          <a:prstGeom prst="rect">
-            <a:avLst/>
-          </a:prstGeom>
-          <a:noFill/>
-          <a:ln/>
-        </p:spPr>
-        <p:txBody>
-          <a:bodyPr wrap="square" lIns="0" tIns="0" rIns="0" bIns="0" rtlCol="0" anchor="ctr"/>
-          <a:lstStyle/>
-          <a:p>
-            <a:pPr algn="ctr" indent="0" marL="0">
-              <a:buNone/>
-            </a:pPr>
-            <a:r>
-              <a:rPr lang="en-US" sz="1400" b="1" dirty="0">
-                <a:solidFill>
-                  <a:srgbClr val="FFFFFF"/>
-                </a:solidFill>
-                <a:latin typeface="Calibri" pitchFamily="34" charset="0"/>
-                <a:ea typeface="Calibri" pitchFamily="34" charset="-122"/>
-                <a:cs typeface="Calibri" pitchFamily="34" charset="-120"/>
-              </a:rPr>
-              <a:t>Никита</a:t>
-            </a:r>
-            <a:endParaRPr lang="en-US" sz="1400" dirty="0"/>
-          </a:p>
-        </p:txBody>
-      </p:sp>
-      <p:sp>
-        <p:nvSpPr>
-          <p:cNvPr id="11" name="Shape 9"/>
+          <p:cNvPr id="10" name="Shape 8"/>
           <p:cNvSpPr/>
           <p:nvPr/>
         </p:nvSpPr>
         <p:spPr>
           <a:xfrm>
-            <a:off x="4498848" y="4434840"/>
+            <a:off x="4498848" y="4617720"/>
             <a:ext cx="585216" cy="585216"/>
           </a:xfrm>
           <a:prstGeom prst="ellipse">
@@ -1742,13 +1703,13 @@
       </p:sp>
       <p:sp>
         <p:nvSpPr>
-          <p:cNvPr id="12" name="Text 10"/>
-          <p:cNvSpPr txBox="1"/>
-          <p:nvPr/>
-        </p:nvSpPr>
-        <p:spPr>
-          <a:xfrm>
-            <a:off x="4498848" y="4434840"/>
+          <p:cNvPr id="11" name="Text 9"/>
+          <p:cNvSpPr txBox="1"/>
+          <p:nvPr/>
+        </p:nvSpPr>
+        <p:spPr>
+          <a:xfrm>
+            <a:off x="4498848" y="4617720"/>
             <a:ext cx="585216" cy="585216"/>
           </a:xfrm>
           <a:prstGeom prst="rect">
@@ -1781,52 +1742,13 @@
       </p:sp>
       <p:sp>
         <p:nvSpPr>
-          <p:cNvPr id="13" name="Text 11"/>
-          <p:cNvSpPr txBox="1"/>
-          <p:nvPr/>
-        </p:nvSpPr>
-        <p:spPr>
-          <a:xfrm>
-            <a:off x="3648456" y="5120640"/>
-            <a:ext cx="2286000" cy="365760"/>
-          </a:xfrm>
-          <a:prstGeom prst="rect">
-            <a:avLst/>
-          </a:prstGeom>
-          <a:noFill/>
-          <a:ln/>
-        </p:spPr>
-        <p:txBody>
-          <a:bodyPr wrap="square" lIns="0" tIns="0" rIns="0" bIns="0" rtlCol="0" anchor="ctr"/>
-          <a:lstStyle/>
-          <a:p>
-            <a:pPr algn="ctr" indent="0" marL="0">
-              <a:buNone/>
-            </a:pPr>
-            <a:r>
-              <a:rPr lang="en-US" sz="1400" b="1" dirty="0">
-                <a:solidFill>
-                  <a:srgbClr val="FFFFFF"/>
-                </a:solidFill>
-                <a:latin typeface="Calibri" pitchFamily="34" charset="0"/>
-                <a:ea typeface="Calibri" pitchFamily="34" charset="-122"/>
-                <a:cs typeface="Calibri" pitchFamily="34" charset="-120"/>
-              </a:rPr>
-              <a:t>Тимур</a:t>
-            </a:r>
-            <a:endParaRPr lang="en-US" sz="1400" dirty="0"/>
-          </a:p>
-        </p:txBody>
-      </p:sp>
-      <p:sp>
-        <p:nvSpPr>
-          <p:cNvPr id="14" name="Shape 12"/>
+          <p:cNvPr id="12" name="Shape 10"/>
           <p:cNvSpPr/>
           <p:nvPr/>
         </p:nvSpPr>
         <p:spPr>
           <a:xfrm>
-            <a:off x="7104888" y="4434840"/>
+            <a:off x="7104888" y="4617720"/>
             <a:ext cx="585216" cy="585216"/>
           </a:xfrm>
           <a:prstGeom prst="ellipse">
@@ -1840,13 +1762,13 @@
       </p:sp>
       <p:sp>
         <p:nvSpPr>
-          <p:cNvPr id="15" name="Text 13"/>
-          <p:cNvSpPr txBox="1"/>
-          <p:nvPr/>
-        </p:nvSpPr>
-        <p:spPr>
-          <a:xfrm>
-            <a:off x="7104888" y="4434840"/>
+          <p:cNvPr id="13" name="Text 11"/>
+          <p:cNvSpPr txBox="1"/>
+          <p:nvPr/>
+        </p:nvSpPr>
+        <p:spPr>
+          <a:xfrm>
+            <a:off x="7104888" y="4617720"/>
             <a:ext cx="585216" cy="585216"/>
           </a:xfrm>
           <a:prstGeom prst="rect">
@@ -1879,52 +1801,13 @@
       </p:sp>
       <p:sp>
         <p:nvSpPr>
-          <p:cNvPr id="16" name="Text 14"/>
-          <p:cNvSpPr txBox="1"/>
-          <p:nvPr/>
-        </p:nvSpPr>
-        <p:spPr>
-          <a:xfrm>
-            <a:off x="6254496" y="5120640"/>
-            <a:ext cx="2286000" cy="365760"/>
-          </a:xfrm>
-          <a:prstGeom prst="rect">
-            <a:avLst/>
-          </a:prstGeom>
-          <a:noFill/>
-          <a:ln/>
-        </p:spPr>
-        <p:txBody>
-          <a:bodyPr wrap="square" lIns="0" tIns="0" rIns="0" bIns="0" rtlCol="0" anchor="ctr"/>
-          <a:lstStyle/>
-          <a:p>
-            <a:pPr algn="ctr" indent="0" marL="0">
-              <a:buNone/>
-            </a:pPr>
-            <a:r>
-              <a:rPr lang="en-US" sz="1400" b="1" dirty="0">
-                <a:solidFill>
-                  <a:srgbClr val="FFFFFF"/>
-                </a:solidFill>
-                <a:latin typeface="Calibri" pitchFamily="34" charset="0"/>
-                <a:ea typeface="Calibri" pitchFamily="34" charset="-122"/>
-                <a:cs typeface="Calibri" pitchFamily="34" charset="-120"/>
-              </a:rPr>
-              <a:t>Денис</a:t>
-            </a:r>
-            <a:endParaRPr lang="en-US" sz="1400" dirty="0"/>
-          </a:p>
-        </p:txBody>
-      </p:sp>
-      <p:sp>
-        <p:nvSpPr>
-          <p:cNvPr id="17" name="Shape 15"/>
+          <p:cNvPr id="14" name="Shape 12"/>
           <p:cNvSpPr/>
           <p:nvPr/>
         </p:nvSpPr>
         <p:spPr>
           <a:xfrm>
-            <a:off x="9710928" y="4434840"/>
+            <a:off x="9710928" y="4617720"/>
             <a:ext cx="585216" cy="585216"/>
           </a:xfrm>
           <a:prstGeom prst="ellipse">
@@ -1938,13 +1821,13 @@
       </p:sp>
       <p:sp>
         <p:nvSpPr>
-          <p:cNvPr id="18" name="Text 16"/>
-          <p:cNvSpPr txBox="1"/>
-          <p:nvPr/>
-        </p:nvSpPr>
-        <p:spPr>
-          <a:xfrm>
-            <a:off x="9710928" y="4434840"/>
+          <p:cNvPr id="15" name="Text 13"/>
+          <p:cNvSpPr txBox="1"/>
+          <p:nvPr/>
+        </p:nvSpPr>
+        <p:spPr>
+          <a:xfrm>
+            <a:off x="9710928" y="4617720"/>
             <a:ext cx="585216" cy="585216"/>
           </a:xfrm>
           <a:prstGeom prst="rect">
@@ -1977,46 +1860,7 @@
       </p:sp>
       <p:sp>
         <p:nvSpPr>
-          <p:cNvPr id="19" name="Text 17"/>
-          <p:cNvSpPr txBox="1"/>
-          <p:nvPr/>
-        </p:nvSpPr>
-        <p:spPr>
-          <a:xfrm>
-            <a:off x="8860536" y="5120640"/>
-            <a:ext cx="2286000" cy="365760"/>
-          </a:xfrm>
-          <a:prstGeom prst="rect">
-            <a:avLst/>
-          </a:prstGeom>
-          <a:noFill/>
-          <a:ln/>
-        </p:spPr>
-        <p:txBody>
-          <a:bodyPr wrap="square" lIns="0" tIns="0" rIns="0" bIns="0" rtlCol="0" anchor="ctr"/>
-          <a:lstStyle/>
-          <a:p>
-            <a:pPr algn="ctr" indent="0" marL="0">
-              <a:buNone/>
-            </a:pPr>
-            <a:r>
-              <a:rPr lang="en-US" sz="1400" b="1" dirty="0">
-                <a:solidFill>
-                  <a:srgbClr val="FFFFFF"/>
-                </a:solidFill>
-                <a:latin typeface="Calibri" pitchFamily="34" charset="0"/>
-                <a:ea typeface="Calibri" pitchFamily="34" charset="-122"/>
-                <a:cs typeface="Calibri" pitchFamily="34" charset="-120"/>
-              </a:rPr>
-              <a:t>Даниил</a:t>
-            </a:r>
-            <a:endParaRPr lang="en-US" sz="1400" dirty="0"/>
-          </a:p>
-        </p:txBody>
-      </p:sp>
-      <p:sp>
-        <p:nvSpPr>
-          <p:cNvPr id="20" name="Text 18"/>
+          <p:cNvPr id="16" name="Text 14"/>
           <p:cNvSpPr txBox="1"/>
           <p:nvPr/>
         </p:nvSpPr>
@@ -2197,7 +2041,7 @@
                 <a:ea typeface="Cambria" pitchFamily="34" charset="-122"/>
                 <a:cs typeface="Cambria" pitchFamily="34" charset="-120"/>
               </a:rPr>
-              <a:t>Никита</a:t>
+              <a:t>Часть 1</a:t>
             </a:r>
             <a:endParaRPr lang="en-US" sz="2000" dirty="0"/>
           </a:p>
@@ -3034,45 +2878,6 @@
         </p:nvSpPr>
         <p:spPr>
           <a:xfrm>
-            <a:off x="9052560" y="502920"/>
-            <a:ext cx="1737360" cy="411480"/>
-          </a:xfrm>
-          <a:prstGeom prst="rect">
-            <a:avLst/>
-          </a:prstGeom>
-          <a:noFill/>
-          <a:ln/>
-        </p:spPr>
-        <p:txBody>
-          <a:bodyPr wrap="square" lIns="0" tIns="0" rIns="0" bIns="0" rtlCol="0" anchor="ctr"/>
-          <a:lstStyle/>
-          <a:p>
-            <a:pPr algn="r" indent="0" marL="0">
-              <a:buNone/>
-            </a:pPr>
-            <a:r>
-              <a:rPr lang="en-US" sz="1300" b="1" dirty="0">
-                <a:solidFill>
-                  <a:srgbClr val="10253C"/>
-                </a:solidFill>
-                <a:latin typeface="Calibri" pitchFamily="34" charset="0"/>
-                <a:ea typeface="Calibri" pitchFamily="34" charset="-122"/>
-                <a:cs typeface="Calibri" pitchFamily="34" charset="-120"/>
-              </a:rPr>
-              <a:t>Тимур</a:t>
-            </a:r>
-            <a:endParaRPr lang="en-US" sz="1300" dirty="0"/>
-          </a:p>
-        </p:txBody>
-      </p:sp>
-      <p:sp>
-        <p:nvSpPr>
-          <p:cNvPr id="6" name="Text 4"/>
-          <p:cNvSpPr txBox="1"/>
-          <p:nvPr/>
-        </p:nvSpPr>
-        <p:spPr>
-          <a:xfrm>
             <a:off x="640080" y="777240"/>
             <a:ext cx="8229600" cy="640080"/>
           </a:xfrm>
@@ -3106,7 +2911,7 @@
       </p:sp>
       <p:sp>
         <p:nvSpPr>
-          <p:cNvPr id="7" name="Text 5"/>
+          <p:cNvPr id="6" name="Text 4"/>
           <p:cNvSpPr txBox="1"/>
           <p:nvPr/>
         </p:nvSpPr>
@@ -3182,7 +2987,7 @@
       </p:sp>
       <p:sp>
         <p:nvSpPr>
-          <p:cNvPr id="8" name="Shape 6"/>
+          <p:cNvPr id="7" name="Shape 5"/>
           <p:cNvSpPr/>
           <p:nvPr/>
         </p:nvSpPr>
@@ -3205,7 +3010,7 @@
       </p:sp>
       <p:sp>
         <p:nvSpPr>
-          <p:cNvPr id="9" name="Shape 7"/>
+          <p:cNvPr id="8" name="Shape 6"/>
           <p:cNvSpPr/>
           <p:nvPr/>
         </p:nvSpPr>
@@ -3230,7 +3035,7 @@
       </p:sp>
       <p:sp>
         <p:nvSpPr>
-          <p:cNvPr id="10" name="Text 8"/>
+          <p:cNvPr id="9" name="Text 7"/>
           <p:cNvSpPr txBox="1"/>
           <p:nvPr/>
         </p:nvSpPr>
@@ -3269,7 +3074,7 @@
       </p:sp>
       <p:sp>
         <p:nvSpPr>
-          <p:cNvPr id="11" name="Text 9"/>
+          <p:cNvPr id="10" name="Text 8"/>
           <p:cNvSpPr txBox="1"/>
           <p:nvPr/>
         </p:nvSpPr>
@@ -3311,7 +3116,7 @@
       </p:sp>
       <p:sp>
         <p:nvSpPr>
-          <p:cNvPr id="12" name="Shape 10"/>
+          <p:cNvPr id="11" name="Shape 9"/>
           <p:cNvSpPr/>
           <p:nvPr/>
         </p:nvSpPr>
@@ -3336,7 +3141,7 @@
       </p:sp>
       <p:sp>
         <p:nvSpPr>
-          <p:cNvPr id="13" name="Text 11"/>
+          <p:cNvPr id="12" name="Text 10"/>
           <p:cNvSpPr txBox="1"/>
           <p:nvPr/>
         </p:nvSpPr>
@@ -3375,7 +3180,7 @@
       </p:sp>
       <p:sp>
         <p:nvSpPr>
-          <p:cNvPr id="14" name="Text 12"/>
+          <p:cNvPr id="13" name="Text 11"/>
           <p:cNvSpPr txBox="1"/>
           <p:nvPr/>
         </p:nvSpPr>
@@ -3417,7 +3222,7 @@
       </p:sp>
       <p:sp>
         <p:nvSpPr>
-          <p:cNvPr id="15" name="Shape 13"/>
+          <p:cNvPr id="14" name="Shape 12"/>
           <p:cNvSpPr/>
           <p:nvPr/>
         </p:nvSpPr>
@@ -3442,7 +3247,7 @@
       </p:sp>
       <p:sp>
         <p:nvSpPr>
-          <p:cNvPr id="16" name="Text 14"/>
+          <p:cNvPr id="15" name="Text 13"/>
           <p:cNvSpPr txBox="1"/>
           <p:nvPr/>
         </p:nvSpPr>
@@ -3481,7 +3286,7 @@
       </p:sp>
       <p:sp>
         <p:nvSpPr>
-          <p:cNvPr id="17" name="Text 15"/>
+          <p:cNvPr id="16" name="Text 14"/>
           <p:cNvSpPr txBox="1"/>
           <p:nvPr/>
         </p:nvSpPr>
@@ -3523,7 +3328,7 @@
       </p:sp>
       <p:sp>
         <p:nvSpPr>
-          <p:cNvPr id="18" name="Shape 16"/>
+          <p:cNvPr id="17" name="Shape 15"/>
           <p:cNvSpPr/>
           <p:nvPr/>
         </p:nvSpPr>
@@ -3548,7 +3353,7 @@
       </p:sp>
       <p:sp>
         <p:nvSpPr>
-          <p:cNvPr id="19" name="Text 17"/>
+          <p:cNvPr id="18" name="Text 16"/>
           <p:cNvSpPr txBox="1"/>
           <p:nvPr/>
         </p:nvSpPr>
@@ -3587,7 +3392,7 @@
       </p:sp>
       <p:sp>
         <p:nvSpPr>
-          <p:cNvPr id="20" name="Text 18"/>
+          <p:cNvPr id="19" name="Text 17"/>
           <p:cNvSpPr txBox="1"/>
           <p:nvPr/>
         </p:nvSpPr>
@@ -3629,7 +3434,7 @@
       </p:sp>
       <p:sp>
         <p:nvSpPr>
-          <p:cNvPr id="21" name="Shape 19"/>
+          <p:cNvPr id="20" name="Shape 18"/>
           <p:cNvSpPr/>
           <p:nvPr/>
         </p:nvSpPr>
@@ -3651,7 +3456,7 @@
       </p:sp>
       <p:sp>
         <p:nvSpPr>
-          <p:cNvPr id="22" name="Text 20"/>
+          <p:cNvPr id="21" name="Text 19"/>
           <p:cNvSpPr txBox="1"/>
           <p:nvPr/>
         </p:nvSpPr>
@@ -3704,7 +3509,7 @@
       </p:sp>
       <p:sp>
         <p:nvSpPr>
-          <p:cNvPr id="24" name="Text 21"/>
+          <p:cNvPr id="23" name="Text 20"/>
           <p:cNvSpPr txBox="1"/>
           <p:nvPr/>
         </p:nvSpPr>
@@ -3879,109 +3684,70 @@
         </p:nvSpPr>
         <p:spPr>
           <a:xfrm>
-            <a:off x="9052560" y="502920"/>
-            <a:ext cx="1737360" cy="411480"/>
-          </a:xfrm>
-          <a:prstGeom prst="rect">
-            <a:avLst/>
-          </a:prstGeom>
-          <a:noFill/>
-          <a:ln/>
-        </p:spPr>
-        <p:txBody>
-          <a:bodyPr wrap="square" lIns="0" tIns="0" rIns="0" bIns="0" rtlCol="0" anchor="ctr"/>
-          <a:lstStyle/>
-          <a:p>
-            <a:pPr algn="r" indent="0" marL="0">
-              <a:buNone/>
-            </a:pPr>
-            <a:r>
-              <a:rPr lang="en-US" sz="1300" b="1" dirty="0">
+            <a:off x="640080" y="777240"/>
+            <a:ext cx="8686800" cy="640080"/>
+          </a:xfrm>
+          <a:prstGeom prst="rect">
+            <a:avLst/>
+          </a:prstGeom>
+          <a:noFill/>
+          <a:ln/>
+        </p:spPr>
+        <p:txBody>
+          <a:bodyPr wrap="square" lIns="0" tIns="0" rIns="0" bIns="0" rtlCol="0" anchor="ctr"/>
+          <a:lstStyle/>
+          <a:p>
+            <a:pPr indent="0" marL="0">
+              <a:buNone/>
+            </a:pPr>
+            <a:r>
+              <a:rPr lang="en-US" sz="2800" b="1" dirty="0">
                 <a:solidFill>
                   <a:srgbClr val="10253C"/>
+                </a:solidFill>
+                <a:latin typeface="Cambria" pitchFamily="34" charset="0"/>
+                <a:ea typeface="Cambria" pitchFamily="34" charset="-122"/>
+                <a:cs typeface="Cambria" pitchFamily="34" charset="-120"/>
+              </a:rPr>
+              <a:t>Музыка как портрет города</a:t>
+            </a:r>
+            <a:endParaRPr lang="en-US" sz="2800" dirty="0"/>
+          </a:p>
+        </p:txBody>
+      </p:sp>
+      <p:sp>
+        <p:nvSpPr>
+          <p:cNvPr id="6" name="Text 4"/>
+          <p:cNvSpPr txBox="1"/>
+          <p:nvPr/>
+        </p:nvSpPr>
+        <p:spPr>
+          <a:xfrm>
+            <a:off x="640080" y="1417320"/>
+            <a:ext cx="10515600" cy="457200"/>
+          </a:xfrm>
+          <a:prstGeom prst="rect">
+            <a:avLst/>
+          </a:prstGeom>
+          <a:noFill/>
+          <a:ln/>
+        </p:spPr>
+        <p:txBody>
+          <a:bodyPr wrap="square" lIns="0" tIns="0" rIns="0" bIns="0" rtlCol="0" anchor="ctr"/>
+          <a:lstStyle/>
+          <a:p>
+            <a:pPr indent="0" marL="0">
+              <a:buNone/>
+            </a:pPr>
+            <a:r>
+              <a:rPr lang="en-US" sz="1350" dirty="0">
+                <a:solidFill>
+                  <a:srgbClr val="1A2733"/>
                 </a:solidFill>
                 <a:latin typeface="Calibri" pitchFamily="34" charset="0"/>
                 <a:ea typeface="Calibri" pitchFamily="34" charset="-122"/>
                 <a:cs typeface="Calibri" pitchFamily="34" charset="-120"/>
               </a:rPr>
-              <a:t>Денис</a:t>
-            </a:r>
-            <a:endParaRPr lang="en-US" sz="1300" dirty="0"/>
-          </a:p>
-        </p:txBody>
-      </p:sp>
-      <p:sp>
-        <p:nvSpPr>
-          <p:cNvPr id="6" name="Text 4"/>
-          <p:cNvSpPr txBox="1"/>
-          <p:nvPr/>
-        </p:nvSpPr>
-        <p:spPr>
-          <a:xfrm>
-            <a:off x="640080" y="777240"/>
-            <a:ext cx="8686800" cy="640080"/>
-          </a:xfrm>
-          <a:prstGeom prst="rect">
-            <a:avLst/>
-          </a:prstGeom>
-          <a:noFill/>
-          <a:ln/>
-        </p:spPr>
-        <p:txBody>
-          <a:bodyPr wrap="square" lIns="0" tIns="0" rIns="0" bIns="0" rtlCol="0" anchor="ctr"/>
-          <a:lstStyle/>
-          <a:p>
-            <a:pPr indent="0" marL="0">
-              <a:buNone/>
-            </a:pPr>
-            <a:r>
-              <a:rPr lang="en-US" sz="2800" b="1" dirty="0">
-                <a:solidFill>
-                  <a:srgbClr val="10253C"/>
-                </a:solidFill>
-                <a:latin typeface="Cambria" pitchFamily="34" charset="0"/>
-                <a:ea typeface="Cambria" pitchFamily="34" charset="-122"/>
-                <a:cs typeface="Cambria" pitchFamily="34" charset="-120"/>
-              </a:rPr>
-              <a:t>Музыка как портрет города</a:t>
-            </a:r>
-            <a:endParaRPr lang="en-US" sz="2800" dirty="0"/>
-          </a:p>
-        </p:txBody>
-      </p:sp>
-      <p:sp>
-        <p:nvSpPr>
-          <p:cNvPr id="7" name="Text 5"/>
-          <p:cNvSpPr txBox="1"/>
-          <p:nvPr/>
-        </p:nvSpPr>
-        <p:spPr>
-          <a:xfrm>
-            <a:off x="640080" y="1417320"/>
-            <a:ext cx="10515600" cy="457200"/>
-          </a:xfrm>
-          <a:prstGeom prst="rect">
-            <a:avLst/>
-          </a:prstGeom>
-          <a:noFill/>
-          <a:ln/>
-        </p:spPr>
-        <p:txBody>
-          <a:bodyPr wrap="square" lIns="0" tIns="0" rIns="0" bIns="0" rtlCol="0" anchor="ctr"/>
-          <a:lstStyle/>
-          <a:p>
-            <a:pPr indent="0" marL="0">
-              <a:buNone/>
-            </a:pPr>
-            <a:r>
-              <a:rPr lang="en-US" sz="1350" dirty="0">
-                <a:solidFill>
-                  <a:srgbClr val="1A2733"/>
-                </a:solidFill>
-                <a:latin typeface="Calibri" pitchFamily="34" charset="0"/>
-                <a:ea typeface="Calibri" pitchFamily="34" charset="-122"/>
-                <a:cs typeface="Calibri" pitchFamily="34" charset="-120"/>
-              </a:rPr>
               <a:t>Гимн не рассказывает о Петербурге словами — он его изображает звуком. Пять приёмов, в которых это слышно:</a:t>
             </a:r>
             <a:endParaRPr lang="en-US" sz="1350" dirty="0"/>
@@ -3990,7 +3756,7 @@
       </p:sp>
       <p:sp>
         <p:nvSpPr>
-          <p:cNvPr id="8" name="Shape 6"/>
+          <p:cNvPr id="7" name="Shape 5"/>
           <p:cNvSpPr/>
           <p:nvPr/>
         </p:nvSpPr>
@@ -4012,7 +3778,7 @@
       </p:sp>
       <p:sp>
         <p:nvSpPr>
-          <p:cNvPr id="9" name="Shape 7"/>
+          <p:cNvPr id="8" name="Shape 6"/>
           <p:cNvSpPr/>
           <p:nvPr/>
         </p:nvSpPr>
@@ -4032,7 +3798,7 @@
       </p:sp>
       <p:sp>
         <p:nvSpPr>
-          <p:cNvPr id="10" name="Text 8"/>
+          <p:cNvPr id="9" name="Text 7"/>
           <p:cNvSpPr txBox="1"/>
           <p:nvPr/>
         </p:nvSpPr>
@@ -4071,7 +3837,7 @@
       </p:sp>
       <p:sp>
         <p:nvSpPr>
-          <p:cNvPr id="11" name="Text 9"/>
+          <p:cNvPr id="10" name="Text 8"/>
           <p:cNvSpPr txBox="1"/>
           <p:nvPr/>
         </p:nvSpPr>
@@ -4110,7 +3876,7 @@
       </p:sp>
       <p:sp>
         <p:nvSpPr>
-          <p:cNvPr id="12" name="Text 10"/>
+          <p:cNvPr id="11" name="Text 9"/>
           <p:cNvSpPr txBox="1"/>
           <p:nvPr/>
         </p:nvSpPr>
@@ -4152,7 +3918,7 @@
       </p:sp>
       <p:sp>
         <p:nvSpPr>
-          <p:cNvPr id="13" name="Shape 11"/>
+          <p:cNvPr id="12" name="Shape 10"/>
           <p:cNvSpPr/>
           <p:nvPr/>
         </p:nvSpPr>
@@ -4174,7 +3940,7 @@
       </p:sp>
       <p:sp>
         <p:nvSpPr>
-          <p:cNvPr id="14" name="Shape 12"/>
+          <p:cNvPr id="13" name="Shape 11"/>
           <p:cNvSpPr/>
           <p:nvPr/>
         </p:nvSpPr>
@@ -4194,7 +3960,7 @@
       </p:sp>
       <p:sp>
         <p:nvSpPr>
-          <p:cNvPr id="15" name="Text 13"/>
+          <p:cNvPr id="14" name="Text 12"/>
           <p:cNvSpPr txBox="1"/>
           <p:nvPr/>
         </p:nvSpPr>
@@ -4233,7 +3999,7 @@
       </p:sp>
       <p:sp>
         <p:nvSpPr>
-          <p:cNvPr id="16" name="Text 14"/>
+          <p:cNvPr id="15" name="Text 13"/>
           <p:cNvSpPr txBox="1"/>
           <p:nvPr/>
         </p:nvSpPr>
@@ -4272,7 +4038,7 @@
       </p:sp>
       <p:sp>
         <p:nvSpPr>
-          <p:cNvPr id="17" name="Text 15"/>
+          <p:cNvPr id="16" name="Text 14"/>
           <p:cNvSpPr txBox="1"/>
           <p:nvPr/>
         </p:nvSpPr>
@@ -4314,7 +4080,7 @@
       </p:sp>
       <p:sp>
         <p:nvSpPr>
-          <p:cNvPr id="18" name="Shape 16"/>
+          <p:cNvPr id="17" name="Shape 15"/>
           <p:cNvSpPr/>
           <p:nvPr/>
         </p:nvSpPr>
@@ -4336,7 +4102,7 @@
       </p:sp>
       <p:sp>
         <p:nvSpPr>
-          <p:cNvPr id="19" name="Shape 17"/>
+          <p:cNvPr id="18" name="Shape 16"/>
           <p:cNvSpPr/>
           <p:nvPr/>
         </p:nvSpPr>
@@ -4356,7 +4122,7 @@
       </p:sp>
       <p:sp>
         <p:nvSpPr>
-          <p:cNvPr id="20" name="Text 18"/>
+          <p:cNvPr id="19" name="Text 17"/>
           <p:cNvSpPr txBox="1"/>
           <p:nvPr/>
         </p:nvSpPr>
@@ -4395,7 +4161,7 @@
       </p:sp>
       <p:sp>
         <p:nvSpPr>
-          <p:cNvPr id="21" name="Text 19"/>
+          <p:cNvPr id="20" name="Text 18"/>
           <p:cNvSpPr txBox="1"/>
           <p:nvPr/>
         </p:nvSpPr>
@@ -4434,7 +4200,7 @@
       </p:sp>
       <p:sp>
         <p:nvSpPr>
-          <p:cNvPr id="22" name="Text 20"/>
+          <p:cNvPr id="21" name="Text 19"/>
           <p:cNvSpPr txBox="1"/>
           <p:nvPr/>
         </p:nvSpPr>
@@ -4476,7 +4242,7 @@
       </p:sp>
       <p:sp>
         <p:nvSpPr>
-          <p:cNvPr id="23" name="Shape 21"/>
+          <p:cNvPr id="22" name="Shape 20"/>
           <p:cNvSpPr/>
           <p:nvPr/>
         </p:nvSpPr>
@@ -4498,7 +4264,7 @@
       </p:sp>
       <p:sp>
         <p:nvSpPr>
-          <p:cNvPr id="24" name="Shape 22"/>
+          <p:cNvPr id="23" name="Shape 21"/>
           <p:cNvSpPr/>
           <p:nvPr/>
         </p:nvSpPr>
@@ -4518,7 +4284,7 @@
       </p:sp>
       <p:sp>
         <p:nvSpPr>
-          <p:cNvPr id="25" name="Text 23"/>
+          <p:cNvPr id="24" name="Text 22"/>
           <p:cNvSpPr txBox="1"/>
           <p:nvPr/>
         </p:nvSpPr>
@@ -4557,7 +4323,7 @@
       </p:sp>
       <p:sp>
         <p:nvSpPr>
-          <p:cNvPr id="26" name="Text 24"/>
+          <p:cNvPr id="25" name="Text 23"/>
           <p:cNvSpPr txBox="1"/>
           <p:nvPr/>
         </p:nvSpPr>
@@ -4596,7 +4362,7 @@
       </p:sp>
       <p:sp>
         <p:nvSpPr>
-          <p:cNvPr id="27" name="Text 25"/>
+          <p:cNvPr id="26" name="Text 24"/>
           <p:cNvSpPr txBox="1"/>
           <p:nvPr/>
         </p:nvSpPr>
@@ -4638,7 +4404,7 @@
       </p:sp>
       <p:sp>
         <p:nvSpPr>
-          <p:cNvPr id="28" name="Shape 26"/>
+          <p:cNvPr id="27" name="Shape 25"/>
           <p:cNvSpPr/>
           <p:nvPr/>
         </p:nvSpPr>
@@ -4660,7 +4426,7 @@
       </p:sp>
       <p:sp>
         <p:nvSpPr>
-          <p:cNvPr id="29" name="Shape 27"/>
+          <p:cNvPr id="28" name="Shape 26"/>
           <p:cNvSpPr/>
           <p:nvPr/>
         </p:nvSpPr>
@@ -4680,7 +4446,7 @@
       </p:sp>
       <p:sp>
         <p:nvSpPr>
-          <p:cNvPr id="30" name="Text 28"/>
+          <p:cNvPr id="29" name="Text 27"/>
           <p:cNvSpPr txBox="1"/>
           <p:nvPr/>
         </p:nvSpPr>
@@ -4719,7 +4485,7 @@
       </p:sp>
       <p:sp>
         <p:nvSpPr>
-          <p:cNvPr id="31" name="Text 29"/>
+          <p:cNvPr id="30" name="Text 28"/>
           <p:cNvSpPr txBox="1"/>
           <p:nvPr/>
         </p:nvSpPr>
@@ -4758,7 +4524,7 @@
       </p:sp>
       <p:sp>
         <p:nvSpPr>
-          <p:cNvPr id="32" name="Text 30"/>
+          <p:cNvPr id="31" name="Text 29"/>
           <p:cNvSpPr txBox="1"/>
           <p:nvPr/>
         </p:nvSpPr>
@@ -4800,7 +4566,7 @@
       </p:sp>
       <p:sp>
         <p:nvSpPr>
-          <p:cNvPr id="33" name="Shape 31"/>
+          <p:cNvPr id="32" name="Shape 30"/>
           <p:cNvSpPr/>
           <p:nvPr/>
         </p:nvSpPr>
@@ -4822,7 +4588,7 @@
       </p:sp>
       <p:sp>
         <p:nvSpPr>
-          <p:cNvPr id="34" name="Text 32"/>
+          <p:cNvPr id="33" name="Text 31"/>
           <p:cNvSpPr txBox="1"/>
           <p:nvPr/>
         </p:nvSpPr>
@@ -4885,7 +4651,7 @@
       </p:sp>
       <p:sp>
         <p:nvSpPr>
-          <p:cNvPr id="36" name="Text 33"/>
+          <p:cNvPr id="35" name="Text 32"/>
           <p:cNvSpPr txBox="1"/>
           <p:nvPr/>
         </p:nvSpPr>
@@ -5060,118 +4826,79 @@
         </p:nvSpPr>
         <p:spPr>
           <a:xfrm>
-            <a:off x="8869680" y="502920"/>
-            <a:ext cx="1920240" cy="411480"/>
-          </a:xfrm>
-          <a:prstGeom prst="rect">
-            <a:avLst/>
-          </a:prstGeom>
-          <a:noFill/>
-          <a:ln/>
-        </p:spPr>
-        <p:txBody>
-          <a:bodyPr wrap="square" lIns="0" tIns="0" rIns="0" bIns="0" rtlCol="0" anchor="ctr"/>
-          <a:lstStyle/>
-          <a:p>
-            <a:pPr algn="r" indent="0" marL="0">
-              <a:buNone/>
-            </a:pPr>
-            <a:r>
-              <a:rPr lang="en-US" sz="1300" b="1" dirty="0">
+            <a:off x="640080" y="777240"/>
+            <a:ext cx="8686800" cy="640080"/>
+          </a:xfrm>
+          <a:prstGeom prst="rect">
+            <a:avLst/>
+          </a:prstGeom>
+          <a:noFill/>
+          <a:ln/>
+        </p:spPr>
+        <p:txBody>
+          <a:bodyPr wrap="square" lIns="0" tIns="0" rIns="0" bIns="0" rtlCol="0" anchor="ctr"/>
+          <a:lstStyle/>
+          <a:p>
+            <a:pPr indent="0" marL="0">
+              <a:buNone/>
+            </a:pPr>
+            <a:r>
+              <a:rPr lang="en-US" sz="2800" b="1" dirty="0">
                 <a:solidFill>
                   <a:srgbClr val="10253C"/>
+                </a:solidFill>
+                <a:latin typeface="Cambria" pitchFamily="34" charset="0"/>
+                <a:ea typeface="Cambria" pitchFamily="34" charset="-122"/>
+                <a:cs typeface="Cambria" pitchFamily="34" charset="-120"/>
+              </a:rPr>
+              <a:t>Что говорят сами петербуржцы</a:t>
+            </a:r>
+            <a:endParaRPr lang="en-US" sz="2800" dirty="0"/>
+          </a:p>
+        </p:txBody>
+      </p:sp>
+      <p:sp>
+        <p:nvSpPr>
+          <p:cNvPr id="6" name="Text 4"/>
+          <p:cNvSpPr txBox="1"/>
+          <p:nvPr/>
+        </p:nvSpPr>
+        <p:spPr>
+          <a:xfrm>
+            <a:off x="640080" y="1417320"/>
+            <a:ext cx="10515600" cy="411480"/>
+          </a:xfrm>
+          <a:prstGeom prst="rect">
+            <a:avLst/>
+          </a:prstGeom>
+          <a:noFill/>
+          <a:ln/>
+        </p:spPr>
+        <p:txBody>
+          <a:bodyPr wrap="square" lIns="0" tIns="0" rIns="0" bIns="0" rtlCol="0" anchor="ctr"/>
+          <a:lstStyle/>
+          <a:p>
+            <a:pPr indent="0" marL="0">
+              <a:buNone/>
+            </a:pPr>
+            <a:r>
+              <a:rPr lang="en-US" sz="1350" dirty="0">
+                <a:solidFill>
+                  <a:srgbClr val="1A2733"/>
                 </a:solidFill>
                 <a:latin typeface="Calibri" pitchFamily="34" charset="0"/>
                 <a:ea typeface="Calibri" pitchFamily="34" charset="-122"/>
                 <a:cs typeface="Calibri" pitchFamily="34" charset="-120"/>
               </a:rPr>
-              <a:t>Даниил</a:t>
-            </a:r>
-            <a:endParaRPr lang="en-US" sz="1300" dirty="0"/>
-          </a:p>
-        </p:txBody>
-      </p:sp>
-      <p:sp>
-        <p:nvSpPr>
-          <p:cNvPr id="6" name="Text 4"/>
-          <p:cNvSpPr txBox="1"/>
-          <p:nvPr/>
-        </p:nvSpPr>
-        <p:spPr>
-          <a:xfrm>
-            <a:off x="640080" y="777240"/>
-            <a:ext cx="8686800" cy="640080"/>
-          </a:xfrm>
-          <a:prstGeom prst="rect">
-            <a:avLst/>
-          </a:prstGeom>
-          <a:noFill/>
-          <a:ln/>
-        </p:spPr>
-        <p:txBody>
-          <a:bodyPr wrap="square" lIns="0" tIns="0" rIns="0" bIns="0" rtlCol="0" anchor="ctr"/>
-          <a:lstStyle/>
-          <a:p>
-            <a:pPr indent="0" marL="0">
-              <a:buNone/>
-            </a:pPr>
-            <a:r>
-              <a:rPr lang="en-US" sz="2800" b="1" dirty="0">
-                <a:solidFill>
-                  <a:srgbClr val="10253C"/>
-                </a:solidFill>
-                <a:latin typeface="Cambria" pitchFamily="34" charset="0"/>
-                <a:ea typeface="Cambria" pitchFamily="34" charset="-122"/>
-                <a:cs typeface="Cambria" pitchFamily="34" charset="-120"/>
-              </a:rPr>
-              <a:t>Что говорят сами петербуржцы</a:t>
-            </a:r>
-            <a:endParaRPr lang="en-US" sz="2800" dirty="0"/>
+              <a:t>Мы слушали реакцию знакомых, спрашивали и сравнивали наш гимн с гимном Москвы.</a:t>
+            </a:r>
+            <a:endParaRPr lang="en-US" sz="1350" dirty="0"/>
           </a:p>
         </p:txBody>
       </p:sp>
       <p:sp>
         <p:nvSpPr>
           <p:cNvPr id="7" name="Text 5"/>
-          <p:cNvSpPr txBox="1"/>
-          <p:nvPr/>
-        </p:nvSpPr>
-        <p:spPr>
-          <a:xfrm>
-            <a:off x="640080" y="1417320"/>
-            <a:ext cx="10515600" cy="411480"/>
-          </a:xfrm>
-          <a:prstGeom prst="rect">
-            <a:avLst/>
-          </a:prstGeom>
-          <a:noFill/>
-          <a:ln/>
-        </p:spPr>
-        <p:txBody>
-          <a:bodyPr wrap="square" lIns="0" tIns="0" rIns="0" bIns="0" rtlCol="0" anchor="ctr"/>
-          <a:lstStyle/>
-          <a:p>
-            <a:pPr indent="0" marL="0">
-              <a:buNone/>
-            </a:pPr>
-            <a:r>
-              <a:rPr lang="en-US" sz="1350" dirty="0">
-                <a:solidFill>
-                  <a:srgbClr val="1A2733"/>
-                </a:solidFill>
-                <a:latin typeface="Calibri" pitchFamily="34" charset="0"/>
-                <a:ea typeface="Calibri" pitchFamily="34" charset="-122"/>
-                <a:cs typeface="Calibri" pitchFamily="34" charset="-120"/>
-              </a:rPr>
-              <a:t>Мы слушали реакцию знакомых, спрашивали и сравнивали наш гимн с гимном Москвы.</a:t>
-            </a:r>
-            <a:endParaRPr lang="en-US" sz="1350" dirty="0"/>
-          </a:p>
-        </p:txBody>
-      </p:sp>
-      <p:sp>
-        <p:nvSpPr>
-          <p:cNvPr id="8" name="Text 6"/>
           <p:cNvSpPr txBox="1"/>
           <p:nvPr/>
         </p:nvSpPr>
@@ -5875,7 +5602,7 @@
       </p:graphicFrame>
       <p:sp>
         <p:nvSpPr>
-          <p:cNvPr id="10" name="Text 7"/>
+          <p:cNvPr id="9" name="Text 6"/>
           <p:cNvSpPr txBox="1"/>
           <p:nvPr/>
         </p:nvSpPr>
@@ -5914,7 +5641,7 @@
       </p:sp>
       <p:sp>
         <p:nvSpPr>
-          <p:cNvPr id="11" name="Text 8"/>
+          <p:cNvPr id="10" name="Text 7"/>
           <p:cNvSpPr txBox="1"/>
           <p:nvPr/>
         </p:nvSpPr>
@@ -5953,7 +5680,7 @@
       </p:sp>
       <p:sp>
         <p:nvSpPr>
-          <p:cNvPr id="12" name="Shape 9"/>
+          <p:cNvPr id="11" name="Shape 8"/>
           <p:cNvSpPr/>
           <p:nvPr/>
         </p:nvSpPr>
@@ -5975,7 +5702,7 @@
       </p:sp>
       <p:sp>
         <p:nvSpPr>
-          <p:cNvPr id="13" name="Text 10"/>
+          <p:cNvPr id="12" name="Text 9"/>
           <p:cNvSpPr txBox="1"/>
           <p:nvPr/>
         </p:nvSpPr>
@@ -6014,7 +5741,7 @@
       </p:sp>
       <p:sp>
         <p:nvSpPr>
-          <p:cNvPr id="14" name="Text 11"/>
+          <p:cNvPr id="13" name="Text 10"/>
           <p:cNvSpPr txBox="1"/>
           <p:nvPr/>
         </p:nvSpPr>
@@ -6096,7 +5823,7 @@
       </p:sp>
       <p:sp>
         <p:nvSpPr>
-          <p:cNvPr id="15" name="Shape 12"/>
+          <p:cNvPr id="14" name="Shape 11"/>
           <p:cNvSpPr/>
           <p:nvPr/>
         </p:nvSpPr>
@@ -6123,7 +5850,7 @@
       </p:sp>
       <p:sp>
         <p:nvSpPr>
-          <p:cNvPr id="16" name="Text 13"/>
+          <p:cNvPr id="15" name="Text 12"/>
           <p:cNvSpPr txBox="1"/>
           <p:nvPr/>
         </p:nvSpPr>
@@ -6162,7 +5889,7 @@
       </p:sp>
       <p:sp>
         <p:nvSpPr>
-          <p:cNvPr id="17" name="Text 14"/>
+          <p:cNvPr id="16" name="Text 13"/>
           <p:cNvSpPr txBox="1"/>
           <p:nvPr/>
         </p:nvSpPr>
@@ -6244,7 +5971,7 @@
       </p:sp>
       <p:sp>
         <p:nvSpPr>
-          <p:cNvPr id="18" name="Shape 15"/>
+          <p:cNvPr id="17" name="Shape 14"/>
           <p:cNvSpPr/>
           <p:nvPr/>
         </p:nvSpPr>
@@ -6266,7 +5993,7 @@
       </p:sp>
       <p:sp>
         <p:nvSpPr>
-          <p:cNvPr id="19" name="Text 16"/>
+          <p:cNvPr id="18" name="Text 15"/>
           <p:cNvSpPr txBox="1"/>
           <p:nvPr/>
         </p:nvSpPr>
@@ -6319,7 +6046,7 @@
       </p:sp>
       <p:sp>
         <p:nvSpPr>
-          <p:cNvPr id="21" name="Text 17"/>
+          <p:cNvPr id="20" name="Text 16"/>
           <p:cNvSpPr txBox="1"/>
           <p:nvPr/>
         </p:nvSpPr>

--- a/Гимн_Санкт-Петербурга_презентация.pptx
+++ b/Гимн_Санкт-Петербурга_презентация.pptx
@@ -3762,12 +3762,12 @@
         </p:nvSpPr>
         <p:spPr>
           <a:xfrm>
-            <a:off x="640080" y="2057400"/>
-            <a:ext cx="3429000" cy="1417320"/>
+            <a:off x="640080" y="2011680"/>
+            <a:ext cx="3429000" cy="1691640"/>
           </a:xfrm>
           <a:prstGeom prst="roundRect">
             <a:avLst>
-              <a:gd name="adj" fmla="val 5161"/>
+              <a:gd name="adj" fmla="val 4324"/>
             </a:avLst>
           </a:prstGeom>
           <a:solidFill>
@@ -3784,8 +3784,8 @@
         </p:nvSpPr>
         <p:spPr>
           <a:xfrm>
-            <a:off x="868680" y="2258568"/>
-            <a:ext cx="384048" cy="384048"/>
+            <a:off x="841248" y="2194560"/>
+            <a:ext cx="365760" cy="365760"/>
           </a:xfrm>
           <a:prstGeom prst="ellipse">
             <a:avLst/>
@@ -3804,8 +3804,8 @@
         </p:nvSpPr>
         <p:spPr>
           <a:xfrm>
-            <a:off x="868680" y="2258568"/>
-            <a:ext cx="384048" cy="384048"/>
+            <a:off x="841248" y="2194560"/>
+            <a:ext cx="365760" cy="365760"/>
           </a:xfrm>
           <a:prstGeom prst="rect">
             <a:avLst/>
@@ -3821,7 +3821,7 @@
               <a:buNone/>
             </a:pPr>
             <a:r>
-              <a:rPr lang="en-US" sz="1600" b="1" dirty="0">
+              <a:rPr lang="en-US" sz="1500" b="1" dirty="0">
                 <a:solidFill>
                   <a:srgbClr val="FFFFFF"/>
                 </a:solidFill>
@@ -3831,7 +3831,7 @@
               </a:rPr>
               <a:t>♪</a:t>
             </a:r>
-            <a:endParaRPr lang="en-US" sz="1600" dirty="0"/>
+            <a:endParaRPr lang="en-US" sz="1500" dirty="0"/>
           </a:p>
         </p:txBody>
       </p:sp>
@@ -3843,8 +3843,8 @@
         </p:nvSpPr>
         <p:spPr>
           <a:xfrm>
-            <a:off x="868680" y="2743200"/>
-            <a:ext cx="2971800" cy="365760"/>
+            <a:off x="841248" y="2615184"/>
+            <a:ext cx="3026664" cy="566928"/>
           </a:xfrm>
           <a:prstGeom prst="rect">
             <a:avLst/>
@@ -3857,10 +3857,13 @@
           <a:lstStyle/>
           <a:p>
             <a:pPr indent="0" marL="0">
-              <a:buNone/>
-            </a:pPr>
-            <a:r>
-              <a:rPr lang="en-US" sz="1250" b="1" dirty="0">
+              <a:lnSpc>
+                <a:spcPct val="108000"/>
+              </a:lnSpc>
+              <a:buNone/>
+            </a:pPr>
+            <a:r>
+              <a:rPr lang="en-US" sz="1200" b="1" dirty="0">
                 <a:solidFill>
                   <a:srgbClr val="10253C"/>
                 </a:solidFill>
@@ -3868,734 +3871,42 @@
                 <a:ea typeface="Cambria" pitchFamily="34" charset="-122"/>
                 <a:cs typeface="Cambria" pitchFamily="34" charset="-120"/>
               </a:rPr>
-              <a:t>Медленный, широкий темп</a:t>
-            </a:r>
-            <a:endParaRPr lang="en-US" sz="1250" dirty="0"/>
-          </a:p>
-        </p:txBody>
-      </p:sp>
-      <p:sp>
-        <p:nvSpPr>
-          <p:cNvPr id="11" name="Text 9"/>
-          <p:cNvSpPr txBox="1"/>
-          <p:nvPr/>
-        </p:nvSpPr>
-        <p:spPr>
-          <a:xfrm>
-            <a:off x="868680" y="3063240"/>
-            <a:ext cx="2971800" cy="502920"/>
-          </a:xfrm>
-          <a:prstGeom prst="rect">
-            <a:avLst/>
-          </a:prstGeom>
-          <a:noFill/>
-          <a:ln/>
-        </p:spPr>
-        <p:txBody>
-          <a:bodyPr wrap="square" lIns="0" tIns="0" rIns="0" bIns="0" rtlCol="0" anchor="ctr"/>
-          <a:lstStyle/>
+              <a:t>Медленный,</a:t>
+            </a:r>
+            <a:endParaRPr lang="en-US" sz="1200" dirty="0"/>
+          </a:p>
           <a:p>
             <a:pPr indent="0" marL="0">
               <a:lnSpc>
-                <a:spcPct val="110000"/>
+                <a:spcPct val="108000"/>
               </a:lnSpc>
               <a:buNone/>
             </a:pPr>
             <a:r>
-              <a:rPr lang="en-US" sz="1050" dirty="0">
-                <a:solidFill>
-                  <a:srgbClr val="5B6B7A"/>
-                </a:solidFill>
-                <a:latin typeface="Calibri" pitchFamily="34" charset="0"/>
-                <a:ea typeface="Calibri" pitchFamily="34" charset="-122"/>
-                <a:cs typeface="Calibri" pitchFamily="34" charset="-120"/>
-              </a:rPr>
-              <a:t>Величие и спокойствие — город никуда не торопится</a:t>
-            </a:r>
-            <a:endParaRPr lang="en-US" sz="1050" dirty="0"/>
-          </a:p>
-        </p:txBody>
-      </p:sp>
-      <p:sp>
-        <p:nvSpPr>
-          <p:cNvPr id="12" name="Shape 10"/>
-          <p:cNvSpPr/>
-          <p:nvPr/>
-        </p:nvSpPr>
-        <p:spPr>
-          <a:xfrm>
-            <a:off x="4297680" y="2057400"/>
-            <a:ext cx="3429000" cy="1417320"/>
-          </a:xfrm>
-          <a:prstGeom prst="roundRect">
-            <a:avLst>
-              <a:gd name="adj" fmla="val 5161"/>
-            </a:avLst>
-          </a:prstGeom>
-          <a:solidFill>
-            <a:srgbClr val="EAF0F7"/>
-          </a:solidFill>
-          <a:ln/>
-        </p:spPr>
-      </p:sp>
-      <p:sp>
-        <p:nvSpPr>
-          <p:cNvPr id="13" name="Shape 11"/>
-          <p:cNvSpPr/>
-          <p:nvPr/>
-        </p:nvSpPr>
-        <p:spPr>
-          <a:xfrm>
-            <a:off x="4526280" y="2258568"/>
-            <a:ext cx="384048" cy="384048"/>
-          </a:xfrm>
-          <a:prstGeom prst="ellipse">
-            <a:avLst/>
-          </a:prstGeom>
-          <a:solidFill>
-            <a:srgbClr val="1B3A5C"/>
-          </a:solidFill>
-          <a:ln/>
-        </p:spPr>
-      </p:sp>
-      <p:sp>
-        <p:nvSpPr>
-          <p:cNvPr id="14" name="Text 12"/>
-          <p:cNvSpPr txBox="1"/>
-          <p:nvPr/>
-        </p:nvSpPr>
-        <p:spPr>
-          <a:xfrm>
-            <a:off x="4526280" y="2258568"/>
-            <a:ext cx="384048" cy="384048"/>
-          </a:xfrm>
-          <a:prstGeom prst="rect">
-            <a:avLst/>
-          </a:prstGeom>
-          <a:noFill/>
-          <a:ln/>
-        </p:spPr>
-        <p:txBody>
-          <a:bodyPr wrap="square" lIns="0" tIns="0" rIns="0" bIns="0" rtlCol="0" anchor="ctr"/>
-          <a:lstStyle/>
-          <a:p>
-            <a:pPr algn="ctr" indent="0" marL="0">
-              <a:buNone/>
-            </a:pPr>
-            <a:r>
-              <a:rPr lang="en-US" sz="1600" b="1" dirty="0">
-                <a:solidFill>
-                  <a:srgbClr val="FFFFFF"/>
+              <a:rPr lang="en-US" sz="1200" b="1" dirty="0">
+                <a:solidFill>
+                  <a:srgbClr val="10253C"/>
                 </a:solidFill>
                 <a:latin typeface="Cambria" pitchFamily="34" charset="0"/>
                 <a:ea typeface="Cambria" pitchFamily="34" charset="-122"/>
                 <a:cs typeface="Cambria" pitchFamily="34" charset="-120"/>
               </a:rPr>
-              <a:t>♪</a:t>
-            </a:r>
-            <a:endParaRPr lang="en-US" sz="1600" dirty="0"/>
-          </a:p>
-        </p:txBody>
-      </p:sp>
-      <p:sp>
-        <p:nvSpPr>
-          <p:cNvPr id="15" name="Text 13"/>
-          <p:cNvSpPr txBox="1"/>
-          <p:nvPr/>
-        </p:nvSpPr>
-        <p:spPr>
-          <a:xfrm>
-            <a:off x="4526280" y="2743200"/>
-            <a:ext cx="2971800" cy="365760"/>
-          </a:xfrm>
-          <a:prstGeom prst="rect">
-            <a:avLst/>
-          </a:prstGeom>
-          <a:noFill/>
-          <a:ln/>
-        </p:spPr>
-        <p:txBody>
-          <a:bodyPr wrap="square" lIns="0" tIns="0" rIns="0" bIns="0" rtlCol="0" anchor="ctr"/>
-          <a:lstStyle/>
-          <a:p>
-            <a:pPr indent="0" marL="0">
-              <a:buNone/>
-            </a:pPr>
-            <a:r>
-              <a:rPr lang="en-US" sz="1250" b="1" dirty="0">
-                <a:solidFill>
-                  <a:srgbClr val="10253C"/>
-                </a:solidFill>
-                <a:latin typeface="Cambria" pitchFamily="34" charset="0"/>
-                <a:ea typeface="Cambria" pitchFamily="34" charset="-122"/>
-                <a:cs typeface="Cambria" pitchFamily="34" charset="-120"/>
-              </a:rPr>
-              <a:t>Мощные духовые и медь</a:t>
-            </a:r>
-            <a:endParaRPr lang="en-US" sz="1250" dirty="0"/>
-          </a:p>
-        </p:txBody>
-      </p:sp>
-      <p:sp>
-        <p:nvSpPr>
-          <p:cNvPr id="16" name="Text 14"/>
-          <p:cNvSpPr txBox="1"/>
-          <p:nvPr/>
-        </p:nvSpPr>
-        <p:spPr>
-          <a:xfrm>
-            <a:off x="4526280" y="3063240"/>
-            <a:ext cx="2971800" cy="502920"/>
-          </a:xfrm>
-          <a:prstGeom prst="rect">
-            <a:avLst/>
-          </a:prstGeom>
-          <a:noFill/>
-          <a:ln/>
-        </p:spPr>
-        <p:txBody>
-          <a:bodyPr wrap="square" lIns="0" tIns="0" rIns="0" bIns="0" rtlCol="0" anchor="ctr"/>
-          <a:lstStyle/>
-          <a:p>
-            <a:pPr indent="0" marL="0">
-              <a:lnSpc>
-                <a:spcPct val="110000"/>
-              </a:lnSpc>
-              <a:buNone/>
-            </a:pPr>
-            <a:r>
-              <a:rPr lang="en-US" sz="1050" dirty="0">
-                <a:solidFill>
-                  <a:srgbClr val="5B6B7A"/>
-                </a:solidFill>
-                <a:latin typeface="Calibri" pitchFamily="34" charset="0"/>
-                <a:ea typeface="Calibri" pitchFamily="34" charset="-122"/>
-                <a:cs typeface="Calibri" pitchFamily="34" charset="-120"/>
-              </a:rPr>
-              <a:t>Гранит, камень, монументальная архитектура</a:t>
-            </a:r>
-            <a:endParaRPr lang="en-US" sz="1050" dirty="0"/>
-          </a:p>
-        </p:txBody>
-      </p:sp>
-      <p:sp>
-        <p:nvSpPr>
-          <p:cNvPr id="17" name="Shape 15"/>
-          <p:cNvSpPr/>
-          <p:nvPr/>
-        </p:nvSpPr>
-        <p:spPr>
-          <a:xfrm>
-            <a:off x="7955280" y="2057400"/>
-            <a:ext cx="3429000" cy="1417320"/>
-          </a:xfrm>
-          <a:prstGeom prst="roundRect">
-            <a:avLst>
-              <a:gd name="adj" fmla="val 5161"/>
-            </a:avLst>
-          </a:prstGeom>
-          <a:solidFill>
-            <a:srgbClr val="EAF0F7"/>
-          </a:solidFill>
-          <a:ln/>
-        </p:spPr>
-      </p:sp>
-      <p:sp>
-        <p:nvSpPr>
-          <p:cNvPr id="18" name="Shape 16"/>
-          <p:cNvSpPr/>
-          <p:nvPr/>
-        </p:nvSpPr>
-        <p:spPr>
-          <a:xfrm>
-            <a:off x="8183880" y="2258568"/>
-            <a:ext cx="384048" cy="384048"/>
-          </a:xfrm>
-          <a:prstGeom prst="ellipse">
-            <a:avLst/>
-          </a:prstGeom>
-          <a:solidFill>
-            <a:srgbClr val="1B3A5C"/>
-          </a:solidFill>
-          <a:ln/>
-        </p:spPr>
-      </p:sp>
-      <p:sp>
-        <p:nvSpPr>
-          <p:cNvPr id="19" name="Text 17"/>
-          <p:cNvSpPr txBox="1"/>
-          <p:nvPr/>
-        </p:nvSpPr>
-        <p:spPr>
-          <a:xfrm>
-            <a:off x="8183880" y="2258568"/>
-            <a:ext cx="384048" cy="384048"/>
-          </a:xfrm>
-          <a:prstGeom prst="rect">
-            <a:avLst/>
-          </a:prstGeom>
-          <a:noFill/>
-          <a:ln/>
-        </p:spPr>
-        <p:txBody>
-          <a:bodyPr wrap="square" lIns="0" tIns="0" rIns="0" bIns="0" rtlCol="0" anchor="ctr"/>
-          <a:lstStyle/>
-          <a:p>
-            <a:pPr algn="ctr" indent="0" marL="0">
-              <a:buNone/>
-            </a:pPr>
-            <a:r>
-              <a:rPr lang="en-US" sz="1600" b="1" dirty="0">
-                <a:solidFill>
-                  <a:srgbClr val="FFFFFF"/>
-                </a:solidFill>
-                <a:latin typeface="Cambria" pitchFamily="34" charset="0"/>
-                <a:ea typeface="Cambria" pitchFamily="34" charset="-122"/>
-                <a:cs typeface="Cambria" pitchFamily="34" charset="-120"/>
-              </a:rPr>
-              <a:t>♪</a:t>
-            </a:r>
-            <a:endParaRPr lang="en-US" sz="1600" dirty="0"/>
-          </a:p>
-        </p:txBody>
-      </p:sp>
-      <p:sp>
-        <p:nvSpPr>
-          <p:cNvPr id="20" name="Text 18"/>
-          <p:cNvSpPr txBox="1"/>
-          <p:nvPr/>
-        </p:nvSpPr>
-        <p:spPr>
-          <a:xfrm>
-            <a:off x="8183880" y="2743200"/>
-            <a:ext cx="2971800" cy="365760"/>
-          </a:xfrm>
-          <a:prstGeom prst="rect">
-            <a:avLst/>
-          </a:prstGeom>
-          <a:noFill/>
-          <a:ln/>
-        </p:spPr>
-        <p:txBody>
-          <a:bodyPr wrap="square" lIns="0" tIns="0" rIns="0" bIns="0" rtlCol="0" anchor="ctr"/>
-          <a:lstStyle/>
-          <a:p>
-            <a:pPr indent="0" marL="0">
-              <a:buNone/>
-            </a:pPr>
-            <a:r>
-              <a:rPr lang="en-US" sz="1250" b="1" dirty="0">
-                <a:solidFill>
-                  <a:srgbClr val="10253C"/>
-                </a:solidFill>
-                <a:latin typeface="Cambria" pitchFamily="34" charset="0"/>
-                <a:ea typeface="Cambria" pitchFamily="34" charset="-122"/>
-                <a:cs typeface="Cambria" pitchFamily="34" charset="-120"/>
-              </a:rPr>
-              <a:t>Торжественный, гимнический характер</a:t>
-            </a:r>
-            <a:endParaRPr lang="en-US" sz="1250" dirty="0"/>
-          </a:p>
-        </p:txBody>
-      </p:sp>
-      <p:sp>
-        <p:nvSpPr>
-          <p:cNvPr id="21" name="Text 19"/>
-          <p:cNvSpPr txBox="1"/>
-          <p:nvPr/>
-        </p:nvSpPr>
-        <p:spPr>
-          <a:xfrm>
-            <a:off x="8183880" y="3063240"/>
-            <a:ext cx="2971800" cy="502920"/>
-          </a:xfrm>
-          <a:prstGeom prst="rect">
-            <a:avLst/>
-          </a:prstGeom>
-          <a:noFill/>
-          <a:ln/>
-        </p:spPr>
-        <p:txBody>
-          <a:bodyPr wrap="square" lIns="0" tIns="0" rIns="0" bIns="0" rtlCol="0" anchor="ctr"/>
-          <a:lstStyle/>
-          <a:p>
-            <a:pPr indent="0" marL="0">
-              <a:lnSpc>
-                <a:spcPct val="110000"/>
-              </a:lnSpc>
-              <a:buNone/>
-            </a:pPr>
-            <a:r>
-              <a:rPr lang="en-US" sz="1050" dirty="0">
-                <a:solidFill>
-                  <a:srgbClr val="5B6B7A"/>
-                </a:solidFill>
-                <a:latin typeface="Calibri" pitchFamily="34" charset="0"/>
-                <a:ea typeface="Calibri" pitchFamily="34" charset="-122"/>
-                <a:cs typeface="Calibri" pitchFamily="34" charset="-120"/>
-              </a:rPr>
-              <a:t>Праздник и гордость, парадный облик города</a:t>
-            </a:r>
-            <a:endParaRPr lang="en-US" sz="1050" dirty="0"/>
-          </a:p>
-        </p:txBody>
-      </p:sp>
-      <p:sp>
-        <p:nvSpPr>
-          <p:cNvPr id="22" name="Shape 20"/>
-          <p:cNvSpPr/>
-          <p:nvPr/>
-        </p:nvSpPr>
-        <p:spPr>
-          <a:xfrm>
-            <a:off x="640080" y="3703320"/>
-            <a:ext cx="3429000" cy="1417320"/>
-          </a:xfrm>
-          <a:prstGeom prst="roundRect">
-            <a:avLst>
-              <a:gd name="adj" fmla="val 5161"/>
-            </a:avLst>
-          </a:prstGeom>
-          <a:solidFill>
-            <a:srgbClr val="EAF0F7"/>
-          </a:solidFill>
-          <a:ln/>
-        </p:spPr>
-      </p:sp>
-      <p:sp>
-        <p:nvSpPr>
-          <p:cNvPr id="23" name="Shape 21"/>
-          <p:cNvSpPr/>
-          <p:nvPr/>
-        </p:nvSpPr>
-        <p:spPr>
-          <a:xfrm>
-            <a:off x="868680" y="3904488"/>
-            <a:ext cx="384048" cy="384048"/>
-          </a:xfrm>
-          <a:prstGeom prst="ellipse">
-            <a:avLst/>
-          </a:prstGeom>
-          <a:solidFill>
-            <a:srgbClr val="1B3A5C"/>
-          </a:solidFill>
-          <a:ln/>
-        </p:spPr>
-      </p:sp>
-      <p:sp>
-        <p:nvSpPr>
-          <p:cNvPr id="24" name="Text 22"/>
-          <p:cNvSpPr txBox="1"/>
-          <p:nvPr/>
-        </p:nvSpPr>
-        <p:spPr>
-          <a:xfrm>
-            <a:off x="868680" y="3904488"/>
-            <a:ext cx="384048" cy="384048"/>
-          </a:xfrm>
-          <a:prstGeom prst="rect">
-            <a:avLst/>
-          </a:prstGeom>
-          <a:noFill/>
-          <a:ln/>
-        </p:spPr>
-        <p:txBody>
-          <a:bodyPr wrap="square" lIns="0" tIns="0" rIns="0" bIns="0" rtlCol="0" anchor="ctr"/>
-          <a:lstStyle/>
-          <a:p>
-            <a:pPr algn="ctr" indent="0" marL="0">
-              <a:buNone/>
-            </a:pPr>
-            <a:r>
-              <a:rPr lang="en-US" sz="1600" b="1" dirty="0">
-                <a:solidFill>
-                  <a:srgbClr val="FFFFFF"/>
-                </a:solidFill>
-                <a:latin typeface="Cambria" pitchFamily="34" charset="0"/>
-                <a:ea typeface="Cambria" pitchFamily="34" charset="-122"/>
-                <a:cs typeface="Cambria" pitchFamily="34" charset="-120"/>
-              </a:rPr>
-              <a:t>♪</a:t>
-            </a:r>
-            <a:endParaRPr lang="en-US" sz="1600" dirty="0"/>
-          </a:p>
-        </p:txBody>
-      </p:sp>
-      <p:sp>
-        <p:nvSpPr>
-          <p:cNvPr id="25" name="Text 23"/>
-          <p:cNvSpPr txBox="1"/>
-          <p:nvPr/>
-        </p:nvSpPr>
-        <p:spPr>
-          <a:xfrm>
-            <a:off x="868680" y="4389120"/>
-            <a:ext cx="2971800" cy="365760"/>
-          </a:xfrm>
-          <a:prstGeom prst="rect">
-            <a:avLst/>
-          </a:prstGeom>
-          <a:noFill/>
-          <a:ln/>
-        </p:spPr>
-        <p:txBody>
-          <a:bodyPr wrap="square" lIns="0" tIns="0" rIns="0" bIns="0" rtlCol="0" anchor="ctr"/>
-          <a:lstStyle/>
-          <a:p>
-            <a:pPr indent="0" marL="0">
-              <a:buNone/>
-            </a:pPr>
-            <a:r>
-              <a:rPr lang="en-US" sz="1250" b="1" dirty="0">
-                <a:solidFill>
-                  <a:srgbClr val="10253C"/>
-                </a:solidFill>
-                <a:latin typeface="Cambria" pitchFamily="34" charset="0"/>
-                <a:ea typeface="Cambria" pitchFamily="34" charset="-122"/>
-                <a:cs typeface="Cambria" pitchFamily="34" charset="-120"/>
-              </a:rPr>
-              <a:t>Плавные, широкие фразы</a:t>
-            </a:r>
-            <a:endParaRPr lang="en-US" sz="1250" dirty="0"/>
-          </a:p>
-        </p:txBody>
-      </p:sp>
-      <p:sp>
-        <p:nvSpPr>
-          <p:cNvPr id="26" name="Text 24"/>
-          <p:cNvSpPr txBox="1"/>
-          <p:nvPr/>
-        </p:nvSpPr>
-        <p:spPr>
-          <a:xfrm>
-            <a:off x="868680" y="4709160"/>
-            <a:ext cx="2971800" cy="502920"/>
-          </a:xfrm>
-          <a:prstGeom prst="rect">
-            <a:avLst/>
-          </a:prstGeom>
-          <a:noFill/>
-          <a:ln/>
-        </p:spPr>
-        <p:txBody>
-          <a:bodyPr wrap="square" lIns="0" tIns="0" rIns="0" bIns="0" rtlCol="0" anchor="ctr"/>
-          <a:lstStyle/>
-          <a:p>
-            <a:pPr indent="0" marL="0">
-              <a:lnSpc>
-                <a:spcPct val="110000"/>
-              </a:lnSpc>
-              <a:buNone/>
-            </a:pPr>
-            <a:r>
-              <a:rPr lang="en-US" sz="1050" dirty="0">
-                <a:solidFill>
-                  <a:srgbClr val="5B6B7A"/>
-                </a:solidFill>
-                <a:latin typeface="Calibri" pitchFamily="34" charset="0"/>
-                <a:ea typeface="Calibri" pitchFamily="34" charset="-122"/>
-                <a:cs typeface="Calibri" pitchFamily="34" charset="-120"/>
-              </a:rPr>
-              <a:t>Нева, простор, открытые панорамы</a:t>
-            </a:r>
-            <a:endParaRPr lang="en-US" sz="1050" dirty="0"/>
-          </a:p>
-        </p:txBody>
-      </p:sp>
-      <p:sp>
-        <p:nvSpPr>
-          <p:cNvPr id="27" name="Shape 25"/>
-          <p:cNvSpPr/>
-          <p:nvPr/>
-        </p:nvSpPr>
-        <p:spPr>
-          <a:xfrm>
-            <a:off x="4297680" y="3703320"/>
-            <a:ext cx="3429000" cy="1417320"/>
-          </a:xfrm>
-          <a:prstGeom prst="roundRect">
-            <a:avLst>
-              <a:gd name="adj" fmla="val 5161"/>
-            </a:avLst>
-          </a:prstGeom>
-          <a:solidFill>
-            <a:srgbClr val="EAF0F7"/>
-          </a:solidFill>
-          <a:ln/>
-        </p:spPr>
-      </p:sp>
-      <p:sp>
-        <p:nvSpPr>
-          <p:cNvPr id="28" name="Shape 26"/>
-          <p:cNvSpPr/>
-          <p:nvPr/>
-        </p:nvSpPr>
-        <p:spPr>
-          <a:xfrm>
-            <a:off x="4526280" y="3904488"/>
-            <a:ext cx="384048" cy="384048"/>
-          </a:xfrm>
-          <a:prstGeom prst="ellipse">
-            <a:avLst/>
-          </a:prstGeom>
-          <a:solidFill>
-            <a:srgbClr val="1B3A5C"/>
-          </a:solidFill>
-          <a:ln/>
-        </p:spPr>
-      </p:sp>
-      <p:sp>
-        <p:nvSpPr>
-          <p:cNvPr id="29" name="Text 27"/>
-          <p:cNvSpPr txBox="1"/>
-          <p:nvPr/>
-        </p:nvSpPr>
-        <p:spPr>
-          <a:xfrm>
-            <a:off x="4526280" y="3904488"/>
-            <a:ext cx="384048" cy="384048"/>
-          </a:xfrm>
-          <a:prstGeom prst="rect">
-            <a:avLst/>
-          </a:prstGeom>
-          <a:noFill/>
-          <a:ln/>
-        </p:spPr>
-        <p:txBody>
-          <a:bodyPr wrap="square" lIns="0" tIns="0" rIns="0" bIns="0" rtlCol="0" anchor="ctr"/>
-          <a:lstStyle/>
-          <a:p>
-            <a:pPr algn="ctr" indent="0" marL="0">
-              <a:buNone/>
-            </a:pPr>
-            <a:r>
-              <a:rPr lang="en-US" sz="1600" b="1" dirty="0">
-                <a:solidFill>
-                  <a:srgbClr val="FFFFFF"/>
-                </a:solidFill>
-                <a:latin typeface="Cambria" pitchFamily="34" charset="0"/>
-                <a:ea typeface="Cambria" pitchFamily="34" charset="-122"/>
-                <a:cs typeface="Cambria" pitchFamily="34" charset="-120"/>
-              </a:rPr>
-              <a:t>♪</a:t>
-            </a:r>
-            <a:endParaRPr lang="en-US" sz="1600" dirty="0"/>
-          </a:p>
-        </p:txBody>
-      </p:sp>
-      <p:sp>
-        <p:nvSpPr>
-          <p:cNvPr id="30" name="Text 28"/>
-          <p:cNvSpPr txBox="1"/>
-          <p:nvPr/>
-        </p:nvSpPr>
-        <p:spPr>
-          <a:xfrm>
-            <a:off x="4526280" y="4389120"/>
-            <a:ext cx="2971800" cy="365760"/>
-          </a:xfrm>
-          <a:prstGeom prst="rect">
-            <a:avLst/>
-          </a:prstGeom>
-          <a:noFill/>
-          <a:ln/>
-        </p:spPr>
-        <p:txBody>
-          <a:bodyPr wrap="square" lIns="0" tIns="0" rIns="0" bIns="0" rtlCol="0" anchor="ctr"/>
-          <a:lstStyle/>
-          <a:p>
-            <a:pPr indent="0" marL="0">
-              <a:buNone/>
-            </a:pPr>
-            <a:r>
-              <a:rPr lang="en-US" sz="1250" b="1" dirty="0">
-                <a:solidFill>
-                  <a:srgbClr val="10253C"/>
-                </a:solidFill>
-                <a:latin typeface="Cambria" pitchFamily="34" charset="0"/>
-                <a:ea typeface="Cambria" pitchFamily="34" charset="-122"/>
-                <a:cs typeface="Cambria" pitchFamily="34" charset="-120"/>
-              </a:rPr>
-              <a:t>Минорные оттенки</a:t>
-            </a:r>
-            <a:endParaRPr lang="en-US" sz="1250" dirty="0"/>
-          </a:p>
-        </p:txBody>
-      </p:sp>
-      <p:sp>
-        <p:nvSpPr>
-          <p:cNvPr id="31" name="Text 29"/>
-          <p:cNvSpPr txBox="1"/>
-          <p:nvPr/>
-        </p:nvSpPr>
-        <p:spPr>
-          <a:xfrm>
-            <a:off x="4526280" y="4709160"/>
-            <a:ext cx="2971800" cy="502920"/>
-          </a:xfrm>
-          <a:prstGeom prst="rect">
-            <a:avLst/>
-          </a:prstGeom>
-          <a:noFill/>
-          <a:ln/>
-        </p:spPr>
-        <p:txBody>
-          <a:bodyPr wrap="square" lIns="0" tIns="0" rIns="0" bIns="0" rtlCol="0" anchor="ctr"/>
-          <a:lstStyle/>
-          <a:p>
-            <a:pPr indent="0" marL="0">
-              <a:lnSpc>
-                <a:spcPct val="110000"/>
-              </a:lnSpc>
-              <a:buNone/>
-            </a:pPr>
-            <a:r>
-              <a:rPr lang="en-US" sz="1050" dirty="0">
-                <a:solidFill>
-                  <a:srgbClr val="5B6B7A"/>
-                </a:solidFill>
-                <a:latin typeface="Calibri" pitchFamily="34" charset="0"/>
-                <a:ea typeface="Calibri" pitchFamily="34" charset="-122"/>
-                <a:cs typeface="Calibri" pitchFamily="34" charset="-120"/>
-              </a:rPr>
-              <a:t>Строгость и память о пережитом — прежде всего о блокаде</a:t>
-            </a:r>
-            <a:endParaRPr lang="en-US" sz="1050" dirty="0"/>
-          </a:p>
-        </p:txBody>
-      </p:sp>
-      <p:sp>
-        <p:nvSpPr>
-          <p:cNvPr id="32" name="Shape 30"/>
-          <p:cNvSpPr/>
-          <p:nvPr/>
-        </p:nvSpPr>
-        <p:spPr>
-          <a:xfrm>
-            <a:off x="7955280" y="3703320"/>
-            <a:ext cx="3429000" cy="1417320"/>
-          </a:xfrm>
-          <a:prstGeom prst="roundRect">
-            <a:avLst>
-              <a:gd name="adj" fmla="val 5161"/>
-            </a:avLst>
-          </a:prstGeom>
-          <a:solidFill>
-            <a:srgbClr val="10253C"/>
-          </a:solidFill>
-          <a:ln/>
-        </p:spPr>
-      </p:sp>
-      <p:sp>
-        <p:nvSpPr>
-          <p:cNvPr id="33" name="Text 31"/>
-          <p:cNvSpPr txBox="1"/>
-          <p:nvPr/>
-        </p:nvSpPr>
-        <p:spPr>
-          <a:xfrm>
-            <a:off x="8183880" y="3867912"/>
-            <a:ext cx="2971800" cy="1088136"/>
+              <a:t>широкий темп</a:t>
+            </a:r>
+            <a:endParaRPr lang="en-US" sz="1200" dirty="0"/>
+          </a:p>
+        </p:txBody>
+      </p:sp>
+      <p:sp>
+        <p:nvSpPr>
+          <p:cNvPr id="11" name="Text 9"/>
+          <p:cNvSpPr txBox="1"/>
+          <p:nvPr/>
+        </p:nvSpPr>
+        <p:spPr>
+          <a:xfrm>
+            <a:off x="841248" y="3218688"/>
+            <a:ext cx="3026664" cy="438912"/>
           </a:xfrm>
           <a:prstGeom prst="rect">
             <a:avLst/>
@@ -4614,19 +3925,183 @@
               <a:buNone/>
             </a:pPr>
             <a:r>
-              <a:rPr lang="en-US" sz="1250" b="1" dirty="0">
-                <a:solidFill>
-                  <a:srgbClr val="C99A3E"/>
+              <a:rPr lang="en-US" sz="1000" dirty="0">
+                <a:solidFill>
+                  <a:srgbClr val="5B6B7A"/>
                 </a:solidFill>
                 <a:latin typeface="Calibri" pitchFamily="34" charset="0"/>
                 <a:ea typeface="Calibri" pitchFamily="34" charset="-122"/>
                 <a:cs typeface="Calibri" pitchFamily="34" charset="-120"/>
               </a:rPr>
-              <a:t>«Медный всадник»
-</a:t>
-            </a:r>
-            <a:endParaRPr lang="en-US" sz="1250" dirty="0"/>
-          </a:p>
+              <a:t>Величие и спокойствие — город никуда не торопится</a:t>
+            </a:r>
+            <a:endParaRPr lang="en-US" sz="1000" dirty="0"/>
+          </a:p>
+        </p:txBody>
+      </p:sp>
+      <p:sp>
+        <p:nvSpPr>
+          <p:cNvPr id="12" name="Shape 10"/>
+          <p:cNvSpPr/>
+          <p:nvPr/>
+        </p:nvSpPr>
+        <p:spPr>
+          <a:xfrm>
+            <a:off x="4297680" y="2011680"/>
+            <a:ext cx="3429000" cy="1691640"/>
+          </a:xfrm>
+          <a:prstGeom prst="roundRect">
+            <a:avLst>
+              <a:gd name="adj" fmla="val 4324"/>
+            </a:avLst>
+          </a:prstGeom>
+          <a:solidFill>
+            <a:srgbClr val="EAF0F7"/>
+          </a:solidFill>
+          <a:ln/>
+        </p:spPr>
+      </p:sp>
+      <p:sp>
+        <p:nvSpPr>
+          <p:cNvPr id="13" name="Shape 11"/>
+          <p:cNvSpPr/>
+          <p:nvPr/>
+        </p:nvSpPr>
+        <p:spPr>
+          <a:xfrm>
+            <a:off x="4498848" y="2194560"/>
+            <a:ext cx="365760" cy="365760"/>
+          </a:xfrm>
+          <a:prstGeom prst="ellipse">
+            <a:avLst/>
+          </a:prstGeom>
+          <a:solidFill>
+            <a:srgbClr val="1B3A5C"/>
+          </a:solidFill>
+          <a:ln/>
+        </p:spPr>
+      </p:sp>
+      <p:sp>
+        <p:nvSpPr>
+          <p:cNvPr id="14" name="Text 12"/>
+          <p:cNvSpPr txBox="1"/>
+          <p:nvPr/>
+        </p:nvSpPr>
+        <p:spPr>
+          <a:xfrm>
+            <a:off x="4498848" y="2194560"/>
+            <a:ext cx="365760" cy="365760"/>
+          </a:xfrm>
+          <a:prstGeom prst="rect">
+            <a:avLst/>
+          </a:prstGeom>
+          <a:noFill/>
+          <a:ln/>
+        </p:spPr>
+        <p:txBody>
+          <a:bodyPr wrap="square" lIns="0" tIns="0" rIns="0" bIns="0" rtlCol="0" anchor="ctr"/>
+          <a:lstStyle/>
+          <a:p>
+            <a:pPr algn="ctr" indent="0" marL="0">
+              <a:buNone/>
+            </a:pPr>
+            <a:r>
+              <a:rPr lang="en-US" sz="1500" b="1" dirty="0">
+                <a:solidFill>
+                  <a:srgbClr val="FFFFFF"/>
+                </a:solidFill>
+                <a:latin typeface="Cambria" pitchFamily="34" charset="0"/>
+                <a:ea typeface="Cambria" pitchFamily="34" charset="-122"/>
+                <a:cs typeface="Cambria" pitchFamily="34" charset="-120"/>
+              </a:rPr>
+              <a:t>♪</a:t>
+            </a:r>
+            <a:endParaRPr lang="en-US" sz="1500" dirty="0"/>
+          </a:p>
+        </p:txBody>
+      </p:sp>
+      <p:sp>
+        <p:nvSpPr>
+          <p:cNvPr id="15" name="Text 13"/>
+          <p:cNvSpPr txBox="1"/>
+          <p:nvPr/>
+        </p:nvSpPr>
+        <p:spPr>
+          <a:xfrm>
+            <a:off x="4498848" y="2615184"/>
+            <a:ext cx="3026664" cy="566928"/>
+          </a:xfrm>
+          <a:prstGeom prst="rect">
+            <a:avLst/>
+          </a:prstGeom>
+          <a:noFill/>
+          <a:ln/>
+        </p:spPr>
+        <p:txBody>
+          <a:bodyPr wrap="square" lIns="0" tIns="0" rIns="0" bIns="0" rtlCol="0" anchor="ctr"/>
+          <a:lstStyle/>
+          <a:p>
+            <a:pPr indent="0" marL="0">
+              <a:lnSpc>
+                <a:spcPct val="108000"/>
+              </a:lnSpc>
+              <a:buNone/>
+            </a:pPr>
+            <a:r>
+              <a:rPr lang="en-US" sz="1200" b="1" dirty="0">
+                <a:solidFill>
+                  <a:srgbClr val="10253C"/>
+                </a:solidFill>
+                <a:latin typeface="Cambria" pitchFamily="34" charset="0"/>
+                <a:ea typeface="Cambria" pitchFamily="34" charset="-122"/>
+                <a:cs typeface="Cambria" pitchFamily="34" charset="-120"/>
+              </a:rPr>
+              <a:t>Мощные духовые</a:t>
+            </a:r>
+            <a:endParaRPr lang="en-US" sz="1200" dirty="0"/>
+          </a:p>
+          <a:p>
+            <a:pPr indent="0" marL="0">
+              <a:lnSpc>
+                <a:spcPct val="108000"/>
+              </a:lnSpc>
+              <a:buNone/>
+            </a:pPr>
+            <a:r>
+              <a:rPr lang="en-US" sz="1200" b="1" dirty="0">
+                <a:solidFill>
+                  <a:srgbClr val="10253C"/>
+                </a:solidFill>
+                <a:latin typeface="Cambria" pitchFamily="34" charset="0"/>
+                <a:ea typeface="Cambria" pitchFamily="34" charset="-122"/>
+                <a:cs typeface="Cambria" pitchFamily="34" charset="-120"/>
+              </a:rPr>
+              <a:t>и медь</a:t>
+            </a:r>
+            <a:endParaRPr lang="en-US" sz="1200" dirty="0"/>
+          </a:p>
+        </p:txBody>
+      </p:sp>
+      <p:sp>
+        <p:nvSpPr>
+          <p:cNvPr id="16" name="Text 14"/>
+          <p:cNvSpPr txBox="1"/>
+          <p:nvPr/>
+        </p:nvSpPr>
+        <p:spPr>
+          <a:xfrm>
+            <a:off x="4498848" y="3218688"/>
+            <a:ext cx="3026664" cy="438912"/>
+          </a:xfrm>
+          <a:prstGeom prst="rect">
+            <a:avLst/>
+          </a:prstGeom>
+          <a:noFill/>
+          <a:ln/>
+        </p:spPr>
+        <p:txBody>
+          <a:bodyPr wrap="square" lIns="0" tIns="0" rIns="0" bIns="0" rtlCol="0" anchor="ctr"/>
+          <a:lstStyle/>
           <a:p>
             <a:pPr indent="0" marL="0">
               <a:lnSpc>
@@ -4635,17 +4110,657 @@
               <a:buNone/>
             </a:pPr>
             <a:r>
-              <a:rPr lang="en-US" sz="1050" dirty="0">
-                <a:solidFill>
-                  <a:srgbClr val="EAF0F7"/>
+              <a:rPr lang="en-US" sz="1000" dirty="0">
+                <a:solidFill>
+                  <a:srgbClr val="5B6B7A"/>
                 </a:solidFill>
                 <a:latin typeface="Calibri" pitchFamily="34" charset="0"/>
                 <a:ea typeface="Calibri" pitchFamily="34" charset="-122"/>
                 <a:cs typeface="Calibri" pitchFamily="34" charset="-120"/>
               </a:rPr>
+              <a:t>Гранит, камень, монументальная архитектура</a:t>
+            </a:r>
+            <a:endParaRPr lang="en-US" sz="1000" dirty="0"/>
+          </a:p>
+        </p:txBody>
+      </p:sp>
+      <p:sp>
+        <p:nvSpPr>
+          <p:cNvPr id="17" name="Shape 15"/>
+          <p:cNvSpPr/>
+          <p:nvPr/>
+        </p:nvSpPr>
+        <p:spPr>
+          <a:xfrm>
+            <a:off x="7955280" y="2011680"/>
+            <a:ext cx="3429000" cy="1691640"/>
+          </a:xfrm>
+          <a:prstGeom prst="roundRect">
+            <a:avLst>
+              <a:gd name="adj" fmla="val 4324"/>
+            </a:avLst>
+          </a:prstGeom>
+          <a:solidFill>
+            <a:srgbClr val="EAF0F7"/>
+          </a:solidFill>
+          <a:ln/>
+        </p:spPr>
+      </p:sp>
+      <p:sp>
+        <p:nvSpPr>
+          <p:cNvPr id="18" name="Shape 16"/>
+          <p:cNvSpPr/>
+          <p:nvPr/>
+        </p:nvSpPr>
+        <p:spPr>
+          <a:xfrm>
+            <a:off x="8156448" y="2194560"/>
+            <a:ext cx="365760" cy="365760"/>
+          </a:xfrm>
+          <a:prstGeom prst="ellipse">
+            <a:avLst/>
+          </a:prstGeom>
+          <a:solidFill>
+            <a:srgbClr val="1B3A5C"/>
+          </a:solidFill>
+          <a:ln/>
+        </p:spPr>
+      </p:sp>
+      <p:sp>
+        <p:nvSpPr>
+          <p:cNvPr id="19" name="Text 17"/>
+          <p:cNvSpPr txBox="1"/>
+          <p:nvPr/>
+        </p:nvSpPr>
+        <p:spPr>
+          <a:xfrm>
+            <a:off x="8156448" y="2194560"/>
+            <a:ext cx="365760" cy="365760"/>
+          </a:xfrm>
+          <a:prstGeom prst="rect">
+            <a:avLst/>
+          </a:prstGeom>
+          <a:noFill/>
+          <a:ln/>
+        </p:spPr>
+        <p:txBody>
+          <a:bodyPr wrap="square" lIns="0" tIns="0" rIns="0" bIns="0" rtlCol="0" anchor="ctr"/>
+          <a:lstStyle/>
+          <a:p>
+            <a:pPr algn="ctr" indent="0" marL="0">
+              <a:buNone/>
+            </a:pPr>
+            <a:r>
+              <a:rPr lang="en-US" sz="1500" b="1" dirty="0">
+                <a:solidFill>
+                  <a:srgbClr val="FFFFFF"/>
+                </a:solidFill>
+                <a:latin typeface="Cambria" pitchFamily="34" charset="0"/>
+                <a:ea typeface="Cambria" pitchFamily="34" charset="-122"/>
+                <a:cs typeface="Cambria" pitchFamily="34" charset="-120"/>
+              </a:rPr>
+              <a:t>♪</a:t>
+            </a:r>
+            <a:endParaRPr lang="en-US" sz="1500" dirty="0"/>
+          </a:p>
+        </p:txBody>
+      </p:sp>
+      <p:sp>
+        <p:nvSpPr>
+          <p:cNvPr id="20" name="Text 18"/>
+          <p:cNvSpPr txBox="1"/>
+          <p:nvPr/>
+        </p:nvSpPr>
+        <p:spPr>
+          <a:xfrm>
+            <a:off x="8156448" y="2615184"/>
+            <a:ext cx="3026664" cy="566928"/>
+          </a:xfrm>
+          <a:prstGeom prst="rect">
+            <a:avLst/>
+          </a:prstGeom>
+          <a:noFill/>
+          <a:ln/>
+        </p:spPr>
+        <p:txBody>
+          <a:bodyPr wrap="square" lIns="0" tIns="0" rIns="0" bIns="0" rtlCol="0" anchor="ctr"/>
+          <a:lstStyle/>
+          <a:p>
+            <a:pPr indent="0" marL="0">
+              <a:lnSpc>
+                <a:spcPct val="108000"/>
+              </a:lnSpc>
+              <a:buNone/>
+            </a:pPr>
+            <a:r>
+              <a:rPr lang="en-US" sz="1200" b="1" dirty="0">
+                <a:solidFill>
+                  <a:srgbClr val="10253C"/>
+                </a:solidFill>
+                <a:latin typeface="Cambria" pitchFamily="34" charset="0"/>
+                <a:ea typeface="Cambria" pitchFamily="34" charset="-122"/>
+                <a:cs typeface="Cambria" pitchFamily="34" charset="-120"/>
+              </a:rPr>
+              <a:t>Торжественный,</a:t>
+            </a:r>
+            <a:endParaRPr lang="en-US" sz="1200" dirty="0"/>
+          </a:p>
+          <a:p>
+            <a:pPr indent="0" marL="0">
+              <a:lnSpc>
+                <a:spcPct val="108000"/>
+              </a:lnSpc>
+              <a:buNone/>
+            </a:pPr>
+            <a:r>
+              <a:rPr lang="en-US" sz="1200" b="1" dirty="0">
+                <a:solidFill>
+                  <a:srgbClr val="10253C"/>
+                </a:solidFill>
+                <a:latin typeface="Cambria" pitchFamily="34" charset="0"/>
+                <a:ea typeface="Cambria" pitchFamily="34" charset="-122"/>
+                <a:cs typeface="Cambria" pitchFamily="34" charset="-120"/>
+              </a:rPr>
+              <a:t>гимнический характер</a:t>
+            </a:r>
+            <a:endParaRPr lang="en-US" sz="1200" dirty="0"/>
+          </a:p>
+        </p:txBody>
+      </p:sp>
+      <p:sp>
+        <p:nvSpPr>
+          <p:cNvPr id="21" name="Text 19"/>
+          <p:cNvSpPr txBox="1"/>
+          <p:nvPr/>
+        </p:nvSpPr>
+        <p:spPr>
+          <a:xfrm>
+            <a:off x="8156448" y="3218688"/>
+            <a:ext cx="3026664" cy="438912"/>
+          </a:xfrm>
+          <a:prstGeom prst="rect">
+            <a:avLst/>
+          </a:prstGeom>
+          <a:noFill/>
+          <a:ln/>
+        </p:spPr>
+        <p:txBody>
+          <a:bodyPr wrap="square" lIns="0" tIns="0" rIns="0" bIns="0" rtlCol="0" anchor="ctr"/>
+          <a:lstStyle/>
+          <a:p>
+            <a:pPr indent="0" marL="0">
+              <a:lnSpc>
+                <a:spcPct val="115000"/>
+              </a:lnSpc>
+              <a:buNone/>
+            </a:pPr>
+            <a:r>
+              <a:rPr lang="en-US" sz="1000" dirty="0">
+                <a:solidFill>
+                  <a:srgbClr val="5B6B7A"/>
+                </a:solidFill>
+                <a:latin typeface="Calibri" pitchFamily="34" charset="0"/>
+                <a:ea typeface="Calibri" pitchFamily="34" charset="-122"/>
+                <a:cs typeface="Calibri" pitchFamily="34" charset="-120"/>
+              </a:rPr>
+              <a:t>Праздник и гордость, парадный облик города</a:t>
+            </a:r>
+            <a:endParaRPr lang="en-US" sz="1000" dirty="0"/>
+          </a:p>
+        </p:txBody>
+      </p:sp>
+      <p:sp>
+        <p:nvSpPr>
+          <p:cNvPr id="22" name="Shape 20"/>
+          <p:cNvSpPr/>
+          <p:nvPr/>
+        </p:nvSpPr>
+        <p:spPr>
+          <a:xfrm>
+            <a:off x="640080" y="3886200"/>
+            <a:ext cx="3429000" cy="1691640"/>
+          </a:xfrm>
+          <a:prstGeom prst="roundRect">
+            <a:avLst>
+              <a:gd name="adj" fmla="val 4324"/>
+            </a:avLst>
+          </a:prstGeom>
+          <a:solidFill>
+            <a:srgbClr val="EAF0F7"/>
+          </a:solidFill>
+          <a:ln/>
+        </p:spPr>
+      </p:sp>
+      <p:sp>
+        <p:nvSpPr>
+          <p:cNvPr id="23" name="Shape 21"/>
+          <p:cNvSpPr/>
+          <p:nvPr/>
+        </p:nvSpPr>
+        <p:spPr>
+          <a:xfrm>
+            <a:off x="841248" y="4069080"/>
+            <a:ext cx="365760" cy="365760"/>
+          </a:xfrm>
+          <a:prstGeom prst="ellipse">
+            <a:avLst/>
+          </a:prstGeom>
+          <a:solidFill>
+            <a:srgbClr val="1B3A5C"/>
+          </a:solidFill>
+          <a:ln/>
+        </p:spPr>
+      </p:sp>
+      <p:sp>
+        <p:nvSpPr>
+          <p:cNvPr id="24" name="Text 22"/>
+          <p:cNvSpPr txBox="1"/>
+          <p:nvPr/>
+        </p:nvSpPr>
+        <p:spPr>
+          <a:xfrm>
+            <a:off x="841248" y="4069080"/>
+            <a:ext cx="365760" cy="365760"/>
+          </a:xfrm>
+          <a:prstGeom prst="rect">
+            <a:avLst/>
+          </a:prstGeom>
+          <a:noFill/>
+          <a:ln/>
+        </p:spPr>
+        <p:txBody>
+          <a:bodyPr wrap="square" lIns="0" tIns="0" rIns="0" bIns="0" rtlCol="0" anchor="ctr"/>
+          <a:lstStyle/>
+          <a:p>
+            <a:pPr algn="ctr" indent="0" marL="0">
+              <a:buNone/>
+            </a:pPr>
+            <a:r>
+              <a:rPr lang="en-US" sz="1500" b="1" dirty="0">
+                <a:solidFill>
+                  <a:srgbClr val="FFFFFF"/>
+                </a:solidFill>
+                <a:latin typeface="Cambria" pitchFamily="34" charset="0"/>
+                <a:ea typeface="Cambria" pitchFamily="34" charset="-122"/>
+                <a:cs typeface="Cambria" pitchFamily="34" charset="-120"/>
+              </a:rPr>
+              <a:t>♪</a:t>
+            </a:r>
+            <a:endParaRPr lang="en-US" sz="1500" dirty="0"/>
+          </a:p>
+        </p:txBody>
+      </p:sp>
+      <p:sp>
+        <p:nvSpPr>
+          <p:cNvPr id="25" name="Text 23"/>
+          <p:cNvSpPr txBox="1"/>
+          <p:nvPr/>
+        </p:nvSpPr>
+        <p:spPr>
+          <a:xfrm>
+            <a:off x="841248" y="4489704"/>
+            <a:ext cx="3026664" cy="566928"/>
+          </a:xfrm>
+          <a:prstGeom prst="rect">
+            <a:avLst/>
+          </a:prstGeom>
+          <a:noFill/>
+          <a:ln/>
+        </p:spPr>
+        <p:txBody>
+          <a:bodyPr wrap="square" lIns="0" tIns="0" rIns="0" bIns="0" rtlCol="0" anchor="ctr"/>
+          <a:lstStyle/>
+          <a:p>
+            <a:pPr indent="0" marL="0">
+              <a:lnSpc>
+                <a:spcPct val="108000"/>
+              </a:lnSpc>
+              <a:buNone/>
+            </a:pPr>
+            <a:r>
+              <a:rPr lang="en-US" sz="1200" b="1" dirty="0">
+                <a:solidFill>
+                  <a:srgbClr val="10253C"/>
+                </a:solidFill>
+                <a:latin typeface="Cambria" pitchFamily="34" charset="0"/>
+                <a:ea typeface="Cambria" pitchFamily="34" charset="-122"/>
+                <a:cs typeface="Cambria" pitchFamily="34" charset="-120"/>
+              </a:rPr>
+              <a:t>Плавные,</a:t>
+            </a:r>
+            <a:endParaRPr lang="en-US" sz="1200" dirty="0"/>
+          </a:p>
+          <a:p>
+            <a:pPr indent="0" marL="0">
+              <a:lnSpc>
+                <a:spcPct val="108000"/>
+              </a:lnSpc>
+              <a:buNone/>
+            </a:pPr>
+            <a:r>
+              <a:rPr lang="en-US" sz="1200" b="1" dirty="0">
+                <a:solidFill>
+                  <a:srgbClr val="10253C"/>
+                </a:solidFill>
+                <a:latin typeface="Cambria" pitchFamily="34" charset="0"/>
+                <a:ea typeface="Cambria" pitchFamily="34" charset="-122"/>
+                <a:cs typeface="Cambria" pitchFamily="34" charset="-120"/>
+              </a:rPr>
+              <a:t>широкие фразы</a:t>
+            </a:r>
+            <a:endParaRPr lang="en-US" sz="1200" dirty="0"/>
+          </a:p>
+        </p:txBody>
+      </p:sp>
+      <p:sp>
+        <p:nvSpPr>
+          <p:cNvPr id="26" name="Text 24"/>
+          <p:cNvSpPr txBox="1"/>
+          <p:nvPr/>
+        </p:nvSpPr>
+        <p:spPr>
+          <a:xfrm>
+            <a:off x="841248" y="5093208"/>
+            <a:ext cx="3026664" cy="438912"/>
+          </a:xfrm>
+          <a:prstGeom prst="rect">
+            <a:avLst/>
+          </a:prstGeom>
+          <a:noFill/>
+          <a:ln/>
+        </p:spPr>
+        <p:txBody>
+          <a:bodyPr wrap="square" lIns="0" tIns="0" rIns="0" bIns="0" rtlCol="0" anchor="ctr"/>
+          <a:lstStyle/>
+          <a:p>
+            <a:pPr indent="0" marL="0">
+              <a:lnSpc>
+                <a:spcPct val="115000"/>
+              </a:lnSpc>
+              <a:buNone/>
+            </a:pPr>
+            <a:r>
+              <a:rPr lang="en-US" sz="1000" dirty="0">
+                <a:solidFill>
+                  <a:srgbClr val="5B6B7A"/>
+                </a:solidFill>
+                <a:latin typeface="Calibri" pitchFamily="34" charset="0"/>
+                <a:ea typeface="Calibri" pitchFamily="34" charset="-122"/>
+                <a:cs typeface="Calibri" pitchFamily="34" charset="-120"/>
+              </a:rPr>
+              <a:t>Нева, простор, открытые панорамы</a:t>
+            </a:r>
+            <a:endParaRPr lang="en-US" sz="1000" dirty="0"/>
+          </a:p>
+        </p:txBody>
+      </p:sp>
+      <p:sp>
+        <p:nvSpPr>
+          <p:cNvPr id="27" name="Shape 25"/>
+          <p:cNvSpPr/>
+          <p:nvPr/>
+        </p:nvSpPr>
+        <p:spPr>
+          <a:xfrm>
+            <a:off x="4297680" y="3886200"/>
+            <a:ext cx="3429000" cy="1691640"/>
+          </a:xfrm>
+          <a:prstGeom prst="roundRect">
+            <a:avLst>
+              <a:gd name="adj" fmla="val 4324"/>
+            </a:avLst>
+          </a:prstGeom>
+          <a:solidFill>
+            <a:srgbClr val="EAF0F7"/>
+          </a:solidFill>
+          <a:ln/>
+        </p:spPr>
+      </p:sp>
+      <p:sp>
+        <p:nvSpPr>
+          <p:cNvPr id="28" name="Shape 26"/>
+          <p:cNvSpPr/>
+          <p:nvPr/>
+        </p:nvSpPr>
+        <p:spPr>
+          <a:xfrm>
+            <a:off x="4498848" y="4069080"/>
+            <a:ext cx="365760" cy="365760"/>
+          </a:xfrm>
+          <a:prstGeom prst="ellipse">
+            <a:avLst/>
+          </a:prstGeom>
+          <a:solidFill>
+            <a:srgbClr val="1B3A5C"/>
+          </a:solidFill>
+          <a:ln/>
+        </p:spPr>
+      </p:sp>
+      <p:sp>
+        <p:nvSpPr>
+          <p:cNvPr id="29" name="Text 27"/>
+          <p:cNvSpPr txBox="1"/>
+          <p:nvPr/>
+        </p:nvSpPr>
+        <p:spPr>
+          <a:xfrm>
+            <a:off x="4498848" y="4069080"/>
+            <a:ext cx="365760" cy="365760"/>
+          </a:xfrm>
+          <a:prstGeom prst="rect">
+            <a:avLst/>
+          </a:prstGeom>
+          <a:noFill/>
+          <a:ln/>
+        </p:spPr>
+        <p:txBody>
+          <a:bodyPr wrap="square" lIns="0" tIns="0" rIns="0" bIns="0" rtlCol="0" anchor="ctr"/>
+          <a:lstStyle/>
+          <a:p>
+            <a:pPr algn="ctr" indent="0" marL="0">
+              <a:buNone/>
+            </a:pPr>
+            <a:r>
+              <a:rPr lang="en-US" sz="1500" b="1" dirty="0">
+                <a:solidFill>
+                  <a:srgbClr val="FFFFFF"/>
+                </a:solidFill>
+                <a:latin typeface="Cambria" pitchFamily="34" charset="0"/>
+                <a:ea typeface="Cambria" pitchFamily="34" charset="-122"/>
+                <a:cs typeface="Cambria" pitchFamily="34" charset="-120"/>
+              </a:rPr>
+              <a:t>♪</a:t>
+            </a:r>
+            <a:endParaRPr lang="en-US" sz="1500" dirty="0"/>
+          </a:p>
+        </p:txBody>
+      </p:sp>
+      <p:sp>
+        <p:nvSpPr>
+          <p:cNvPr id="30" name="Text 28"/>
+          <p:cNvSpPr txBox="1"/>
+          <p:nvPr/>
+        </p:nvSpPr>
+        <p:spPr>
+          <a:xfrm>
+            <a:off x="4498848" y="4489704"/>
+            <a:ext cx="3026664" cy="566928"/>
+          </a:xfrm>
+          <a:prstGeom prst="rect">
+            <a:avLst/>
+          </a:prstGeom>
+          <a:noFill/>
+          <a:ln/>
+        </p:spPr>
+        <p:txBody>
+          <a:bodyPr wrap="square" lIns="0" tIns="0" rIns="0" bIns="0" rtlCol="0" anchor="ctr"/>
+          <a:lstStyle/>
+          <a:p>
+            <a:pPr indent="0" marL="0">
+              <a:lnSpc>
+                <a:spcPct val="108000"/>
+              </a:lnSpc>
+              <a:buNone/>
+            </a:pPr>
+            <a:r>
+              <a:rPr lang="en-US" sz="1200" b="1" dirty="0">
+                <a:solidFill>
+                  <a:srgbClr val="10253C"/>
+                </a:solidFill>
+                <a:latin typeface="Cambria" pitchFamily="34" charset="0"/>
+                <a:ea typeface="Cambria" pitchFamily="34" charset="-122"/>
+                <a:cs typeface="Cambria" pitchFamily="34" charset="-120"/>
+              </a:rPr>
+              <a:t>Минорные</a:t>
+            </a:r>
+            <a:endParaRPr lang="en-US" sz="1200" dirty="0"/>
+          </a:p>
+          <a:p>
+            <a:pPr indent="0" marL="0">
+              <a:lnSpc>
+                <a:spcPct val="108000"/>
+              </a:lnSpc>
+              <a:buNone/>
+            </a:pPr>
+            <a:r>
+              <a:rPr lang="en-US" sz="1200" b="1" dirty="0">
+                <a:solidFill>
+                  <a:srgbClr val="10253C"/>
+                </a:solidFill>
+                <a:latin typeface="Cambria" pitchFamily="34" charset="0"/>
+                <a:ea typeface="Cambria" pitchFamily="34" charset="-122"/>
+                <a:cs typeface="Cambria" pitchFamily="34" charset="-120"/>
+              </a:rPr>
+              <a:t>оттенки</a:t>
+            </a:r>
+            <a:endParaRPr lang="en-US" sz="1200" dirty="0"/>
+          </a:p>
+        </p:txBody>
+      </p:sp>
+      <p:sp>
+        <p:nvSpPr>
+          <p:cNvPr id="31" name="Text 29"/>
+          <p:cNvSpPr txBox="1"/>
+          <p:nvPr/>
+        </p:nvSpPr>
+        <p:spPr>
+          <a:xfrm>
+            <a:off x="4498848" y="5093208"/>
+            <a:ext cx="3026664" cy="438912"/>
+          </a:xfrm>
+          <a:prstGeom prst="rect">
+            <a:avLst/>
+          </a:prstGeom>
+          <a:noFill/>
+          <a:ln/>
+        </p:spPr>
+        <p:txBody>
+          <a:bodyPr wrap="square" lIns="0" tIns="0" rIns="0" bIns="0" rtlCol="0" anchor="ctr"/>
+          <a:lstStyle/>
+          <a:p>
+            <a:pPr indent="0" marL="0">
+              <a:lnSpc>
+                <a:spcPct val="115000"/>
+              </a:lnSpc>
+              <a:buNone/>
+            </a:pPr>
+            <a:r>
+              <a:rPr lang="en-US" sz="1000" dirty="0">
+                <a:solidFill>
+                  <a:srgbClr val="5B6B7A"/>
+                </a:solidFill>
+                <a:latin typeface="Calibri" pitchFamily="34" charset="0"/>
+                <a:ea typeface="Calibri" pitchFamily="34" charset="-122"/>
+                <a:cs typeface="Calibri" pitchFamily="34" charset="-120"/>
+              </a:rPr>
+              <a:t>Строгость и память о пережитом — прежде всего о блокаде</a:t>
+            </a:r>
+            <a:endParaRPr lang="en-US" sz="1000" dirty="0"/>
+          </a:p>
+        </p:txBody>
+      </p:sp>
+      <p:sp>
+        <p:nvSpPr>
+          <p:cNvPr id="32" name="Shape 30"/>
+          <p:cNvSpPr/>
+          <p:nvPr/>
+        </p:nvSpPr>
+        <p:spPr>
+          <a:xfrm>
+            <a:off x="7955280" y="3886200"/>
+            <a:ext cx="3429000" cy="1691640"/>
+          </a:xfrm>
+          <a:prstGeom prst="roundRect">
+            <a:avLst>
+              <a:gd name="adj" fmla="val 4324"/>
+            </a:avLst>
+          </a:prstGeom>
+          <a:solidFill>
+            <a:srgbClr val="10253C"/>
+          </a:solidFill>
+          <a:ln/>
+        </p:spPr>
+      </p:sp>
+      <p:sp>
+        <p:nvSpPr>
+          <p:cNvPr id="33" name="Text 31"/>
+          <p:cNvSpPr txBox="1"/>
+          <p:nvPr/>
+        </p:nvSpPr>
+        <p:spPr>
+          <a:xfrm>
+            <a:off x="8156448" y="4069080"/>
+            <a:ext cx="3026664" cy="1325880"/>
+          </a:xfrm>
+          <a:prstGeom prst="rect">
+            <a:avLst/>
+          </a:prstGeom>
+          <a:noFill/>
+          <a:ln/>
+        </p:spPr>
+        <p:txBody>
+          <a:bodyPr wrap="square" lIns="0" tIns="0" rIns="0" bIns="0" rtlCol="0" anchor="ctr"/>
+          <a:lstStyle/>
+          <a:p>
+            <a:pPr indent="0" marL="0">
+              <a:lnSpc>
+                <a:spcPct val="120000"/>
+              </a:lnSpc>
+              <a:buNone/>
+            </a:pPr>
+            <a:r>
+              <a:rPr lang="en-US" sz="1200" b="1" dirty="0">
+                <a:solidFill>
+                  <a:srgbClr val="C99A3E"/>
+                </a:solidFill>
+                <a:latin typeface="Calibri" pitchFamily="34" charset="0"/>
+                <a:ea typeface="Calibri" pitchFamily="34" charset="-122"/>
+                <a:cs typeface="Calibri" pitchFamily="34" charset="-120"/>
+              </a:rPr>
+              <a:t>«Медный всадник»
+</a:t>
+            </a:r>
+            <a:endParaRPr lang="en-US" sz="1200" dirty="0"/>
+          </a:p>
+          <a:p>
+            <a:pPr indent="0" marL="0">
+              <a:lnSpc>
+                <a:spcPct val="120000"/>
+              </a:lnSpc>
+              <a:buNone/>
+            </a:pPr>
+            <a:r>
+              <a:rPr lang="en-US" sz="1000" dirty="0">
+                <a:solidFill>
+                  <a:srgbClr val="EAF0F7"/>
+                </a:solidFill>
+                <a:latin typeface="Calibri" pitchFamily="34" charset="0"/>
+                <a:ea typeface="Calibri" pitchFamily="34" charset="-122"/>
+                <a:cs typeface="Calibri" pitchFamily="34" charset="-120"/>
+              </a:rPr>
               <a:t>Гимн родился из балета о памятнике Петру I — теме основания города силой воли, на пустом месте.</a:t>
             </a:r>
-            <a:endParaRPr lang="en-US" sz="1250" dirty="0"/>
+            <a:endParaRPr lang="en-US" sz="1200" dirty="0"/>
           </a:p>
         </p:txBody>
       </p:sp>

--- a/Гимн_Санкт-Петербурга_презентация.pptx
+++ b/Гимн_Санкт-Петербурга_презентация.pptx
@@ -596,10 +596,10 @@
           <a:p>
             <a:r>
               <a:rPr lang="en-US" dirty="0"/>
-              <a:t>Здравствуйте! У каждой страны есть гимн — его знают все. А вот то, что свой гимн есть и у города, многие даже не замечают. Хотя мы слышим его гораздо чаще, чем думаем: он звучит на Московском вокзале, когда прибывает поезд, на городских праздниках, на торжественных церемониях и в День города. Мелодия знакомая до мурашек — а если спросить, кто её написал и о чём там поётся, ответят единицы. Наш проект как раз об этом: мы взяли гимн Санкт-Петербурга — «Гимн великому городу» — и разобрались, откуда он взялся, что в нём зашифровано и зачем он вообще нужен современному городу.
+              <a:t>Здравствуйте! У каждой страны есть гимн, его знают все. А вот то, что свой гимн есть и у города, многие даже не замечают. Хотя мы слышим его гораздо чаще, чем думаем: он звучит на Московском вокзале, когда прибывает поезд, на городских праздниках, на торжественных церемониях, в День города. Мелодия знакомая до мурашек, а если спросить, кто её написал и о чём там поётся, ответят единицы. Наш проект как раз об этом. Мы взяли гимн Санкт-Петербурга, «Гимн великому городу», и разобрались, откуда он взялся, что в нём зашифровано и зачем он вообще нужен современному городу.
 Цель: изучить историю создания, символику и значение гимна Санкт-Петербурга и рассказать о нём так, чтобы после нашего выступления любой одноклассник мог объяснить, что это за музыка и почему она у города именно такая.
-Задачи: узнать, кто написал музыку и слова гимна и при каких обстоятельствах он создавался; разобраться, как гимн стал официальным символом города и что говорит об этом закон; проанализировать музыку и текст: какими средствами композитор передаёт характер Петербурга; сравнить наш гимн с гимном другого региона и найти сходства и различия; провести опрос и выяснить, как к гимну относятся сами петербуржцы; сделать вывод о том, какую роль гимн играет в жизни города сегодня.
-Гипотеза: мы предположили, что гимн Петербурга любят и узнают не за слова, а за музыку — и что большинство горожан не смогут назвать ни автора, ни текст. В конце проверим, так ли это.</a:t>
+Задачи: узнать, кто написал музыку и слова гимна и при каких обстоятельствах он создавался; разобраться, как гимн стал официальным символом города и что говорит об этом закон; проанализировать музыку и текст и понять, какими средствами композитор передаёт характер Петербурга; сравнить наш гимн с гимном другого региона и найти сходства и различия; провести опрос и выяснить, как к гимну относятся сами петербуржцы; сделать вывод о том, какую роль гимн играет в жизни города сегодня.
+Гипотеза: мы предположили, что гимн Петербурга любят и узнают не за слова, а за музыку, и что большинство горожан не смогут назвать ни автора, ни текст. В конце проверим, так ли это.</a:t>
             </a:r>
             <a:endParaRPr lang="en-US" dirty="0"/>
           </a:p>
@@ -687,9 +687,9 @@
           <a:p>
             <a:r>
               <a:rPr lang="en-US" dirty="0"/>
-              <a:t>Самое интересное, что гимном эта музыка была задумана не сразу. Её написал композитор Рейнгольд Морицевич Глиэр — в конце 1940-х годов он работал над балетом «Медный всадник» по поэме Пушкина. Балет поставили в Ленинграде, в Кировском театре — сегодня это Мариинский. Финал спектакля Глиэр назвал «Гимн великому городу»: торжественная, широкая мелодия, под которую на сцене как будто вырастает сам Петербург. Важно понимать, когда это было: город только-только пережил блокаду, стоял в руинах и восстанавливался. Музыка о великом городе, который не сломить, звучала тогда совсем не как красивая декорация — она попадала прямо в сердце. Зал принял финал так, что мелодия быстро зажила своей отдельной жизнью: её играли на концертах и по радио, и постепенно она стала музыкальным лицом Ленинграда.
-Официальным символом мелодия Глиэра стала в 1991 году — в том самом, когда городу вернули историческое имя Санкт-Петербург. Но всё это время у гимна была одна странность: музыка есть, а слов нет. Их пытались написать не раз, варианты обсуждали и отклоняли — слишком трудно было подобрать текст, который не испортил бы такую мелодию. Слова появились только в 2003 году, к 300-летию города: их автором стал петербургский поэт Олег Чупров, и текст утвердили городским законом.
-Любопытная деталь: получается, гимн Петербурга — это фрагмент балета. Не специально заказанная «официальная» музыка, а кусок театрального спектакля, который город выбрал себе сам, потому что узнал в нём себя.</a:t>
+              <a:t>Самое интересное, что гимном эта музыка была задумана не сразу. Её написал композитор Рейнгольд Морицевич Глиэр: в конце 1940-х годов он работал над балетом «Медный всадник» по поэме Пушкина. Балет поставили в Ленинграде, в Кировском театре (сегодня это Мариинский). Финал спектакля Глиэр назвал «Гимн великому городу»: торжественная, широкая мелодия, под которую на сцене как будто вырастает сам Петербург. Важно понимать, когда это было: город только-только пережил блокаду, стоял в руинах и восстанавливался. Музыка о великом городе, который не сломить, звучала тогда совсем не как красивая декорация, она попадала прямо в сердце. Зал принял финал так, что мелодия быстро зажила своей отдельной жизнью: её играли на концертах и по радио, и постепенно она стала музыкальным лицом Ленинграда.
+Официальным символом мелодия Глиэра стала в 1991 году, в тот самый год, когда городу вернули историческое имя Санкт-Петербург. Но всё это время у гимна была одна странность: музыка есть, а слов нет. Их пытались написать не раз, варианты обсуждали и отклоняли: слишком трудно было подобрать текст, который не испортил бы такую мелодию. Слова появились только в 2003 году, к 300-летию города. Их автором стал петербургский поэт Олег Чупров, и текст утвердили городским законом.
+Любопытная деталь: гимн Петербурга оказался фрагментом балета, а не специально заказанной «официальной» музыкой. Просто кусок театрального спектакля, который город выбрал себе сам, потому что узнал в нём себя.</a:t>
             </a:r>
             <a:endParaRPr lang="en-US" dirty="0"/>
           </a:p>
@@ -777,10 +777,10 @@
           <a:p>
             <a:r>
               <a:rPr lang="en-US" dirty="0"/>
-              <a:t>Теперь самое интересное — почему эта музыка «звучит как Петербург». Гимн начинается не с бодрого марша, а с широкой, тяжёлой и величественной темы. Темп медленный, шаг — как у большой торжественной процессии. Мощно вступают духовые и медь, звучание плотное, «каменное». Это очень точно: Петербург — город строгих линий, гранитных набережных, колонн и дворцов. В нём нет суеты, он размеренный и немного холодный. Мелодия при этом не агрессивная — она торжественная и гордая. А широкие, «разливающиеся» фразы легко услышать как Неву и простор, который открывается с набережной.
-Есть и второй слой, литературный. Музыка родилась в балете о «Медном всаднике», а это главный символ города — памятник Петру I, основателю Петербурга. То есть в гимн изначально вшита тема основания города, его создания из ничего, на болотах, силой воли. Отсюда и ощущение монументальности.
-Текст Олега Чупрова продолжает ту же линию — он начинается со слов о державном граде над Невою. В нём нет ни одного лишнего слова про политику или власть: речь идёт о городе, о реке, о славе, о верности и о людях, которые этот город любят и берегут. Гимн Петербурга получился не про государство, а про сам город.
-Главная мысль: услышав первые такты, человек, ни разу не бывавший здесь, всё равно поймёт — речь о чём-то большом, старинном и величественном.</a:t>
+              <a:t>Теперь самое интересное: почему эта музыка звучит именно как Петербург. Гимн начинается не с бодрого марша, а с широкой, тяжёлой и величественной темы. Темп медленный, шаг похож на большую торжественную процессию. Мощно вступают духовые и медь, звучание плотное, каменное. Это очень точно передаёт сам Петербург: город строгих линий, гранитных набережных, колонн и дворцов. В нём нет суеты, он размеренный и немного холодный. Мелодия при этом не агрессивная, она торжественная и гордая. А широкие, разливающиеся фразы легко услышать как Неву и простор, который открывается с набережной.
+Есть и второй слой, литературный. Музыка родилась в балете о «Медном всаднике», а это главный символ города, памятник Петру I, основателю Петербурга. То есть в гимн изначально вшита тема основания города, его создания из ничего, на болотах, силой воли. Отсюда и ощущение монументальности.
+Текст Олега Чупрова продолжает ту же линию: он начинается со слов о державном граде над Невою. В нём нет ни одного лишнего слова про политику или власть, речь идёт о городе, о реке, о славе, о верности и о людях, которые этот город любят и берегут. Гимн Петербурга получился не про государство, а про сам город.
+Главная мысль: услышав первые такты, человек, ни разу не бывавший здесь, всё равно поймёт, что речь о чём-то большом, старинном и величественном.</a:t>
             </a:r>
             <a:endParaRPr lang="en-US" dirty="0"/>
           </a:p>
@@ -868,9 +868,9 @@
           <a:p>
             <a:r>
               <a:rPr lang="en-US" dirty="0"/>
-              <a:t>Теория теорией, но нам было интересно, как к гимну относятся живые люди. Поэтому мы сделали практическую часть из трёх шагов. Первое — слушали: включали гимн знакомым без объявления и просили сказать, узнают ли они мелодию и какие чувства она вызывает. Второе — опрашивали: задавали несколько простых вопросов родным, друзьям и одноклассникам. Третье — сравнивали наш гимн с гимном Москвы.
-Сравнение получилось показательным. Гимн Москвы — «Дорогая моя столица» на музыку Исаака Дунаевского — это песня: у неё есть припев, её легко подхватить и спеть хором. Наш гимн устроен иначе: это оркестровая пьеса, которую сложно петь, зато невозможно ни с чем спутать. Москва в своём гимне поёт о себе как о любимой столице, тепло и по-домашнему. Петербург — молчит и звучит: строго, величественно, на расстоянии.
-Главный вывод опроса такой: мелодию узнают почти все — и почти никто не может назвать автора или процитировать хоть строчку текста. При этом отношение к гимну у людей тёплое: его называют красивым, «мурашечным», связывают с вокзалом, возвращением домой и Днём города. Наша гипотеза подтвердилась: петербуржцы любят свой гимн именно как музыку, а не как текст.
+              <a:t>Теория теорией, но нам было интересно, как к гимну относятся живые люди. Поэтому мы сделали практическую часть из трёх шагов. Первое: слушали. Включали гимн знакомым без объявления и просили сказать, узнают ли они мелодию и какие чувства она вызывает. Второе: опрашивали, задавали несколько простых вопросов родным, друзьям и одноклассникам. Третье: сравнивали наш гимн с гимном Москвы.
+Сравнение получилось показательным. Гимн Москвы, «Дорогая моя столица» на музыку Исаака Дунаевского, это песня: у неё есть припев, её легко подхватить и спеть хором. Наш гимн устроен иначе: это оркестровая пьеса, которую сложно петь, зато невозможно ни с чем спутать. Москва в своём гимне поёт о себе как о любимой столице, тепло и по-домашнему. Петербург скорее молчит и звучит: строго, величественно, на расстоянии.
+Главный вывод опроса такой: мелодию узнают почти все, а автора почти никто не может назвать или процитировать хоть строчку текста. При этом отношение к гимну у людей тёплое: его называют красивым, «мурашечным», связывают с вокзалом, возвращением домой и Днём города. Наша гипотеза подтвердилась: петербуржцы любят свой гимн именно как музыку, а не как текст.
 (Впишите в таблицу реальные ответы своих респондентов перед защитой.)</a:t>
             </a:r>
             <a:endParaRPr lang="en-US" dirty="0"/>
@@ -959,8 +959,8 @@
           <a:p>
             <a:r>
               <a:rPr lang="en-US" dirty="0"/>
-              <a:t>Мы начинали с простого вопроса — что мы вообще знаем о гимне своего города, кроме того, что он красивый. Оказалось, что за этой мелодией стоит целая история: музыка из балета о «Медном всаднике», написанная Глиэром в годы, когда город поднимался после блокады; полвека жизни без слов; официальный статус в 1991-м и текст Олега Чупрова, появившийся только к 300-летию города.
-Главное, что мы поняли: гимн — это не формальность из списка символов рядом с гербом и флагом. Это способ города рассказать о себе. Герб можно нарисовать, флаг — вывесить, а гимн человек чувствует: он слышит его на вокзале, на празднике, в День Победы — и в этот момент ощущает себя частью города. Именно поэтому мелодия Глиэра пережила и смену эпохи, и смену названия города. Петербург однажды узнал в ней себя — и не отпускает до сих пор.
+              <a:t>Мы начинали с простого вопроса: что мы вообще знаем о гимне своего города, кроме того, что он красивый. Оказалось, что за этой мелодией стоит целая история: музыка из балета о «Медном всаднике», написанная Глиэром в годы, когда город поднимался после блокады, полвека жизни без слов, официальный статус в 1991 году и текст Олега Чупрова, появившийся только к 300-летию города.
+Главное, что мы поняли: гимн стоит в одном ряду с гербом и флагом, но работает иначе. Герб можно нарисовать, флаг вывесить, а гимн человек просто чувствует: он слышит его на вокзале, на празднике, в День Победы, и в этот момент ощущает себя частью города. Именно поэтому мелодия Глиэра пережила и смену эпохи, и смену названия города. Петербург однажды узнал в ней себя и не отпускает до сих пор.
 Спасибо за внимание!</a:t>
             </a:r>
             <a:endParaRPr lang="en-US" dirty="0"/>
@@ -1616,7 +1616,7 @@
                 <a:ea typeface="Calibri" pitchFamily="34" charset="-122"/>
                 <a:cs typeface="Calibri" pitchFamily="34" charset="-120"/>
               </a:rPr>
-              <a:t>«Гимн великому городу»  ·  музыка — Рейнгольд Глиэр  ·  слова — Олег Чупров</a:t>
+              <a:t>«Гимн великому городу»  ·  музыка Рейнгольда Глиэра  ·  слова Олега Чупрова</a:t>
             </a:r>
             <a:endParaRPr lang="en-US" sz="1250" dirty="0"/>
           </a:p>
@@ -2151,7 +2151,7 @@
                 <a:ea typeface="Calibri" pitchFamily="34" charset="-122"/>
                 <a:cs typeface="Calibri" pitchFamily="34" charset="-120"/>
               </a:rPr>
-              <a:t>Но кто его написал и о чём он — знают единицы.</a:t>
+              <a:t>Но кто его написал и о чём он, знают единицы.</a:t>
             </a:r>
             <a:endParaRPr lang="en-US" sz="1450" dirty="0"/>
           </a:p>
@@ -2271,7 +2271,7 @@
                 <a:ea typeface="Calibri" pitchFamily="34" charset="-122"/>
                 <a:cs typeface="Calibri" pitchFamily="34" charset="-120"/>
               </a:rPr>
-              <a:t>Изучить историю создания, символику и значение гимна Санкт-Петербурга — и рассказать о нём так, чтобы каждый мог объяснить, что это за музыка и почему она именно такая.</a:t>
+              <a:t>Изучить историю создания, символику и значение гимна Санкт-Петербурга и рассказать о нём так, чтобы каждый мог объяснить, что это за музыка и почему она именно такая.</a:t>
             </a:r>
             <a:endParaRPr lang="en-US" sz="1400" dirty="0"/>
           </a:p>
@@ -2695,7 +2695,7 @@
                 <a:ea typeface="Calibri" pitchFamily="34" charset="-122"/>
                 <a:cs typeface="Calibri" pitchFamily="34" charset="-120"/>
               </a:rPr>
-              <a:t>петербуржцы любят гимн за музыку, а не за текст — большинство не назовёт автора и не вспомнит строчки.</a:t>
+              <a:t>петербуржцы любят гимн за музыку, а не за текст: большинство не назовёт автора и не вспомнит строчки.</a:t>
             </a:r>
             <a:endParaRPr lang="en-US" sz="1150" dirty="0"/>
           </a:p>
@@ -2979,7 +2979,7 @@
                 <a:ea typeface="Calibri" pitchFamily="34" charset="-122"/>
                 <a:cs typeface="Calibri" pitchFamily="34" charset="-120"/>
               </a:rPr>
-              <a:t> как финал балета «Медный всадник» по поэме Пушкина — премьера прошла в Ленинграде, только пережившем блокаду. Слова появились лишь через полвека.</a:t>
+              <a:t> как финал балета «Медный всадник» по поэме Пушкина. Премьера прошла в Ленинграде, только пережившем блокаду. Слова появились лишь через полвека.</a:t>
             </a:r>
             <a:endParaRPr lang="en-US" sz="1400" dirty="0"/>
           </a:p>
@@ -3108,7 +3108,7 @@
                 <a:ea typeface="Calibri" pitchFamily="34" charset="-122"/>
                 <a:cs typeface="Calibri" pitchFamily="34" charset="-120"/>
               </a:rPr>
-              <a:t>Премьера балета «Медный всадник» в Ленинграде. Финал — «Гимн великому городу»</a:t>
+              <a:t>Премьера балета «Медный всадник» в Ленинграде. Его финал назвали «Гимн великому городу»</a:t>
             </a:r>
             <a:endParaRPr lang="en-US" sz="1050" dirty="0"/>
           </a:p>
@@ -3320,7 +3320,7 @@
                 <a:ea typeface="Calibri" pitchFamily="34" charset="-122"/>
                 <a:cs typeface="Calibri" pitchFamily="34" charset="-120"/>
               </a:rPr>
-              <a:t>Музыка Глиэра официально утверждена гимном города — в год возвращения имени Санкт-Петербург</a:t>
+              <a:t>Музыка Глиэра официально утверждена гимном города, в год, когда ему вернули имя Санкт-Петербург</a:t>
             </a:r>
             <a:endParaRPr lang="en-US" sz="1050" dirty="0"/>
           </a:p>
@@ -3426,7 +3426,7 @@
                 <a:ea typeface="Calibri" pitchFamily="34" charset="-122"/>
                 <a:cs typeface="Calibri" pitchFamily="34" charset="-120"/>
               </a:rPr>
-              <a:t>К 300-летию города утверждён текст гимна — автор слов Олег Чупров</a:t>
+              <a:t>К 300-летию города утверждён текст гимна, его автор Олег Чупров</a:t>
             </a:r>
             <a:endParaRPr lang="en-US" sz="1050" dirty="0"/>
           </a:p>
@@ -3748,7 +3748,7 @@
                 <a:ea typeface="Calibri" pitchFamily="34" charset="-122"/>
                 <a:cs typeface="Calibri" pitchFamily="34" charset="-120"/>
               </a:rPr>
-              <a:t>Гимн не рассказывает о Петербурге словами — он его изображает звуком. Пять приёмов, в которых это слышно:</a:t>
+              <a:t>Гимн не рассказывает о Петербурге словами, а как будто рисует его звуком. Вот пять приёмов, в которых это слышно:</a:t>
             </a:r>
             <a:endParaRPr lang="en-US" sz="1350" dirty="0"/>
           </a:p>
@@ -3933,7 +3933,7 @@
                 <a:ea typeface="Calibri" pitchFamily="34" charset="-122"/>
                 <a:cs typeface="Calibri" pitchFamily="34" charset="-120"/>
               </a:rPr>
-              <a:t>Величие и спокойствие — город никуда не торопится</a:t>
+              <a:t>Величие и спокойствие: город никуда не торопится</a:t>
             </a:r>
             <a:endParaRPr lang="en-US" sz="1000" dirty="0"/>
           </a:p>
@@ -4673,7 +4673,7 @@
                 <a:ea typeface="Calibri" pitchFamily="34" charset="-122"/>
                 <a:cs typeface="Calibri" pitchFamily="34" charset="-120"/>
               </a:rPr>
-              <a:t>Строгость и память о пережитом — прежде всего о блокаде</a:t>
+              <a:t>Строгость и память о пережитом, прежде всего о блокаде</a:t>
             </a:r>
             <a:endParaRPr lang="en-US" sz="1000" dirty="0"/>
           </a:p>
@@ -4758,7 +4758,7 @@
                 <a:ea typeface="Calibri" pitchFamily="34" charset="-122"/>
                 <a:cs typeface="Calibri" pitchFamily="34" charset="-120"/>
               </a:rPr>
-              <a:t>Гимн родился из балета о памятнике Петру I — теме основания города силой воли, на пустом месте.</a:t>
+              <a:t>Гимн родился из балета о памятнике Петру I, о теме основания города силой воли, на пустом месте.</a:t>
             </a:r>
             <a:endParaRPr lang="en-US" sz="1200" dirty="0"/>
           </a:p>
@@ -5748,7 +5748,7 @@
                 <a:ea typeface="Calibri" pitchFamily="34" charset="-122"/>
                 <a:cs typeface="Calibri" pitchFamily="34" charset="-120"/>
               </a:rPr>
-              <a:t>Правый столбец — впишите реальные ответы своих респондентов.</a:t>
+              <a:t>Правый столбец: впишите реальные ответы своих респондентов.</a:t>
             </a:r>
             <a:endParaRPr lang="en-US" sz="950" dirty="0"/>
           </a:p>
@@ -6153,7 +6153,7 @@
                 <a:ea typeface="Calibri" pitchFamily="34" charset="-122"/>
                 <a:cs typeface="Calibri" pitchFamily="34" charset="-120"/>
               </a:rPr>
-              <a:t>мелодию узнают почти все, автора почти никто не называет — гипотеза подтвердилась.</a:t>
+              <a:t>мелодию узнают почти все, а автора почти никто не называет. Гипотеза подтвердилась.</a:t>
             </a:r>
             <a:endParaRPr lang="en-US" sz="1100" dirty="0"/>
           </a:p>
@@ -6324,7 +6324,7 @@
                 <a:ea typeface="Cambria" pitchFamily="34" charset="-122"/>
                 <a:cs typeface="Cambria" pitchFamily="34" charset="-120"/>
               </a:rPr>
-              <a:t>Гимн — это музыкальный портрет города</a:t>
+              <a:t>Гимн как музыкальный портрет города</a:t>
             </a:r>
             <a:endParaRPr lang="en-US" sz="3200" dirty="0"/>
           </a:p>
@@ -6366,7 +6366,7 @@
                 <a:ea typeface="Calibri" pitchFamily="34" charset="-122"/>
                 <a:cs typeface="Calibri" pitchFamily="34" charset="-120"/>
               </a:rPr>
-              <a:t>Мы начинали с вопроса — что мы вообще знаем о гимне своего города, кроме того, что он красивый. За мелодией оказалась история: музыка из балета о «Медном всаднике», написанная Глиэром в годы, когда город поднимался после блокады; полвека жизни без слов; официальный статус в 1991-м и текст Олега Чупрова, появившийся только к 300-летию.</a:t>
+              <a:t>Мы начинали с простого вопроса: что мы вообще знаем о гимне своего города, кроме того, что он красивый. За мелодией нашлась целая история: музыка из балета о «Медном всаднике», написанная Глиэром в годы, когда город поднимался после блокады, полвека жизни без слов, официальный статус в 1991 году и текст Олега Чупрова, появившийся только к 300-летию.</a:t>
             </a:r>
             <a:endParaRPr lang="en-US" sz="1350" dirty="0"/>
           </a:p>
@@ -6395,7 +6395,7 @@
                 <a:ea typeface="Calibri" pitchFamily="34" charset="-122"/>
                 <a:cs typeface="Calibri" pitchFamily="34" charset="-120"/>
               </a:rPr>
-              <a:t>Гимн — не формальность из списка символов рядом с гербом и флагом. Это способ города рассказать о себе: герб можно нарисовать, флаг — вывесить, а гимн человек чувствует и в этот момент ощущает себя частью города.</a:t>
+              <a:t>Гимн стоит в одном ряду с гербом и флагом, но работает иначе. Герб можно нарисовать, флаг вывесить, а гимн человек просто чувствует, и в этот момент ощущает себя частью города.</a:t>
             </a:r>
             <a:endParaRPr lang="en-US" sz="1350" dirty="0"/>
           </a:p>
@@ -6461,7 +6461,7 @@
                 <a:ea typeface="Calibri" pitchFamily="34" charset="-122"/>
                 <a:cs typeface="Calibri" pitchFamily="34" charset="-120"/>
               </a:rPr>
-              <a:t>Строгий, величественный и гордый — как сам Петербург. </a:t>
+              <a:t>Гимн получился таким же строгим и величественным, как сам город. </a:t>
             </a:r>
             <a:pPr indent="0" marL="0">
               <a:buNone/>
@@ -6686,7 +6686,7 @@
                 <a:ea typeface="Calibri" pitchFamily="34" charset="-122"/>
                 <a:cs typeface="Calibri" pitchFamily="34" charset="-120"/>
               </a:rPr>
-              <a:t>Р. М. Глиэр (1875–1956), балет «Медный всадник» по поэме А. С. Пушкина; премьера — Ленинград, Театр им. С. М. Кирова (ныне Мариинский), 1949 год</a:t>
+              <a:t>Р. М. Глиэр (1875–1956), балет «Медный всадник» по поэме А. С. Пушкина; премьера в Ленинграде, Театр им. С. М. Кирова (ныне Мариинский), 1949 год</a:t>
             </a:r>
             <a:endParaRPr lang="en-US" sz="1300" dirty="0"/>
           </a:p>
@@ -6748,7 +6748,7 @@
                 <a:ea typeface="Calibri" pitchFamily="34" charset="-122"/>
                 <a:cs typeface="Calibri" pitchFamily="34" charset="-120"/>
               </a:rPr>
-              <a:t>Финальный номер балета — «Гимн великому городу»</a:t>
+              <a:t>Финальный номер балета называется «Гимн великому городу»</a:t>
             </a:r>
             <a:endParaRPr lang="en-US" sz="1300" dirty="0"/>
           </a:p>
@@ -6810,7 +6810,7 @@
                 <a:ea typeface="Calibri" pitchFamily="34" charset="-122"/>
                 <a:cs typeface="Calibri" pitchFamily="34" charset="-120"/>
               </a:rPr>
-              <a:t>1991 год — музыка Глиэра утверждена гимном города</a:t>
+              <a:t>В 1991 году музыка Глиэра утверждена гимном города</a:t>
             </a:r>
             <a:endParaRPr lang="en-US" sz="1300" dirty="0"/>
           </a:p>
@@ -6872,7 +6872,7 @@
                 <a:ea typeface="Calibri" pitchFamily="34" charset="-122"/>
                 <a:cs typeface="Calibri" pitchFamily="34" charset="-120"/>
               </a:rPr>
-              <a:t>2003 год — законом Санкт-Петербурга утверждён текст гимна, автор слов — Олег Чупров</a:t>
+              <a:t>В 2003 году законом Санкт-Петербурга утверждён текст гимна, его автор Олег Чупров</a:t>
             </a:r>
             <a:endParaRPr lang="en-US" sz="1300" dirty="0"/>
           </a:p>
@@ -6934,7 +6934,7 @@
                 <a:ea typeface="Calibri" pitchFamily="34" charset="-122"/>
                 <a:cs typeface="Calibri" pitchFamily="34" charset="-120"/>
               </a:rPr>
-              <a:t>Для сравнения: гимн Москвы — «Дорогая моя столица», музыка И. О. Дунаевского</a:t>
+              <a:t>Для сравнения: гимн Москвы, «Дорогая моя столица», музыка И. О. Дунаевского</a:t>
             </a:r>
             <a:endParaRPr lang="en-US" sz="1300" dirty="0"/>
           </a:p>
